--- a/lecons/F2/19_F2_M2_FS07_Rural_Exodus_in_Cameroon.pptx
+++ b/lecons/F2/19_F2_M2_FS07_Rural_Exodus_in_Cameroon.pptx
@@ -55,9 +55,18 @@
     <p:sldId id="303" r:id="rId49"/>
     <p:sldId id="304" r:id="rId50"/>
     <p:sldId id="305" r:id="rId51"/>
+    <p:sldId id="306" r:id="rId52"/>
+    <p:sldId id="307" r:id="rId53"/>
+    <p:sldId id="308" r:id="rId54"/>
+    <p:sldId id="309" r:id="rId55"/>
+    <p:sldId id="310" r:id="rId56"/>
+    <p:sldId id="311" r:id="rId57"/>
+    <p:sldId id="312" r:id="rId58"/>
+    <p:sldId id="313" r:id="rId59"/>
+    <p:sldId id="314" r:id="rId60"/>
   </p:sldIdLst>
   <p:notesMasterIdLst>
-    <p:notesMasterId r:id="rId52"/>
+    <p:notesMasterId r:id="rId61"/>
   </p:notesMasterIdLst>
   <p:sldSz cx="12192000" cy="6858000"/>
   <p:notesSz cx="6858000" cy="12192000"/>
@@ -727,7 +736,7 @@
           <a:p>
             <a:r>
               <a:rPr lang="en-US" dirty="0"/>
-              <a:t>Good. Young people leave the village for towns.</a:t>
+              <a:t>Good. Young people leave the village, and the chief does not know how to keep them.</a:t>
             </a:r>
             <a:endParaRPr lang="en-US" dirty="0"/>
           </a:p>
@@ -1431,7 +1440,7 @@
           <a:p>
             <a:r>
               <a:rPr lang="en-US" dirty="0"/>
-              <a:t>Here is the question for Activity 1: What is rural exodus? Where do migrants go? Take one minute to think and write your answer in your rough notebook.</a:t>
+              <a:t>Here is the question for Activity 1: Towards which towns do most migrants of Cameroon go? Take one minute to think and write your answer in your rough notebook.</a:t>
             </a:r>
             <a:endParaRPr lang="en-US" dirty="0"/>
           </a:p>
@@ -1607,7 +1616,7 @@
           <a:p>
             <a:r>
               <a:rPr lang="en-US" dirty="0"/>
-              <a:t>Let us check the answer together. The massive movement of people from villages to towns; they go mainly to Douala and Yaoundé.</a:t>
+              <a:t>Let us check the answer together. Douala and Yaoundé.</a:t>
             </a:r>
             <a:endParaRPr lang="en-US" dirty="0"/>
           </a:p>
@@ -1783,7 +1792,7 @@
           <a:p>
             <a:r>
               <a:rPr lang="en-US" dirty="0"/>
-              <a:t>Here is the question for Activity 2: Give two push factors of rural exodus. Take one minute to think and write your answer in your rough notebook.</a:t>
+              <a:t>Here is the question for Activity 2: What in the village pushes young people to leave? Take one minute to think and write your answer in your rough notebook.</a:t>
             </a:r>
             <a:endParaRPr lang="en-US" dirty="0"/>
           </a:p>
@@ -1871,7 +1880,7 @@
           <a:p>
             <a:r>
               <a:rPr lang="en-US" dirty="0"/>
-              <a:t>Let us check the answer together. Lack of jobs and poor services in villages (also bad roads, poverty).</a:t>
+              <a:t>Let us check the answer together. Lack of jobs, poverty, bad roads and poor services.</a:t>
             </a:r>
             <a:endParaRPr lang="en-US" dirty="0"/>
           </a:p>
@@ -2047,7 +2056,7 @@
           <a:p>
             <a:r>
               <a:rPr lang="en-US" dirty="0"/>
-              <a:t>Here is the question for Activity 3: Give two pull factors of towns. Take one minute to think and write your answer in your rough notebook.</a:t>
+              <a:t>Here is the question for Activity 3: What attracts young people to towns? Take one minute to think and write your answer in your rough notebook.</a:t>
             </a:r>
             <a:endParaRPr lang="en-US" dirty="0"/>
           </a:p>
@@ -2135,7 +2144,7 @@
           <a:p>
             <a:r>
               <a:rPr lang="en-US" dirty="0"/>
-              <a:t>Let us check the answer together. Jobs and services such as schools, hospitals and electricity.</a:t>
+              <a:t>Let us check the answer together. Jobs, schools, hospitals, electricity and modern life.</a:t>
             </a:r>
             <a:endParaRPr lang="en-US" dirty="0"/>
           </a:p>
@@ -2311,7 +2320,7 @@
           <a:p>
             <a:r>
               <a:rPr lang="en-US" dirty="0"/>
-              <a:t>Here is the question for Activity 4: Give one consequence in villages and one in towns. Take one minute to think and write your answer in your rough notebook.</a:t>
+              <a:t>Here is the question for Activity 4: Where do many migrants live when they arrive in a big town? Take one minute to think and write your answer in your rough notebook.</a:t>
             </a:r>
             <a:endParaRPr lang="en-US" dirty="0"/>
           </a:p>
@@ -2399,7 +2408,7 @@
           <a:p>
             <a:r>
               <a:rPr lang="en-US" dirty="0"/>
-              <a:t>Let us check the answer together. Villages lose young workers and fields are abandoned; towns get slums and unemployment.</a:t>
+              <a:t>Let us check the answer together. In crowded poor quarters (slums).</a:t>
             </a:r>
             <a:endParaRPr lang="en-US" dirty="0"/>
           </a:p>
@@ -2663,7 +2672,7 @@
           <a:p>
             <a:r>
               <a:rPr lang="en-US" dirty="0"/>
-              <a:t>Here is the question for Activity 5: How can the country side be made more attractive? Take one minute to think and write your answer in your rough notebook.</a:t>
+              <a:t>Here is the question for Activity 5: How does a water point like this help to keep people in the village? Take one minute to think and write your answer in your rough notebook.</a:t>
             </a:r>
             <a:endParaRPr lang="en-US" dirty="0"/>
           </a:p>
@@ -2751,7 +2760,7 @@
           <a:p>
             <a:r>
               <a:rPr lang="en-US" dirty="0"/>
-              <a:t>Let us check the answer together. By building roads, schools, health centres and water points and creating jobs in farming and crafts.</a:t>
+              <a:t>Let us check the answer together. It improves daily life: clean water close to home, better health and more time for work.</a:t>
             </a:r>
             <a:endParaRPr lang="en-US" dirty="0"/>
           </a:p>
@@ -2927,7 +2936,7 @@
           <a:p>
             <a:r>
               <a:rPr lang="en-US" dirty="0"/>
-              <a:t>Let us copy the definitions. The key terms of this lesson are defined as follows. On this slide we have Rural exodus. Write each point on a new line, with the key term first, and explain it in your own words when we revise.</a:t>
+              <a:t>Let us copy the definitions. The key terms of this lesson are defined as follows. On this slide we have Rural exodus and Push factors. Write each point on a new line, with the key term first, and explain it in your own words when we revise. When you finish, we go to the next slide.</a:t>
             </a:r>
             <a:endParaRPr lang="en-US" dirty="0"/>
           </a:p>
@@ -3015,7 +3024,7 @@
           <a:p>
             <a:r>
               <a:rPr lang="en-US" dirty="0"/>
-              <a:t>Let us copy Causes. Rural exodus has the following causes. On this slide we have Push factors and Pull factors. Write each point on a new line, with the key term first, and explain it in your own words when we revise.</a:t>
+              <a:t>We continue with the definitions. On this slide we have Pull factors. Write each point on a new line, with the key term first, and explain it in your own words when we revise.</a:t>
             </a:r>
             <a:endParaRPr lang="en-US" dirty="0"/>
           </a:p>
@@ -3103,7 +3112,7 @@
           <a:p>
             <a:r>
               <a:rPr lang="en-US" dirty="0"/>
-              <a:t>Now draw this illustration in your notebook: migration flows in Cameroon. Give it a title and label it clearly.</a:t>
+              <a:t>Let us copy Push Factors. The following conditions push people out of villages. Copy the point on Poverty and unemployment on the left, then draw the diagram on the right: a bad rural road. Give it a title and label it clearly.</a:t>
             </a:r>
             <a:endParaRPr lang="en-US" dirty="0"/>
           </a:p>
@@ -3191,7 +3200,7 @@
           <a:p>
             <a:r>
               <a:rPr lang="en-US" dirty="0"/>
-              <a:t>Let us copy Consequences. Rural exodus has the following consequences. On this slide we have In villages and In towns. Write each point on a new line, with the key term first, and explain it in your own words when we revise.</a:t>
+              <a:t>We continue with Push Factors. On this slide we have Lack of social amenities and Bad roads. Write each point on a new line, with the key term first, and explain it in your own words when we revise. When you finish, we go to the next slide.</a:t>
             </a:r>
             <a:endParaRPr lang="en-US" dirty="0"/>
           </a:p>
@@ -3279,7 +3288,7 @@
           <a:p>
             <a:r>
               <a:rPr lang="en-US" dirty="0"/>
-              <a:t>Let us copy Making the Country Side More Attractive. The country side can be made attractive by the following measures. On this slide we have Infrastructure and Jobs. Write each point on a new line, with the key term first, and explain it in your own words when we revise. When you finish, we go to the next slide.</a:t>
+              <a:t>We continue with Push Factors. On this slide we have Shortage of land and hard work and Insecurity and traditions. Write each point on a new line, with the key term first, and explain it in your own words when we revise.</a:t>
             </a:r>
             <a:endParaRPr lang="en-US" dirty="0"/>
           </a:p>
@@ -3367,7 +3376,7 @@
           <a:p>
             <a:r>
               <a:rPr lang="en-US" dirty="0"/>
-              <a:t>We continue with Making the Country Side More Attractive. On this slide we have Culture. Write each point on a new line, with the key term first, and explain it in your own words when we revise.</a:t>
+              <a:t>Let us copy Pull Factors. The following attractions pull people to towns. Copy the point on Jobs on the left, then draw the diagram on the right: yaoundé. Give it a title and label it clearly.</a:t>
             </a:r>
             <a:endParaRPr lang="en-US" dirty="0"/>
           </a:p>
@@ -3543,7 +3552,7 @@
           <a:p>
             <a:r>
               <a:rPr lang="en-US" dirty="0"/>
-              <a:t>Now let us check what you have understood. Question 1: Give two causes of rural exodus. Answer in your exercise book.</a:t>
+              <a:t>We continue with Pull Factors. On this slide we have Social amenities, Modern life and Family links. Write each point on a new line, with the key term first, and explain it in your own words when we revise.</a:t>
             </a:r>
             <a:endParaRPr lang="en-US" dirty="0"/>
           </a:p>
@@ -3631,7 +3640,7 @@
           <a:p>
             <a:r>
               <a:rPr lang="en-US" dirty="0"/>
-              <a:t>The expected answer is: lack of jobs in villages and attractive services in towns. If you got it right, well done.</a:t>
+              <a:t>Let us copy In the Country Side. Rural exodus has the following consequences in villages. On this slide we have Loss of young workers. Write each point on a new line, with the key term first, and explain it in your own words when we revise. When you finish, we go to the next slide.</a:t>
             </a:r>
             <a:endParaRPr lang="en-US" dirty="0"/>
           </a:p>
@@ -3719,7 +3728,7 @@
           <a:p>
             <a:r>
               <a:rPr lang="en-US" dirty="0"/>
-              <a:t>Now let us check what you have understood. Question 2: Give two ways to make villages attractive. Answer in your exercise book.</a:t>
+              <a:t>We continue with In the Country Side. On this slide we have Fall of food production, Money from migrants and Village development. Write each point on a new line, with the key term first, and explain it in your own words when we revise.</a:t>
             </a:r>
             <a:endParaRPr lang="en-US" dirty="0"/>
           </a:p>
@@ -3807,7 +3816,7 @@
           <a:p>
             <a:r>
               <a:rPr lang="en-US" dirty="0"/>
-              <a:t>The expected answer is: build roads and create jobs in modern farming. If you got it right, well done.</a:t>
+              <a:t>Let us copy In the Towns. Rural exodus has the following consequences in towns. Copy the point on Rapid growth and slums on the left, then draw the diagram on the right: a slum. Give it a title and label it clearly.</a:t>
             </a:r>
             <a:endParaRPr lang="en-US" dirty="0"/>
           </a:p>
@@ -3895,7 +3904,7 @@
           <a:p>
             <a:r>
               <a:rPr lang="en-US" dirty="0"/>
-              <a:t>For those who need more practice, fill in the blanks in your exercise book. The answers are: number 1, exodus; number 2, pull; number 3, push.</a:t>
+              <a:t>We continue with In the Towns. On this slide we have Unemployment, Pressure on services and Insecurity. Write each point on a new line, with the key term first, and explain it in your own words when we revise.</a:t>
             </a:r>
             <a:endParaRPr lang="en-US" dirty="0"/>
           </a:p>
@@ -3983,7 +3992,7 @@
           <a:p>
             <a:r>
               <a:rPr lang="en-US" dirty="0"/>
-              <a:t>For your homework: Propose three projects that could keep young people in your village. We shall correct it at the beginning of our next lesson.</a:t>
+              <a:t>Let us copy Making the Country Side More Attractive. The country side can be made more attractive by the following measures. On this slide we have Roads. Write each point on a new line, with the key term first, and explain it in your own words when we revise.</a:t>
             </a:r>
             <a:endParaRPr lang="en-US" dirty="0"/>
           </a:p>
@@ -4071,7 +4080,7 @@
           <a:p>
             <a:r>
               <a:rPr lang="en-US" dirty="0"/>
-              <a:t>Let us play the bilingual game. I say a word in English, and you give me the French word. Then we do the reverse.</a:t>
+              <a:t>Copy the point on Social amenities on the left, then draw the diagram on the right: a village water pump. Give it a title and label it clearly.</a:t>
             </a:r>
             <a:endParaRPr lang="en-US" dirty="0"/>
           </a:p>
@@ -4159,7 +4168,7 @@
           <a:p>
             <a:r>
               <a:rPr lang="en-US" dirty="0"/>
-              <a:t>I record this information in the official logbook of the class after the lesson.</a:t>
+              <a:t>We continue with Making the Country Side More Attractive. On this slide we have Modern farming and Cooperatives and CIGs. Write each point on a new line, with the key term first, and explain it in your own words when we revise. When you finish, we go to the next slide.</a:t>
             </a:r>
             <a:endParaRPr lang="en-US" dirty="0"/>
           </a:p>
@@ -4247,7 +4256,7 @@
           <a:p>
             <a:r>
               <a:rPr lang="en-US" dirty="0"/>
-              <a:t>I complete the second page of the logbook: the matter taught, the evaluation, the homework and the attendance.</a:t>
+              <a:t>We continue with Making the Country Side More Attractive. On this slide we have Rural jobs and Culture and leisure. Write each point on a new line, with the key term first, and explain it in your own words when we revise.</a:t>
             </a:r>
             <a:endParaRPr lang="en-US" dirty="0"/>
           </a:p>
@@ -4335,7 +4344,7 @@
           <a:p>
             <a:r>
               <a:rPr lang="en-US" dirty="0"/>
-              <a:t>This slide is for me, the teacher: it gives the timing of the lesson and what to do if the projector is not available.</a:t>
+              <a:t>Now let us check what you have understood. Question 1: Give two causes of rural exodus. Answer in your exercise book.</a:t>
             </a:r>
             <a:endParaRPr lang="en-US" dirty="0"/>
           </a:p>
@@ -4511,7 +4520,7 @@
           <a:p>
             <a:r>
               <a:rPr lang="en-US" dirty="0"/>
-              <a:t>These are the references and picture credits used to prepare this lesson.</a:t>
+              <a:t>The expected answer is: lack of jobs in villages and attractive services in towns. If you got it right, well done.</a:t>
             </a:r>
             <a:endParaRPr lang="en-US" dirty="0"/>
           </a:p>
@@ -4535,6 +4544,798 @@
             <a:fld id="{F7021451-1387-4CA6-816F-3879F97B5CBC}" type="slidenum">
               <a:rPr lang="en-US"/>
               <a:t>50</a:t>
+            </a:fld>
+            <a:endParaRPr lang="en-US"/>
+          </a:p>
+        </p:txBody>
+      </p:sp>
+    </p:spTree>
+    <p:extLst>
+      <p:ext uri="{BB962C8B-B14F-4D97-AF65-F5344CB8AC3E}">
+        <p14:creationId xmlns:p14="http://schemas.microsoft.com/office/powerpoint/2010/main" val="1024086991"/>
+      </p:ext>
+    </p:extLst>
+  </p:cSld>
+  <p:clrMapOvr>
+    <a:masterClrMapping/>
+  </p:clrMapOvr>
+</p:notes>
+</file>
+
+<file path=ppt/notesSlides/notesSlide51.xml><?xml version="1.0" encoding="utf-8"?>
+<p:notes xmlns:a="http://schemas.openxmlformats.org/drawingml/2006/main" xmlns:r="http://schemas.openxmlformats.org/officeDocument/2006/relationships" xmlns:p="http://schemas.openxmlformats.org/presentationml/2006/main">
+  <p:cSld>
+    <p:spTree>
+      <p:nvGrpSpPr>
+        <p:cNvPr id="1" name=""/>
+        <p:cNvGrpSpPr/>
+        <p:nvPr/>
+      </p:nvGrpSpPr>
+      <p:grpSpPr>
+        <a:xfrm>
+          <a:off x="0" y="0"/>
+          <a:ext cx="0" cy="0"/>
+          <a:chOff x="0" y="0"/>
+          <a:chExt cx="0" cy="0"/>
+        </a:xfrm>
+      </p:grpSpPr>
+      <p:sp>
+        <p:nvSpPr>
+          <p:cNvPr id="2" name="Slide Image Placeholder 1"/>
+          <p:cNvSpPr>
+            <a:spLocks noGrp="1" noRot="1" noChangeAspect="1"/>
+          </p:cNvSpPr>
+          <p:nvPr>
+            <p:ph type="sldImg"/>
+          </p:nvPr>
+        </p:nvSpPr>
+        <p:spPr/>
+      </p:sp>
+      <p:sp>
+        <p:nvSpPr>
+          <p:cNvPr id="3" name="Notes Placeholder 2"/>
+          <p:cNvSpPr>
+            <a:spLocks noGrp="1"/>
+          </p:cNvSpPr>
+          <p:nvPr>
+            <p:ph type="body" idx="1"/>
+          </p:nvPr>
+        </p:nvSpPr>
+        <p:spPr/>
+        <p:txBody>
+          <a:bodyPr/>
+          <a:lstStyle/>
+          <a:p>
+            <a:r>
+              <a:rPr lang="en-US" dirty="0"/>
+              <a:t>Now let us check what you have understood. Question 2: Give two ways to make villages attractive. Answer in your exercise book.</a:t>
+            </a:r>
+            <a:endParaRPr lang="en-US" dirty="0"/>
+          </a:p>
+        </p:txBody>
+      </p:sp>
+      <p:sp>
+        <p:nvSpPr>
+          <p:cNvPr id="4" name="Slide Number Placeholder 3"/>
+          <p:cNvSpPr>
+            <a:spLocks noGrp="1"/>
+          </p:cNvSpPr>
+          <p:nvPr>
+            <p:ph type="sldNum" sz="quarter" idx="10"/>
+          </p:nvPr>
+        </p:nvSpPr>
+        <p:spPr/>
+        <p:txBody>
+          <a:bodyPr/>
+          <a:lstStyle/>
+          <a:p>
+            <a:fld id="{F7021451-1387-4CA6-816F-3879F97B5CBC}" type="slidenum">
+              <a:rPr lang="en-US"/>
+              <a:t>51</a:t>
+            </a:fld>
+            <a:endParaRPr lang="en-US"/>
+          </a:p>
+        </p:txBody>
+      </p:sp>
+    </p:spTree>
+    <p:extLst>
+      <p:ext uri="{BB962C8B-B14F-4D97-AF65-F5344CB8AC3E}">
+        <p14:creationId xmlns:p14="http://schemas.microsoft.com/office/powerpoint/2010/main" val="1024086991"/>
+      </p:ext>
+    </p:extLst>
+  </p:cSld>
+  <p:clrMapOvr>
+    <a:masterClrMapping/>
+  </p:clrMapOvr>
+</p:notes>
+</file>
+
+<file path=ppt/notesSlides/notesSlide52.xml><?xml version="1.0" encoding="utf-8"?>
+<p:notes xmlns:a="http://schemas.openxmlformats.org/drawingml/2006/main" xmlns:r="http://schemas.openxmlformats.org/officeDocument/2006/relationships" xmlns:p="http://schemas.openxmlformats.org/presentationml/2006/main">
+  <p:cSld>
+    <p:spTree>
+      <p:nvGrpSpPr>
+        <p:cNvPr id="1" name=""/>
+        <p:cNvGrpSpPr/>
+        <p:nvPr/>
+      </p:nvGrpSpPr>
+      <p:grpSpPr>
+        <a:xfrm>
+          <a:off x="0" y="0"/>
+          <a:ext cx="0" cy="0"/>
+          <a:chOff x="0" y="0"/>
+          <a:chExt cx="0" cy="0"/>
+        </a:xfrm>
+      </p:grpSpPr>
+      <p:sp>
+        <p:nvSpPr>
+          <p:cNvPr id="2" name="Slide Image Placeholder 1"/>
+          <p:cNvSpPr>
+            <a:spLocks noGrp="1" noRot="1" noChangeAspect="1"/>
+          </p:cNvSpPr>
+          <p:nvPr>
+            <p:ph type="sldImg"/>
+          </p:nvPr>
+        </p:nvSpPr>
+        <p:spPr/>
+      </p:sp>
+      <p:sp>
+        <p:nvSpPr>
+          <p:cNvPr id="3" name="Notes Placeholder 2"/>
+          <p:cNvSpPr>
+            <a:spLocks noGrp="1"/>
+          </p:cNvSpPr>
+          <p:nvPr>
+            <p:ph type="body" idx="1"/>
+          </p:nvPr>
+        </p:nvSpPr>
+        <p:spPr/>
+        <p:txBody>
+          <a:bodyPr/>
+          <a:lstStyle/>
+          <a:p>
+            <a:r>
+              <a:rPr lang="en-US" dirty="0"/>
+              <a:t>The expected answer is: build roads and create jobs in modern farming. If you got it right, well done.</a:t>
+            </a:r>
+            <a:endParaRPr lang="en-US" dirty="0"/>
+          </a:p>
+        </p:txBody>
+      </p:sp>
+      <p:sp>
+        <p:nvSpPr>
+          <p:cNvPr id="4" name="Slide Number Placeholder 3"/>
+          <p:cNvSpPr>
+            <a:spLocks noGrp="1"/>
+          </p:cNvSpPr>
+          <p:nvPr>
+            <p:ph type="sldNum" sz="quarter" idx="10"/>
+          </p:nvPr>
+        </p:nvSpPr>
+        <p:spPr/>
+        <p:txBody>
+          <a:bodyPr/>
+          <a:lstStyle/>
+          <a:p>
+            <a:fld id="{F7021451-1387-4CA6-816F-3879F97B5CBC}" type="slidenum">
+              <a:rPr lang="en-US"/>
+              <a:t>52</a:t>
+            </a:fld>
+            <a:endParaRPr lang="en-US"/>
+          </a:p>
+        </p:txBody>
+      </p:sp>
+    </p:spTree>
+    <p:extLst>
+      <p:ext uri="{BB962C8B-B14F-4D97-AF65-F5344CB8AC3E}">
+        <p14:creationId xmlns:p14="http://schemas.microsoft.com/office/powerpoint/2010/main" val="1024086991"/>
+      </p:ext>
+    </p:extLst>
+  </p:cSld>
+  <p:clrMapOvr>
+    <a:masterClrMapping/>
+  </p:clrMapOvr>
+</p:notes>
+</file>
+
+<file path=ppt/notesSlides/notesSlide53.xml><?xml version="1.0" encoding="utf-8"?>
+<p:notes xmlns:a="http://schemas.openxmlformats.org/drawingml/2006/main" xmlns:r="http://schemas.openxmlformats.org/officeDocument/2006/relationships" xmlns:p="http://schemas.openxmlformats.org/presentationml/2006/main">
+  <p:cSld>
+    <p:spTree>
+      <p:nvGrpSpPr>
+        <p:cNvPr id="1" name=""/>
+        <p:cNvGrpSpPr/>
+        <p:nvPr/>
+      </p:nvGrpSpPr>
+      <p:grpSpPr>
+        <a:xfrm>
+          <a:off x="0" y="0"/>
+          <a:ext cx="0" cy="0"/>
+          <a:chOff x="0" y="0"/>
+          <a:chExt cx="0" cy="0"/>
+        </a:xfrm>
+      </p:grpSpPr>
+      <p:sp>
+        <p:nvSpPr>
+          <p:cNvPr id="2" name="Slide Image Placeholder 1"/>
+          <p:cNvSpPr>
+            <a:spLocks noGrp="1" noRot="1" noChangeAspect="1"/>
+          </p:cNvSpPr>
+          <p:nvPr>
+            <p:ph type="sldImg"/>
+          </p:nvPr>
+        </p:nvSpPr>
+        <p:spPr/>
+      </p:sp>
+      <p:sp>
+        <p:nvSpPr>
+          <p:cNvPr id="3" name="Notes Placeholder 2"/>
+          <p:cNvSpPr>
+            <a:spLocks noGrp="1"/>
+          </p:cNvSpPr>
+          <p:nvPr>
+            <p:ph type="body" idx="1"/>
+          </p:nvPr>
+        </p:nvSpPr>
+        <p:spPr/>
+        <p:txBody>
+          <a:bodyPr/>
+          <a:lstStyle/>
+          <a:p>
+            <a:r>
+              <a:rPr lang="en-US" dirty="0"/>
+              <a:t>For those who need more practice, fill in the blanks in your exercise book. The answers are: number 1, exodus; number 2, pull; number 3, push.</a:t>
+            </a:r>
+            <a:endParaRPr lang="en-US" dirty="0"/>
+          </a:p>
+        </p:txBody>
+      </p:sp>
+      <p:sp>
+        <p:nvSpPr>
+          <p:cNvPr id="4" name="Slide Number Placeholder 3"/>
+          <p:cNvSpPr>
+            <a:spLocks noGrp="1"/>
+          </p:cNvSpPr>
+          <p:nvPr>
+            <p:ph type="sldNum" sz="quarter" idx="10"/>
+          </p:nvPr>
+        </p:nvSpPr>
+        <p:spPr/>
+        <p:txBody>
+          <a:bodyPr/>
+          <a:lstStyle/>
+          <a:p>
+            <a:fld id="{F7021451-1387-4CA6-816F-3879F97B5CBC}" type="slidenum">
+              <a:rPr lang="en-US"/>
+              <a:t>53</a:t>
+            </a:fld>
+            <a:endParaRPr lang="en-US"/>
+          </a:p>
+        </p:txBody>
+      </p:sp>
+    </p:spTree>
+    <p:extLst>
+      <p:ext uri="{BB962C8B-B14F-4D97-AF65-F5344CB8AC3E}">
+        <p14:creationId xmlns:p14="http://schemas.microsoft.com/office/powerpoint/2010/main" val="1024086991"/>
+      </p:ext>
+    </p:extLst>
+  </p:cSld>
+  <p:clrMapOvr>
+    <a:masterClrMapping/>
+  </p:clrMapOvr>
+</p:notes>
+</file>
+
+<file path=ppt/notesSlides/notesSlide54.xml><?xml version="1.0" encoding="utf-8"?>
+<p:notes xmlns:a="http://schemas.openxmlformats.org/drawingml/2006/main" xmlns:r="http://schemas.openxmlformats.org/officeDocument/2006/relationships" xmlns:p="http://schemas.openxmlformats.org/presentationml/2006/main">
+  <p:cSld>
+    <p:spTree>
+      <p:nvGrpSpPr>
+        <p:cNvPr id="1" name=""/>
+        <p:cNvGrpSpPr/>
+        <p:nvPr/>
+      </p:nvGrpSpPr>
+      <p:grpSpPr>
+        <a:xfrm>
+          <a:off x="0" y="0"/>
+          <a:ext cx="0" cy="0"/>
+          <a:chOff x="0" y="0"/>
+          <a:chExt cx="0" cy="0"/>
+        </a:xfrm>
+      </p:grpSpPr>
+      <p:sp>
+        <p:nvSpPr>
+          <p:cNvPr id="2" name="Slide Image Placeholder 1"/>
+          <p:cNvSpPr>
+            <a:spLocks noGrp="1" noRot="1" noChangeAspect="1"/>
+          </p:cNvSpPr>
+          <p:nvPr>
+            <p:ph type="sldImg"/>
+          </p:nvPr>
+        </p:nvSpPr>
+        <p:spPr/>
+      </p:sp>
+      <p:sp>
+        <p:nvSpPr>
+          <p:cNvPr id="3" name="Notes Placeholder 2"/>
+          <p:cNvSpPr>
+            <a:spLocks noGrp="1"/>
+          </p:cNvSpPr>
+          <p:nvPr>
+            <p:ph type="body" idx="1"/>
+          </p:nvPr>
+        </p:nvSpPr>
+        <p:spPr/>
+        <p:txBody>
+          <a:bodyPr/>
+          <a:lstStyle/>
+          <a:p>
+            <a:r>
+              <a:rPr lang="en-US" dirty="0"/>
+              <a:t>For your homework: Propose three projects that could keep young people in your village. We shall correct it at the beginning of our next lesson.</a:t>
+            </a:r>
+            <a:endParaRPr lang="en-US" dirty="0"/>
+          </a:p>
+        </p:txBody>
+      </p:sp>
+      <p:sp>
+        <p:nvSpPr>
+          <p:cNvPr id="4" name="Slide Number Placeholder 3"/>
+          <p:cNvSpPr>
+            <a:spLocks noGrp="1"/>
+          </p:cNvSpPr>
+          <p:nvPr>
+            <p:ph type="sldNum" sz="quarter" idx="10"/>
+          </p:nvPr>
+        </p:nvSpPr>
+        <p:spPr/>
+        <p:txBody>
+          <a:bodyPr/>
+          <a:lstStyle/>
+          <a:p>
+            <a:fld id="{F7021451-1387-4CA6-816F-3879F97B5CBC}" type="slidenum">
+              <a:rPr lang="en-US"/>
+              <a:t>54</a:t>
+            </a:fld>
+            <a:endParaRPr lang="en-US"/>
+          </a:p>
+        </p:txBody>
+      </p:sp>
+    </p:spTree>
+    <p:extLst>
+      <p:ext uri="{BB962C8B-B14F-4D97-AF65-F5344CB8AC3E}">
+        <p14:creationId xmlns:p14="http://schemas.microsoft.com/office/powerpoint/2010/main" val="1024086991"/>
+      </p:ext>
+    </p:extLst>
+  </p:cSld>
+  <p:clrMapOvr>
+    <a:masterClrMapping/>
+  </p:clrMapOvr>
+</p:notes>
+</file>
+
+<file path=ppt/notesSlides/notesSlide55.xml><?xml version="1.0" encoding="utf-8"?>
+<p:notes xmlns:a="http://schemas.openxmlformats.org/drawingml/2006/main" xmlns:r="http://schemas.openxmlformats.org/officeDocument/2006/relationships" xmlns:p="http://schemas.openxmlformats.org/presentationml/2006/main">
+  <p:cSld>
+    <p:spTree>
+      <p:nvGrpSpPr>
+        <p:cNvPr id="1" name=""/>
+        <p:cNvGrpSpPr/>
+        <p:nvPr/>
+      </p:nvGrpSpPr>
+      <p:grpSpPr>
+        <a:xfrm>
+          <a:off x="0" y="0"/>
+          <a:ext cx="0" cy="0"/>
+          <a:chOff x="0" y="0"/>
+          <a:chExt cx="0" cy="0"/>
+        </a:xfrm>
+      </p:grpSpPr>
+      <p:sp>
+        <p:nvSpPr>
+          <p:cNvPr id="2" name="Slide Image Placeholder 1"/>
+          <p:cNvSpPr>
+            <a:spLocks noGrp="1" noRot="1" noChangeAspect="1"/>
+          </p:cNvSpPr>
+          <p:nvPr>
+            <p:ph type="sldImg"/>
+          </p:nvPr>
+        </p:nvSpPr>
+        <p:spPr/>
+      </p:sp>
+      <p:sp>
+        <p:nvSpPr>
+          <p:cNvPr id="3" name="Notes Placeholder 2"/>
+          <p:cNvSpPr>
+            <a:spLocks noGrp="1"/>
+          </p:cNvSpPr>
+          <p:nvPr>
+            <p:ph type="body" idx="1"/>
+          </p:nvPr>
+        </p:nvSpPr>
+        <p:spPr/>
+        <p:txBody>
+          <a:bodyPr/>
+          <a:lstStyle/>
+          <a:p>
+            <a:r>
+              <a:rPr lang="en-US" dirty="0"/>
+              <a:t>Let us play the bilingual game. I say a word in English, and you give me the French word. Then we do the reverse.</a:t>
+            </a:r>
+            <a:endParaRPr lang="en-US" dirty="0"/>
+          </a:p>
+        </p:txBody>
+      </p:sp>
+      <p:sp>
+        <p:nvSpPr>
+          <p:cNvPr id="4" name="Slide Number Placeholder 3"/>
+          <p:cNvSpPr>
+            <a:spLocks noGrp="1"/>
+          </p:cNvSpPr>
+          <p:nvPr>
+            <p:ph type="sldNum" sz="quarter" idx="10"/>
+          </p:nvPr>
+        </p:nvSpPr>
+        <p:spPr/>
+        <p:txBody>
+          <a:bodyPr/>
+          <a:lstStyle/>
+          <a:p>
+            <a:fld id="{F7021451-1387-4CA6-816F-3879F97B5CBC}" type="slidenum">
+              <a:rPr lang="en-US"/>
+              <a:t>55</a:t>
+            </a:fld>
+            <a:endParaRPr lang="en-US"/>
+          </a:p>
+        </p:txBody>
+      </p:sp>
+    </p:spTree>
+    <p:extLst>
+      <p:ext uri="{BB962C8B-B14F-4D97-AF65-F5344CB8AC3E}">
+        <p14:creationId xmlns:p14="http://schemas.microsoft.com/office/powerpoint/2010/main" val="1024086991"/>
+      </p:ext>
+    </p:extLst>
+  </p:cSld>
+  <p:clrMapOvr>
+    <a:masterClrMapping/>
+  </p:clrMapOvr>
+</p:notes>
+</file>
+
+<file path=ppt/notesSlides/notesSlide56.xml><?xml version="1.0" encoding="utf-8"?>
+<p:notes xmlns:a="http://schemas.openxmlformats.org/drawingml/2006/main" xmlns:r="http://schemas.openxmlformats.org/officeDocument/2006/relationships" xmlns:p="http://schemas.openxmlformats.org/presentationml/2006/main">
+  <p:cSld>
+    <p:spTree>
+      <p:nvGrpSpPr>
+        <p:cNvPr id="1" name=""/>
+        <p:cNvGrpSpPr/>
+        <p:nvPr/>
+      </p:nvGrpSpPr>
+      <p:grpSpPr>
+        <a:xfrm>
+          <a:off x="0" y="0"/>
+          <a:ext cx="0" cy="0"/>
+          <a:chOff x="0" y="0"/>
+          <a:chExt cx="0" cy="0"/>
+        </a:xfrm>
+      </p:grpSpPr>
+      <p:sp>
+        <p:nvSpPr>
+          <p:cNvPr id="2" name="Slide Image Placeholder 1"/>
+          <p:cNvSpPr>
+            <a:spLocks noGrp="1" noRot="1" noChangeAspect="1"/>
+          </p:cNvSpPr>
+          <p:nvPr>
+            <p:ph type="sldImg"/>
+          </p:nvPr>
+        </p:nvSpPr>
+        <p:spPr/>
+      </p:sp>
+      <p:sp>
+        <p:nvSpPr>
+          <p:cNvPr id="3" name="Notes Placeholder 2"/>
+          <p:cNvSpPr>
+            <a:spLocks noGrp="1"/>
+          </p:cNvSpPr>
+          <p:nvPr>
+            <p:ph type="body" idx="1"/>
+          </p:nvPr>
+        </p:nvSpPr>
+        <p:spPr/>
+        <p:txBody>
+          <a:bodyPr/>
+          <a:lstStyle/>
+          <a:p>
+            <a:r>
+              <a:rPr lang="en-US" dirty="0"/>
+              <a:t>I record this information in the official logbook of the class after the lesson.</a:t>
+            </a:r>
+            <a:endParaRPr lang="en-US" dirty="0"/>
+          </a:p>
+        </p:txBody>
+      </p:sp>
+      <p:sp>
+        <p:nvSpPr>
+          <p:cNvPr id="4" name="Slide Number Placeholder 3"/>
+          <p:cNvSpPr>
+            <a:spLocks noGrp="1"/>
+          </p:cNvSpPr>
+          <p:nvPr>
+            <p:ph type="sldNum" sz="quarter" idx="10"/>
+          </p:nvPr>
+        </p:nvSpPr>
+        <p:spPr/>
+        <p:txBody>
+          <a:bodyPr/>
+          <a:lstStyle/>
+          <a:p>
+            <a:fld id="{F7021451-1387-4CA6-816F-3879F97B5CBC}" type="slidenum">
+              <a:rPr lang="en-US"/>
+              <a:t>56</a:t>
+            </a:fld>
+            <a:endParaRPr lang="en-US"/>
+          </a:p>
+        </p:txBody>
+      </p:sp>
+    </p:spTree>
+    <p:extLst>
+      <p:ext uri="{BB962C8B-B14F-4D97-AF65-F5344CB8AC3E}">
+        <p14:creationId xmlns:p14="http://schemas.microsoft.com/office/powerpoint/2010/main" val="1024086991"/>
+      </p:ext>
+    </p:extLst>
+  </p:cSld>
+  <p:clrMapOvr>
+    <a:masterClrMapping/>
+  </p:clrMapOvr>
+</p:notes>
+</file>
+
+<file path=ppt/notesSlides/notesSlide57.xml><?xml version="1.0" encoding="utf-8"?>
+<p:notes xmlns:a="http://schemas.openxmlformats.org/drawingml/2006/main" xmlns:r="http://schemas.openxmlformats.org/officeDocument/2006/relationships" xmlns:p="http://schemas.openxmlformats.org/presentationml/2006/main">
+  <p:cSld>
+    <p:spTree>
+      <p:nvGrpSpPr>
+        <p:cNvPr id="1" name=""/>
+        <p:cNvGrpSpPr/>
+        <p:nvPr/>
+      </p:nvGrpSpPr>
+      <p:grpSpPr>
+        <a:xfrm>
+          <a:off x="0" y="0"/>
+          <a:ext cx="0" cy="0"/>
+          <a:chOff x="0" y="0"/>
+          <a:chExt cx="0" cy="0"/>
+        </a:xfrm>
+      </p:grpSpPr>
+      <p:sp>
+        <p:nvSpPr>
+          <p:cNvPr id="2" name="Slide Image Placeholder 1"/>
+          <p:cNvSpPr>
+            <a:spLocks noGrp="1" noRot="1" noChangeAspect="1"/>
+          </p:cNvSpPr>
+          <p:nvPr>
+            <p:ph type="sldImg"/>
+          </p:nvPr>
+        </p:nvSpPr>
+        <p:spPr/>
+      </p:sp>
+      <p:sp>
+        <p:nvSpPr>
+          <p:cNvPr id="3" name="Notes Placeholder 2"/>
+          <p:cNvSpPr>
+            <a:spLocks noGrp="1"/>
+          </p:cNvSpPr>
+          <p:nvPr>
+            <p:ph type="body" idx="1"/>
+          </p:nvPr>
+        </p:nvSpPr>
+        <p:spPr/>
+        <p:txBody>
+          <a:bodyPr/>
+          <a:lstStyle/>
+          <a:p>
+            <a:r>
+              <a:rPr lang="en-US" dirty="0"/>
+              <a:t>I complete the second page of the logbook: the matter taught, the evaluation, the homework and the attendance.</a:t>
+            </a:r>
+            <a:endParaRPr lang="en-US" dirty="0"/>
+          </a:p>
+        </p:txBody>
+      </p:sp>
+      <p:sp>
+        <p:nvSpPr>
+          <p:cNvPr id="4" name="Slide Number Placeholder 3"/>
+          <p:cNvSpPr>
+            <a:spLocks noGrp="1"/>
+          </p:cNvSpPr>
+          <p:nvPr>
+            <p:ph type="sldNum" sz="quarter" idx="10"/>
+          </p:nvPr>
+        </p:nvSpPr>
+        <p:spPr/>
+        <p:txBody>
+          <a:bodyPr/>
+          <a:lstStyle/>
+          <a:p>
+            <a:fld id="{F7021451-1387-4CA6-816F-3879F97B5CBC}" type="slidenum">
+              <a:rPr lang="en-US"/>
+              <a:t>57</a:t>
+            </a:fld>
+            <a:endParaRPr lang="en-US"/>
+          </a:p>
+        </p:txBody>
+      </p:sp>
+    </p:spTree>
+    <p:extLst>
+      <p:ext uri="{BB962C8B-B14F-4D97-AF65-F5344CB8AC3E}">
+        <p14:creationId xmlns:p14="http://schemas.microsoft.com/office/powerpoint/2010/main" val="1024086991"/>
+      </p:ext>
+    </p:extLst>
+  </p:cSld>
+  <p:clrMapOvr>
+    <a:masterClrMapping/>
+  </p:clrMapOvr>
+</p:notes>
+</file>
+
+<file path=ppt/notesSlides/notesSlide58.xml><?xml version="1.0" encoding="utf-8"?>
+<p:notes xmlns:a="http://schemas.openxmlformats.org/drawingml/2006/main" xmlns:r="http://schemas.openxmlformats.org/officeDocument/2006/relationships" xmlns:p="http://schemas.openxmlformats.org/presentationml/2006/main">
+  <p:cSld>
+    <p:spTree>
+      <p:nvGrpSpPr>
+        <p:cNvPr id="1" name=""/>
+        <p:cNvGrpSpPr/>
+        <p:nvPr/>
+      </p:nvGrpSpPr>
+      <p:grpSpPr>
+        <a:xfrm>
+          <a:off x="0" y="0"/>
+          <a:ext cx="0" cy="0"/>
+          <a:chOff x="0" y="0"/>
+          <a:chExt cx="0" cy="0"/>
+        </a:xfrm>
+      </p:grpSpPr>
+      <p:sp>
+        <p:nvSpPr>
+          <p:cNvPr id="2" name="Slide Image Placeholder 1"/>
+          <p:cNvSpPr>
+            <a:spLocks noGrp="1" noRot="1" noChangeAspect="1"/>
+          </p:cNvSpPr>
+          <p:nvPr>
+            <p:ph type="sldImg"/>
+          </p:nvPr>
+        </p:nvSpPr>
+        <p:spPr/>
+      </p:sp>
+      <p:sp>
+        <p:nvSpPr>
+          <p:cNvPr id="3" name="Notes Placeholder 2"/>
+          <p:cNvSpPr>
+            <a:spLocks noGrp="1"/>
+          </p:cNvSpPr>
+          <p:nvPr>
+            <p:ph type="body" idx="1"/>
+          </p:nvPr>
+        </p:nvSpPr>
+        <p:spPr/>
+        <p:txBody>
+          <a:bodyPr/>
+          <a:lstStyle/>
+          <a:p>
+            <a:r>
+              <a:rPr lang="en-US" dirty="0"/>
+              <a:t>This slide is for me, the teacher: it gives the timing of the lesson and what to do if the projector is not available.</a:t>
+            </a:r>
+            <a:endParaRPr lang="en-US" dirty="0"/>
+          </a:p>
+        </p:txBody>
+      </p:sp>
+      <p:sp>
+        <p:nvSpPr>
+          <p:cNvPr id="4" name="Slide Number Placeholder 3"/>
+          <p:cNvSpPr>
+            <a:spLocks noGrp="1"/>
+          </p:cNvSpPr>
+          <p:nvPr>
+            <p:ph type="sldNum" sz="quarter" idx="10"/>
+          </p:nvPr>
+        </p:nvSpPr>
+        <p:spPr/>
+        <p:txBody>
+          <a:bodyPr/>
+          <a:lstStyle/>
+          <a:p>
+            <a:fld id="{F7021451-1387-4CA6-816F-3879F97B5CBC}" type="slidenum">
+              <a:rPr lang="en-US"/>
+              <a:t>58</a:t>
+            </a:fld>
+            <a:endParaRPr lang="en-US"/>
+          </a:p>
+        </p:txBody>
+      </p:sp>
+    </p:spTree>
+    <p:extLst>
+      <p:ext uri="{BB962C8B-B14F-4D97-AF65-F5344CB8AC3E}">
+        <p14:creationId xmlns:p14="http://schemas.microsoft.com/office/powerpoint/2010/main" val="1024086991"/>
+      </p:ext>
+    </p:extLst>
+  </p:cSld>
+  <p:clrMapOvr>
+    <a:masterClrMapping/>
+  </p:clrMapOvr>
+</p:notes>
+</file>
+
+<file path=ppt/notesSlides/notesSlide59.xml><?xml version="1.0" encoding="utf-8"?>
+<p:notes xmlns:a="http://schemas.openxmlformats.org/drawingml/2006/main" xmlns:r="http://schemas.openxmlformats.org/officeDocument/2006/relationships" xmlns:p="http://schemas.openxmlformats.org/presentationml/2006/main">
+  <p:cSld>
+    <p:spTree>
+      <p:nvGrpSpPr>
+        <p:cNvPr id="1" name=""/>
+        <p:cNvGrpSpPr/>
+        <p:nvPr/>
+      </p:nvGrpSpPr>
+      <p:grpSpPr>
+        <a:xfrm>
+          <a:off x="0" y="0"/>
+          <a:ext cx="0" cy="0"/>
+          <a:chOff x="0" y="0"/>
+          <a:chExt cx="0" cy="0"/>
+        </a:xfrm>
+      </p:grpSpPr>
+      <p:sp>
+        <p:nvSpPr>
+          <p:cNvPr id="2" name="Slide Image Placeholder 1"/>
+          <p:cNvSpPr>
+            <a:spLocks noGrp="1" noRot="1" noChangeAspect="1"/>
+          </p:cNvSpPr>
+          <p:nvPr>
+            <p:ph type="sldImg"/>
+          </p:nvPr>
+        </p:nvSpPr>
+        <p:spPr/>
+      </p:sp>
+      <p:sp>
+        <p:nvSpPr>
+          <p:cNvPr id="3" name="Notes Placeholder 2"/>
+          <p:cNvSpPr>
+            <a:spLocks noGrp="1"/>
+          </p:cNvSpPr>
+          <p:nvPr>
+            <p:ph type="body" idx="1"/>
+          </p:nvPr>
+        </p:nvSpPr>
+        <p:spPr/>
+        <p:txBody>
+          <a:bodyPr/>
+          <a:lstStyle/>
+          <a:p>
+            <a:r>
+              <a:rPr lang="en-US" dirty="0"/>
+              <a:t>These are the references and picture credits used to prepare this lesson.</a:t>
+            </a:r>
+            <a:endParaRPr lang="en-US" dirty="0"/>
+          </a:p>
+        </p:txBody>
+      </p:sp>
+      <p:sp>
+        <p:nvSpPr>
+          <p:cNvPr id="4" name="Slide Number Placeholder 3"/>
+          <p:cNvSpPr>
+            <a:spLocks noGrp="1"/>
+          </p:cNvSpPr>
+          <p:nvPr>
+            <p:ph type="sldNum" sz="quarter" idx="10"/>
+          </p:nvPr>
+        </p:nvSpPr>
+        <p:spPr/>
+        <p:txBody>
+          <a:bodyPr/>
+          <a:lstStyle/>
+          <a:p>
+            <a:fld id="{F7021451-1387-4CA6-816F-3879F97B5CBC}" type="slidenum">
+              <a:rPr lang="en-US"/>
+              <a:t>59</a:t>
             </a:fld>
             <a:endParaRPr lang="en-US"/>
           </a:p>
@@ -4687,7 +5488,7 @@
           <a:p>
             <a:r>
               <a:rPr lang="en-US" dirty="0"/>
-              <a:t>By the end of this lesson, you should be able to do three things. Number 1: define rural exodus. Number 2: explain its causes and consequences. Number 3: propose ways to make the country side more attractive.</a:t>
+              <a:t>By the end of this lesson, you should be able to do three things. Number 1: explain the causes of rural exodus. Number 2: explain its consequences. Number 3: propose ways to make the country side more attractive.</a:t>
             </a:r>
             <a:endParaRPr lang="en-US" dirty="0"/>
           </a:p>
@@ -4863,7 +5664,7 @@
           <a:p>
             <a:r>
               <a:rPr lang="en-US" dirty="0"/>
-              <a:t>Listen carefully to this situation from real life. In Hamadou's village, most young people have left for Garoua, Douala and Yaoundé. Only old people and children remain, and many fields are no longer farmed. Think about it, because I am going to ask you some questions.</a:t>
+              <a:t>Listen carefully to this situation from real life. In Hamadou's village, most young people have left for Garoua, Douala and Yaoundé. Only old people and children remain, and many fields are no longer farmed. The village chief asks: "Why do our young people leave, and what can we do to keep them here?" Think about it, because I am going to ask you some questions.</a:t>
             </a:r>
             <a:endParaRPr lang="en-US" dirty="0"/>
           </a:p>
@@ -6546,7 +7347,7 @@
                 <a:ea typeface="Times New Roman" pitchFamily="34" charset="-122"/>
                 <a:cs typeface="Times New Roman" pitchFamily="34" charset="-120"/>
               </a:rPr>
-              <a:t>Young people leave the village for towns.</a:t>
+              <a:t>Young people leave the village, and the chief does not know how to keep them.</a:t>
             </a:r>
             <a:endParaRPr lang="en-US" sz="4000" dirty="0"/>
           </a:p>
@@ -7972,7 +8773,7 @@
                 <a:ea typeface="Calibri" pitchFamily="34" charset="-122"/>
                 <a:cs typeface="Calibri" pitchFamily="34" charset="-120"/>
               </a:rPr>
-              <a:t>1. MEANING</a:t>
+              <a:t>1. CAUSES</a:t>
             </a:r>
             <a:endParaRPr lang="en-US" sz="1400" dirty="0"/>
           </a:p>
@@ -8186,7 +8987,7 @@
                 <a:ea typeface="Calibri" pitchFamily="34" charset="-122"/>
                 <a:cs typeface="Calibri" pitchFamily="34" charset="-120"/>
               </a:rPr>
-              <a:t>1. MEANING</a:t>
+              <a:t>1. CAUSES</a:t>
             </a:r>
             <a:endParaRPr lang="en-US" sz="1400" dirty="0"/>
           </a:p>
@@ -8293,7 +9094,7 @@
                 <a:ea typeface="Times New Roman" pitchFamily="34" charset="-122"/>
                 <a:cs typeface="Times New Roman" pitchFamily="34" charset="-120"/>
               </a:rPr>
-              <a:t>What is rural exodus? Where do migrants go?</a:t>
+              <a:t>Towards which towns do most migrants of Cameroon go?</a:t>
             </a:r>
             <a:endParaRPr lang="en-US" sz="4000" dirty="0"/>
           </a:p>
@@ -9000,7 +9801,7 @@
                 <a:ea typeface="Calibri" pitchFamily="34" charset="-122"/>
                 <a:cs typeface="Calibri" pitchFamily="34" charset="-120"/>
               </a:rPr>
-              <a:t>1. MEANING</a:t>
+              <a:t>1. CAUSES</a:t>
             </a:r>
             <a:endParaRPr lang="en-US" sz="1400" dirty="0"/>
           </a:p>
@@ -9107,7 +9908,7 @@
                 <a:ea typeface="Times New Roman" pitchFamily="34" charset="-122"/>
                 <a:cs typeface="Times New Roman" pitchFamily="34" charset="-120"/>
               </a:rPr>
-              <a:t>The massive movement of people from villages to towns; they go mainly to Douala and Yaoundé.</a:t>
+              <a:t>Douala and Yaoundé.</a:t>
             </a:r>
             <a:endParaRPr lang="en-US" sz="4000" dirty="0"/>
           </a:p>
@@ -9219,7 +10020,7 @@
                 <a:ea typeface="Calibri" pitchFamily="34" charset="-122"/>
                 <a:cs typeface="Calibri" pitchFamily="34" charset="-120"/>
               </a:rPr>
-              <a:t>2. CAUSES</a:t>
+              <a:t>1. CAUSES</a:t>
             </a:r>
             <a:endParaRPr lang="en-US" sz="1400" dirty="0"/>
           </a:p>
@@ -9433,7 +10234,7 @@
                 <a:ea typeface="Calibri" pitchFamily="34" charset="-122"/>
                 <a:cs typeface="Calibri" pitchFamily="34" charset="-120"/>
               </a:rPr>
-              <a:t>2. CAUSES</a:t>
+              <a:t>1. CAUSES</a:t>
             </a:r>
             <a:endParaRPr lang="en-US" sz="1400" dirty="0"/>
           </a:p>
@@ -9540,7 +10341,7 @@
                 <a:ea typeface="Times New Roman" pitchFamily="34" charset="-122"/>
                 <a:cs typeface="Times New Roman" pitchFamily="34" charset="-120"/>
               </a:rPr>
-              <a:t>Give two push factors of rural exodus.</a:t>
+              <a:t>What in the village pushes young people to leave?</a:t>
             </a:r>
             <a:endParaRPr lang="en-US" sz="4000" dirty="0"/>
           </a:p>
@@ -9652,7 +10453,7 @@
                 <a:ea typeface="Calibri" pitchFamily="34" charset="-122"/>
                 <a:cs typeface="Calibri" pitchFamily="34" charset="-120"/>
               </a:rPr>
-              <a:t>2. CAUSES</a:t>
+              <a:t>1. CAUSES</a:t>
             </a:r>
             <a:endParaRPr lang="en-US" sz="1400" dirty="0"/>
           </a:p>
@@ -9759,7 +10560,7 @@
                 <a:ea typeface="Times New Roman" pitchFamily="34" charset="-122"/>
                 <a:cs typeface="Times New Roman" pitchFamily="34" charset="-120"/>
               </a:rPr>
-              <a:t>Lack of jobs and poor services in villages (also bad roads, poverty).</a:t>
+              <a:t>Lack of jobs, poverty, bad roads and poor services.</a:t>
             </a:r>
             <a:endParaRPr lang="en-US" sz="4000" dirty="0"/>
           </a:p>
@@ -9871,7 +10672,7 @@
                 <a:ea typeface="Calibri" pitchFamily="34" charset="-122"/>
                 <a:cs typeface="Calibri" pitchFamily="34" charset="-120"/>
               </a:rPr>
-              <a:t>2. CAUSES</a:t>
+              <a:t>1. CAUSES</a:t>
             </a:r>
             <a:endParaRPr lang="en-US" sz="1400" dirty="0"/>
           </a:p>
@@ -10085,7 +10886,7 @@
                 <a:ea typeface="Calibri" pitchFamily="34" charset="-122"/>
                 <a:cs typeface="Calibri" pitchFamily="34" charset="-120"/>
               </a:rPr>
-              <a:t>2. CAUSES</a:t>
+              <a:t>1. CAUSES</a:t>
             </a:r>
             <a:endParaRPr lang="en-US" sz="1400" dirty="0"/>
           </a:p>
@@ -10192,7 +10993,7 @@
                 <a:ea typeface="Times New Roman" pitchFamily="34" charset="-122"/>
                 <a:cs typeface="Times New Roman" pitchFamily="34" charset="-120"/>
               </a:rPr>
-              <a:t>Give two pull factors of towns.</a:t>
+              <a:t>What attracts young people to towns?</a:t>
             </a:r>
             <a:endParaRPr lang="en-US" sz="4000" dirty="0"/>
           </a:p>
@@ -10304,7 +11105,7 @@
                 <a:ea typeface="Calibri" pitchFamily="34" charset="-122"/>
                 <a:cs typeface="Calibri" pitchFamily="34" charset="-120"/>
               </a:rPr>
-              <a:t>2. CAUSES</a:t>
+              <a:t>1. CAUSES</a:t>
             </a:r>
             <a:endParaRPr lang="en-US" sz="1400" dirty="0"/>
           </a:p>
@@ -10411,7 +11212,7 @@
                 <a:ea typeface="Times New Roman" pitchFamily="34" charset="-122"/>
                 <a:cs typeface="Times New Roman" pitchFamily="34" charset="-120"/>
               </a:rPr>
-              <a:t>Jobs and services such as schools, hospitals and electricity.</a:t>
+              <a:t>Jobs, schools, hospitals, electricity and modern life.</a:t>
             </a:r>
             <a:endParaRPr lang="en-US" sz="4000" dirty="0"/>
           </a:p>
@@ -10523,7 +11324,7 @@
                 <a:ea typeface="Calibri" pitchFamily="34" charset="-122"/>
                 <a:cs typeface="Calibri" pitchFamily="34" charset="-120"/>
               </a:rPr>
-              <a:t>3. CONSEQUENCES</a:t>
+              <a:t>2. CONSEQUENCES</a:t>
             </a:r>
             <a:endParaRPr lang="en-US" sz="1400" dirty="0"/>
           </a:p>
@@ -10737,7 +11538,7 @@
                 <a:ea typeface="Calibri" pitchFamily="34" charset="-122"/>
                 <a:cs typeface="Calibri" pitchFamily="34" charset="-120"/>
               </a:rPr>
-              <a:t>3. CONSEQUENCES</a:t>
+              <a:t>2. CONSEQUENCES</a:t>
             </a:r>
             <a:endParaRPr lang="en-US" sz="1400" dirty="0"/>
           </a:p>
@@ -10844,7 +11645,7 @@
                 <a:ea typeface="Times New Roman" pitchFamily="34" charset="-122"/>
                 <a:cs typeface="Times New Roman" pitchFamily="34" charset="-120"/>
               </a:rPr>
-              <a:t>Give one consequence in villages and one in towns.</a:t>
+              <a:t>Where do many migrants live when they arrive in a big town?</a:t>
             </a:r>
             <a:endParaRPr lang="en-US" sz="4000" dirty="0"/>
           </a:p>
@@ -10956,7 +11757,7 @@
                 <a:ea typeface="Calibri" pitchFamily="34" charset="-122"/>
                 <a:cs typeface="Calibri" pitchFamily="34" charset="-120"/>
               </a:rPr>
-              <a:t>3. CONSEQUENCES</a:t>
+              <a:t>2. CONSEQUENCES</a:t>
             </a:r>
             <a:endParaRPr lang="en-US" sz="1400" dirty="0"/>
           </a:p>
@@ -11063,7 +11864,7 @@
                 <a:ea typeface="Times New Roman" pitchFamily="34" charset="-122"/>
                 <a:cs typeface="Times New Roman" pitchFamily="34" charset="-120"/>
               </a:rPr>
-              <a:t>Villages lose young workers and fields are abandoned; towns get slums and unemployment.</a:t>
+              <a:t>In crowded poor quarters (slums).</a:t>
             </a:r>
             <a:endParaRPr lang="en-US" sz="4000" dirty="0"/>
           </a:p>
@@ -12184,7 +12985,7 @@
                 <a:ea typeface="Calibri" pitchFamily="34" charset="-122"/>
                 <a:cs typeface="Calibri" pitchFamily="34" charset="-120"/>
               </a:rPr>
-              <a:t>4. SOLUTIONS</a:t>
+              <a:t>3. MAKING THE COUNTRY SIDE ATTRACTIVE</a:t>
             </a:r>
             <a:endParaRPr lang="en-US" sz="1400" dirty="0"/>
           </a:p>
@@ -12398,7 +13199,7 @@
                 <a:ea typeface="Calibri" pitchFamily="34" charset="-122"/>
                 <a:cs typeface="Calibri" pitchFamily="34" charset="-120"/>
               </a:rPr>
-              <a:t>4. SOLUTIONS</a:t>
+              <a:t>3. MAKING THE COUNTRY SIDE ATTRACTIVE</a:t>
             </a:r>
             <a:endParaRPr lang="en-US" sz="1400" dirty="0"/>
           </a:p>
@@ -12505,7 +13306,7 @@
                 <a:ea typeface="Times New Roman" pitchFamily="34" charset="-122"/>
                 <a:cs typeface="Times New Roman" pitchFamily="34" charset="-120"/>
               </a:rPr>
-              <a:t>How can the country side be made more attractive?</a:t>
+              <a:t>How does a water point like this help to keep people in the village?</a:t>
             </a:r>
             <a:endParaRPr lang="en-US" sz="4000" dirty="0"/>
           </a:p>
@@ -12617,7 +13418,7 @@
                 <a:ea typeface="Calibri" pitchFamily="34" charset="-122"/>
                 <a:cs typeface="Calibri" pitchFamily="34" charset="-120"/>
               </a:rPr>
-              <a:t>4. SOLUTIONS</a:t>
+              <a:t>3. MAKING THE COUNTRY SIDE ATTRACTIVE</a:t>
             </a:r>
             <a:endParaRPr lang="en-US" sz="1400" dirty="0"/>
           </a:p>
@@ -12724,7 +13525,7 @@
                 <a:ea typeface="Times New Roman" pitchFamily="34" charset="-122"/>
                 <a:cs typeface="Times New Roman" pitchFamily="34" charset="-120"/>
               </a:rPr>
-              <a:t>By building roads, schools, health centres and water points and creating jobs in farming and crafts.</a:t>
+              <a:t>It improves daily life: clean water close to home, better health and more time for work.</a:t>
             </a:r>
             <a:endParaRPr lang="en-US" sz="4000" dirty="0"/>
           </a:p>
@@ -13118,7 +13919,7 @@
         <p:spPr>
           <a:xfrm>
             <a:off x="0" y="658368"/>
-            <a:ext cx="5120640" cy="5833872"/>
+            <a:ext cx="2468880" cy="5833872"/>
           </a:xfrm>
           <a:prstGeom prst="rect">
             <a:avLst/>
@@ -13133,8 +13934,8 @@
         </p:nvSpPr>
         <p:spPr>
           <a:xfrm>
-            <a:off x="5349240" y="1005840"/>
-            <a:ext cx="6522415" cy="731520"/>
+            <a:off x="2697480" y="1005840"/>
+            <a:ext cx="9174175" cy="731520"/>
           </a:xfrm>
           <a:prstGeom prst="rect">
             <a:avLst/>
@@ -13174,8 +13975,8 @@
         </p:nvSpPr>
         <p:spPr>
           <a:xfrm>
-            <a:off x="5349240" y="1783080"/>
-            <a:ext cx="6522415" cy="4663440"/>
+            <a:off x="2697480" y="1783080"/>
+            <a:ext cx="9174175" cy="4663440"/>
           </a:xfrm>
           <a:prstGeom prst="rect">
             <a:avLst/>
@@ -13239,7 +14040,44 @@
                 <a:ea typeface="Times New Roman" pitchFamily="34" charset="-122"/>
                 <a:cs typeface="Times New Roman" pitchFamily="34" charset="-120"/>
               </a:rPr>
-              <a:t>It is the massive movement of people from villages to towns.</a:t>
+              <a:t>It is the massive movement of people from the country side to towns.</a:t>
+            </a:r>
+            <a:endParaRPr lang="en-US" sz="4000" dirty="0"/>
+          </a:p>
+          <a:p>
+            <a:pPr algn="l" indent="0" marL="0">
+              <a:spcAft>
+                <a:spcPts val="800"/>
+              </a:spcAft>
+              <a:buNone/>
+            </a:pPr>
+            <a:r>
+              <a:rPr lang="en-US" sz="4000" b="1" dirty="0">
+                <a:solidFill>
+                  <a:srgbClr val="111111"/>
+                </a:solidFill>
+                <a:latin typeface="Times New Roman" pitchFamily="34" charset="0"/>
+                <a:ea typeface="Times New Roman" pitchFamily="34" charset="-122"/>
+                <a:cs typeface="Times New Roman" pitchFamily="34" charset="-120"/>
+              </a:rPr>
+              <a:t>Push factors: </a:t>
+            </a:r>
+            <a:pPr algn="l" indent="0" marL="0">
+              <a:spcAft>
+                <a:spcPts val="800"/>
+              </a:spcAft>
+              <a:buNone/>
+            </a:pPr>
+            <a:r>
+              <a:rPr lang="en-US" sz="4000" dirty="0">
+                <a:solidFill>
+                  <a:srgbClr val="111111"/>
+                </a:solidFill>
+                <a:latin typeface="Times New Roman" pitchFamily="34" charset="0"/>
+                <a:ea typeface="Times New Roman" pitchFamily="34" charset="-122"/>
+                <a:cs typeface="Times New Roman" pitchFamily="34" charset="-120"/>
+              </a:rPr>
+              <a:t>They are the conditions that make people leave the village.</a:t>
             </a:r>
             <a:endParaRPr lang="en-US" sz="4000" dirty="0"/>
           </a:p>
@@ -13374,7 +14212,7 @@
         <p:spPr>
           <a:xfrm>
             <a:off x="0" y="658368"/>
-            <a:ext cx="2468880" cy="5833872"/>
+            <a:ext cx="5120640" cy="5833872"/>
           </a:xfrm>
           <a:prstGeom prst="rect">
             <a:avLst/>
@@ -13389,8 +14227,8 @@
         </p:nvSpPr>
         <p:spPr>
           <a:xfrm>
-            <a:off x="2697480" y="1005840"/>
-            <a:ext cx="9174175" cy="731520"/>
+            <a:off x="5349240" y="1005840"/>
+            <a:ext cx="6522415" cy="731520"/>
           </a:xfrm>
           <a:prstGeom prst="rect">
             <a:avLst/>
@@ -13416,7 +14254,7 @@
                 <a:ea typeface="Times New Roman" pitchFamily="34" charset="-122"/>
                 <a:cs typeface="Times New Roman" pitchFamily="34" charset="-120"/>
               </a:rPr>
-              <a:t>1. Causes</a:t>
+              <a:t>DEFINITIONS (continued)</a:t>
             </a:r>
             <a:endParaRPr lang="en-US" sz="3600" dirty="0"/>
           </a:p>
@@ -13430,8 +14268,8 @@
         </p:nvSpPr>
         <p:spPr>
           <a:xfrm>
-            <a:off x="2697480" y="1783080"/>
-            <a:ext cx="9174175" cy="4663440"/>
+            <a:off x="5349240" y="1783080"/>
+            <a:ext cx="6522415" cy="4663440"/>
           </a:xfrm>
           <a:prstGeom prst="rect">
             <a:avLst/>
@@ -13450,7 +14288,7 @@
               <a:buNone/>
             </a:pPr>
             <a:r>
-              <a:rPr lang="en-US" sz="4000" i="1" dirty="0">
+              <a:rPr lang="en-US" sz="4000" b="1" dirty="0">
                 <a:solidFill>
                   <a:srgbClr val="111111"/>
                 </a:solidFill>
@@ -13458,11 +14296,8 @@
                 <a:ea typeface="Times New Roman" pitchFamily="34" charset="-122"/>
                 <a:cs typeface="Times New Roman" pitchFamily="34" charset="-120"/>
               </a:rPr>
-              <a:t>Rural exodus has the following causes:</a:t>
-            </a:r>
-            <a:endParaRPr lang="en-US" sz="4000" dirty="0"/>
-          </a:p>
-          <a:p>
+              <a:t>Pull factors: </a:t>
+            </a:r>
             <a:pPr algn="l" indent="0" marL="0">
               <a:spcAft>
                 <a:spcPts val="800"/>
@@ -13470,7 +14305,7 @@
               <a:buNone/>
             </a:pPr>
             <a:r>
-              <a:rPr lang="en-US" sz="4000" b="1" dirty="0">
+              <a:rPr lang="en-US" sz="4000" dirty="0">
                 <a:solidFill>
                   <a:srgbClr val="111111"/>
                 </a:solidFill>
@@ -13478,61 +14313,7 @@
                 <a:ea typeface="Times New Roman" pitchFamily="34" charset="-122"/>
                 <a:cs typeface="Times New Roman" pitchFamily="34" charset="-120"/>
               </a:rPr>
-              <a:t>Push factors: </a:t>
-            </a:r>
-            <a:pPr algn="l" indent="0" marL="0">
-              <a:spcAft>
-                <a:spcPts val="800"/>
-              </a:spcAft>
-              <a:buNone/>
-            </a:pPr>
-            <a:r>
-              <a:rPr lang="en-US" sz="4000" dirty="0">
-                <a:solidFill>
-                  <a:srgbClr val="111111"/>
-                </a:solidFill>
-                <a:latin typeface="Times New Roman" pitchFamily="34" charset="0"/>
-                <a:ea typeface="Times New Roman" pitchFamily="34" charset="-122"/>
-                <a:cs typeface="Times New Roman" pitchFamily="34" charset="-120"/>
-              </a:rPr>
-              <a:t>Poverty, lack of jobs, bad roads and poor services push people out of villages.</a:t>
-            </a:r>
-            <a:endParaRPr lang="en-US" sz="4000" dirty="0"/>
-          </a:p>
-          <a:p>
-            <a:pPr algn="l" indent="0" marL="0">
-              <a:spcAft>
-                <a:spcPts val="800"/>
-              </a:spcAft>
-              <a:buNone/>
-            </a:pPr>
-            <a:r>
-              <a:rPr lang="en-US" sz="4000" b="1" dirty="0">
-                <a:solidFill>
-                  <a:srgbClr val="111111"/>
-                </a:solidFill>
-                <a:latin typeface="Times New Roman" pitchFamily="34" charset="0"/>
-                <a:ea typeface="Times New Roman" pitchFamily="34" charset="-122"/>
-                <a:cs typeface="Times New Roman" pitchFamily="34" charset="-120"/>
-              </a:rPr>
-              <a:t>Pull factors: </a:t>
-            </a:r>
-            <a:pPr algn="l" indent="0" marL="0">
-              <a:spcAft>
-                <a:spcPts val="800"/>
-              </a:spcAft>
-              <a:buNone/>
-            </a:pPr>
-            <a:r>
-              <a:rPr lang="en-US" sz="4000" dirty="0">
-                <a:solidFill>
-                  <a:srgbClr val="111111"/>
-                </a:solidFill>
-                <a:latin typeface="Times New Roman" pitchFamily="34" charset="0"/>
-                <a:ea typeface="Times New Roman" pitchFamily="34" charset="-122"/>
-                <a:cs typeface="Times New Roman" pitchFamily="34" charset="-120"/>
-              </a:rPr>
-              <a:t>Jobs, schools, hospitals and modern life attract people to towns.</a:t>
+              <a:t>They are the attractions that draw people to towns.</a:t>
             </a:r>
             <a:endParaRPr lang="en-US" sz="4000" dirty="0"/>
           </a:p>
@@ -13658,8 +14439,8 @@
         </p:nvSpPr>
         <p:spPr>
           <a:xfrm>
-            <a:off x="457200" y="1005840"/>
-            <a:ext cx="11277295" cy="731520"/>
+            <a:off x="365760" y="1005840"/>
+            <a:ext cx="11460175" cy="731520"/>
           </a:xfrm>
           <a:prstGeom prst="rect">
             <a:avLst/>
@@ -13668,7 +14449,9 @@
           <a:ln/>
         </p:spPr>
         <p:txBody>
-          <a:bodyPr wrap="square" lIns="0" tIns="0" rIns="0" bIns="0" rtlCol="0" anchor="ctr"/>
+          <a:bodyPr wrap="square" lIns="0" tIns="0" rIns="0" bIns="0" rtlCol="0" anchor="ctr">
+            <a:normAutofit/>
+          </a:bodyPr>
           <a:lstStyle/>
           <a:p>
             <a:pPr algn="ctr" indent="0" marL="0">
@@ -13683,15 +14466,135 @@
                 <a:ea typeface="Times New Roman" pitchFamily="34" charset="-122"/>
                 <a:cs typeface="Times New Roman" pitchFamily="34" charset="-120"/>
               </a:rPr>
-              <a:t>1. Causes</a:t>
+              <a:t>1. Causes of Rural Exodus</a:t>
             </a:r>
             <a:endParaRPr lang="en-US" sz="3600" dirty="0"/>
+          </a:p>
+        </p:txBody>
+      </p:sp>
+      <p:sp>
+        <p:nvSpPr>
+          <p:cNvPr id="4" name="Text 2"/>
+          <p:cNvSpPr/>
+          <p:nvPr/>
+        </p:nvSpPr>
+        <p:spPr>
+          <a:xfrm>
+            <a:off x="365760" y="1737360"/>
+            <a:ext cx="5120640" cy="457200"/>
+          </a:xfrm>
+          <a:prstGeom prst="rect">
+            <a:avLst/>
+          </a:prstGeom>
+          <a:noFill/>
+          <a:ln/>
+        </p:spPr>
+        <p:txBody>
+          <a:bodyPr wrap="square" lIns="0" tIns="0" rIns="0" bIns="0" rtlCol="0" anchor="ctr">
+            <a:normAutofit/>
+          </a:bodyPr>
+          <a:lstStyle/>
+          <a:p>
+            <a:pPr algn="l" indent="0" marL="0">
+              <a:buNone/>
+            </a:pPr>
+            <a:r>
+              <a:rPr lang="en-US" sz="3000" b="1" dirty="0">
+                <a:solidFill>
+                  <a:srgbClr val="990011"/>
+                </a:solidFill>
+                <a:latin typeface="Times New Roman" pitchFamily="34" charset="0"/>
+                <a:ea typeface="Times New Roman" pitchFamily="34" charset="-122"/>
+                <a:cs typeface="Times New Roman" pitchFamily="34" charset="-120"/>
+              </a:rPr>
+              <a:t>A) Push Factors</a:t>
+            </a:r>
+            <a:endParaRPr lang="en-US" sz="3000" dirty="0"/>
+          </a:p>
+        </p:txBody>
+      </p:sp>
+      <p:sp>
+        <p:nvSpPr>
+          <p:cNvPr id="5" name="Text 3"/>
+          <p:cNvSpPr/>
+          <p:nvPr/>
+        </p:nvSpPr>
+        <p:spPr>
+          <a:xfrm>
+            <a:off x="365760" y="2240280"/>
+            <a:ext cx="4846320" cy="4160520"/>
+          </a:xfrm>
+          <a:prstGeom prst="rect">
+            <a:avLst/>
+          </a:prstGeom>
+          <a:noFill/>
+          <a:ln/>
+        </p:spPr>
+        <p:txBody>
+          <a:bodyPr wrap="square" lIns="0" tIns="0" rIns="0" bIns="0" rtlCol="0" anchor="t"/>
+          <a:lstStyle/>
+          <a:p>
+            <a:pPr algn="l" indent="0" marL="0">
+              <a:spcAft>
+                <a:spcPts val="800"/>
+              </a:spcAft>
+              <a:buNone/>
+            </a:pPr>
+            <a:r>
+              <a:rPr lang="en-US" sz="3200" i="1" dirty="0">
+                <a:solidFill>
+                  <a:srgbClr val="111111"/>
+                </a:solidFill>
+                <a:latin typeface="Times New Roman" pitchFamily="34" charset="0"/>
+                <a:ea typeface="Times New Roman" pitchFamily="34" charset="-122"/>
+                <a:cs typeface="Times New Roman" pitchFamily="34" charset="-120"/>
+              </a:rPr>
+              <a:t>The following conditions push people out of villages:</a:t>
+            </a:r>
+            <a:endParaRPr lang="en-US" sz="3200" dirty="0"/>
+          </a:p>
+          <a:p>
+            <a:pPr algn="l" indent="0" marL="0">
+              <a:spcAft>
+                <a:spcPts val="800"/>
+              </a:spcAft>
+              <a:buNone/>
+            </a:pPr>
+            <a:r>
+              <a:rPr lang="en-US" sz="3200" b="1" dirty="0">
+                <a:solidFill>
+                  <a:srgbClr val="111111"/>
+                </a:solidFill>
+                <a:latin typeface="Times New Roman" pitchFamily="34" charset="0"/>
+                <a:ea typeface="Times New Roman" pitchFamily="34" charset="-122"/>
+                <a:cs typeface="Times New Roman" pitchFamily="34" charset="-120"/>
+              </a:rPr>
+              <a:t>Poverty and unemployment: </a:t>
+            </a:r>
+            <a:pPr algn="l" indent="0" marL="0">
+              <a:spcAft>
+                <a:spcPts val="800"/>
+              </a:spcAft>
+              <a:buNone/>
+            </a:pPr>
+            <a:r>
+              <a:rPr lang="en-US" sz="3200" dirty="0">
+                <a:solidFill>
+                  <a:srgbClr val="111111"/>
+                </a:solidFill>
+                <a:latin typeface="Times New Roman" pitchFamily="34" charset="0"/>
+                <a:ea typeface="Times New Roman" pitchFamily="34" charset="-122"/>
+                <a:cs typeface="Times New Roman" pitchFamily="34" charset="-120"/>
+              </a:rPr>
+              <a:t>Farming gives low incomes, and there are few other jobs.</a:t>
+            </a:r>
+            <a:endParaRPr lang="en-US" sz="3200" dirty="0"/>
           </a:p>
         </p:txBody>
       </p:sp>
       <p:pic>
         <p:nvPicPr>
-          <p:cNvPr id="4" name="Image 0" descr="/home/claude/f4/img/v2/cmr_migration_big.png">    </p:cNvPr>
+          <p:cNvPr id="6" name="Image 0" descr="/home/claude/f4/img/v2/f2t_muddy_road.jpg">    </p:cNvPr>
           <p:cNvPicPr>
             <a:picLocks noChangeAspect="1"/>
           </p:cNvPicPr>
@@ -13705,8 +14608,8 @@
         </p:blipFill>
         <p:spPr>
           <a:xfrm>
-            <a:off x="1825600" y="1783080"/>
-            <a:ext cx="8540496" cy="4270248"/>
+            <a:off x="5349240" y="2071212"/>
+            <a:ext cx="6659575" cy="3693983"/>
           </a:xfrm>
           <a:prstGeom prst="rect">
             <a:avLst/>
@@ -13715,14 +14618,14 @@
       </p:pic>
       <p:sp>
         <p:nvSpPr>
-          <p:cNvPr id="5" name="Text 2"/>
+          <p:cNvPr id="7" name="Text 4"/>
           <p:cNvSpPr/>
           <p:nvPr/>
         </p:nvSpPr>
         <p:spPr>
           <a:xfrm>
-            <a:off x="457200" y="6089904"/>
-            <a:ext cx="11277295" cy="347472"/>
+            <a:off x="5349240" y="6089904"/>
+            <a:ext cx="6659575" cy="347472"/>
           </a:xfrm>
           <a:prstGeom prst="rect">
             <a:avLst/>
@@ -13738,7 +14641,7 @@
               <a:buNone/>
             </a:pPr>
             <a:r>
-              <a:rPr lang="en-US" sz="1800" i="1" dirty="0">
+              <a:rPr lang="en-US" sz="1600" i="1" dirty="0">
                 <a:solidFill>
                   <a:srgbClr val="555555"/>
                 </a:solidFill>
@@ -13746,9 +14649,9 @@
                 <a:ea typeface="Times New Roman" pitchFamily="34" charset="-122"/>
                 <a:cs typeface="Times New Roman" pitchFamily="34" charset="-120"/>
               </a:rPr>
-              <a:t>Illustration: migration flows in Cameroon</a:t>
-            </a:r>
-            <a:endParaRPr lang="en-US" sz="1800" dirty="0"/>
+              <a:t>Illustration: a bad rural road</a:t>
+            </a:r>
+            <a:endParaRPr lang="en-US" sz="1600" dirty="0"/>
           </a:p>
         </p:txBody>
       </p:sp>
@@ -13881,7 +14784,7 @@
         <p:spPr>
           <a:xfrm>
             <a:off x="0" y="658368"/>
-            <a:ext cx="2468880" cy="5833872"/>
+            <a:ext cx="3840480" cy="5833872"/>
           </a:xfrm>
           <a:prstGeom prst="rect">
             <a:avLst/>
@@ -13896,8 +14799,8 @@
         </p:nvSpPr>
         <p:spPr>
           <a:xfrm>
-            <a:off x="2697480" y="1005840"/>
-            <a:ext cx="9174175" cy="731520"/>
+            <a:off x="4069080" y="1005840"/>
+            <a:ext cx="7802575" cy="731520"/>
           </a:xfrm>
           <a:prstGeom prst="rect">
             <a:avLst/>
@@ -13923,7 +14826,7 @@
                 <a:ea typeface="Times New Roman" pitchFamily="34" charset="-122"/>
                 <a:cs typeface="Times New Roman" pitchFamily="34" charset="-120"/>
               </a:rPr>
-              <a:t>2. Consequences</a:t>
+              <a:t>1. Causes of Rural Exodus</a:t>
             </a:r>
             <a:endParaRPr lang="en-US" sz="3600" dirty="0"/>
           </a:p>
@@ -13937,8 +14840,47 @@
         </p:nvSpPr>
         <p:spPr>
           <a:xfrm>
-            <a:off x="2697480" y="1783080"/>
-            <a:ext cx="9174175" cy="4663440"/>
+            <a:off x="4069080" y="1737360"/>
+            <a:ext cx="7802575" cy="457200"/>
+          </a:xfrm>
+          <a:prstGeom prst="rect">
+            <a:avLst/>
+          </a:prstGeom>
+          <a:noFill/>
+          <a:ln/>
+        </p:spPr>
+        <p:txBody>
+          <a:bodyPr wrap="square" lIns="0" tIns="0" rIns="0" bIns="0" rtlCol="0" anchor="ctr"/>
+          <a:lstStyle/>
+          <a:p>
+            <a:pPr algn="l" indent="0" marL="0">
+              <a:buNone/>
+            </a:pPr>
+            <a:r>
+              <a:rPr lang="en-US" sz="3200" b="1" dirty="0">
+                <a:solidFill>
+                  <a:srgbClr val="990011"/>
+                </a:solidFill>
+                <a:latin typeface="Times New Roman" pitchFamily="34" charset="0"/>
+                <a:ea typeface="Times New Roman" pitchFamily="34" charset="-122"/>
+                <a:cs typeface="Times New Roman" pitchFamily="34" charset="-120"/>
+              </a:rPr>
+              <a:t>A) Push Factors</a:t>
+            </a:r>
+            <a:endParaRPr lang="en-US" sz="3200" dirty="0"/>
+          </a:p>
+        </p:txBody>
+      </p:sp>
+      <p:sp>
+        <p:nvSpPr>
+          <p:cNvPr id="6" name="Text 3"/>
+          <p:cNvSpPr/>
+          <p:nvPr/>
+        </p:nvSpPr>
+        <p:spPr>
+          <a:xfrm>
+            <a:off x="4069080" y="2240280"/>
+            <a:ext cx="7802575" cy="4206240"/>
           </a:xfrm>
           <a:prstGeom prst="rect">
             <a:avLst/>
@@ -13957,7 +14899,7 @@
               <a:buNone/>
             </a:pPr>
             <a:r>
-              <a:rPr lang="en-US" sz="4000" i="1" dirty="0">
+              <a:rPr lang="en-US" sz="4000" b="1" dirty="0">
                 <a:solidFill>
                   <a:srgbClr val="111111"/>
                 </a:solidFill>
@@ -13965,11 +14907,8 @@
                 <a:ea typeface="Times New Roman" pitchFamily="34" charset="-122"/>
                 <a:cs typeface="Times New Roman" pitchFamily="34" charset="-120"/>
               </a:rPr>
-              <a:t>Rural exodus has the following consequences:</a:t>
-            </a:r>
-            <a:endParaRPr lang="en-US" sz="4000" dirty="0"/>
-          </a:p>
-          <a:p>
+              <a:t>Lack of social amenities: </a:t>
+            </a:r>
             <a:pPr algn="l" indent="0" marL="0">
               <a:spcAft>
                 <a:spcPts val="800"/>
@@ -13977,7 +14916,7 @@
               <a:buNone/>
             </a:pPr>
             <a:r>
-              <a:rPr lang="en-US" sz="4000" b="1" dirty="0">
+              <a:rPr lang="en-US" sz="4000" dirty="0">
                 <a:solidFill>
                   <a:srgbClr val="111111"/>
                 </a:solidFill>
@@ -13985,8 +14924,11 @@
                 <a:ea typeface="Times New Roman" pitchFamily="34" charset="-122"/>
                 <a:cs typeface="Times New Roman" pitchFamily="34" charset="-120"/>
               </a:rPr>
-              <a:t>In villages: </a:t>
-            </a:r>
+              <a:t>Villages lack secondary schools, hospitals, electricity and pipe-borne water.</a:t>
+            </a:r>
+            <a:endParaRPr lang="en-US" sz="4000" dirty="0"/>
+          </a:p>
+          <a:p>
             <a:pPr algn="l" indent="0" marL="0">
               <a:spcAft>
                 <a:spcPts val="800"/>
@@ -13994,7 +14936,7 @@
               <a:buNone/>
             </a:pPr>
             <a:r>
-              <a:rPr lang="en-US" sz="4000" dirty="0">
+              <a:rPr lang="en-US" sz="4000" b="1" dirty="0">
                 <a:solidFill>
                   <a:srgbClr val="111111"/>
                 </a:solidFill>
@@ -14002,11 +14944,8 @@
                 <a:ea typeface="Times New Roman" pitchFamily="34" charset="-122"/>
                 <a:cs typeface="Times New Roman" pitchFamily="34" charset="-120"/>
               </a:rPr>
-              <a:t>Villages lose young workers, food production falls and old people remain alone.</a:t>
-            </a:r>
-            <a:endParaRPr lang="en-US" sz="4000" dirty="0"/>
-          </a:p>
-          <a:p>
+              <a:t>Bad roads: </a:t>
+            </a:r>
             <a:pPr algn="l" indent="0" marL="0">
               <a:spcAft>
                 <a:spcPts val="800"/>
@@ -14014,7 +14953,7 @@
               <a:buNone/>
             </a:pPr>
             <a:r>
-              <a:rPr lang="en-US" sz="4000" b="1" dirty="0">
+              <a:rPr lang="en-US" sz="4000" dirty="0">
                 <a:solidFill>
                   <a:srgbClr val="111111"/>
                 </a:solidFill>
@@ -14022,24 +14961,7 @@
                 <a:ea typeface="Times New Roman" pitchFamily="34" charset="-122"/>
                 <a:cs typeface="Times New Roman" pitchFamily="34" charset="-120"/>
               </a:rPr>
-              <a:t>In towns: </a:t>
-            </a:r>
-            <a:pPr algn="l" indent="0" marL="0">
-              <a:spcAft>
-                <a:spcPts val="800"/>
-              </a:spcAft>
-              <a:buNone/>
-            </a:pPr>
-            <a:r>
-              <a:rPr lang="en-US" sz="4000" dirty="0">
-                <a:solidFill>
-                  <a:srgbClr val="111111"/>
-                </a:solidFill>
-                <a:latin typeface="Times New Roman" pitchFamily="34" charset="0"/>
-                <a:ea typeface="Times New Roman" pitchFamily="34" charset="-122"/>
-                <a:cs typeface="Times New Roman" pitchFamily="34" charset="-120"/>
-              </a:rPr>
-              <a:t>Towns grow too fast, with slums, unemployment and crime.</a:t>
+              <a:t>Villages are isolated, and farm products are hard to sell.</a:t>
             </a:r>
             <a:endParaRPr lang="en-US" sz="4000" dirty="0"/>
           </a:p>
@@ -14174,7 +15096,7 @@
         <p:spPr>
           <a:xfrm>
             <a:off x="0" y="658368"/>
-            <a:ext cx="2468880" cy="5833872"/>
+            <a:ext cx="1463040" cy="5833872"/>
           </a:xfrm>
           <a:prstGeom prst="rect">
             <a:avLst/>
@@ -14189,8 +15111,8 @@
         </p:nvSpPr>
         <p:spPr>
           <a:xfrm>
-            <a:off x="2697480" y="1005840"/>
-            <a:ext cx="9174175" cy="731520"/>
+            <a:off x="1691640" y="1005840"/>
+            <a:ext cx="10180015" cy="731520"/>
           </a:xfrm>
           <a:prstGeom prst="rect">
             <a:avLst/>
@@ -14216,7 +15138,7 @@
                 <a:ea typeface="Times New Roman" pitchFamily="34" charset="-122"/>
                 <a:cs typeface="Times New Roman" pitchFamily="34" charset="-120"/>
               </a:rPr>
-              <a:t>3. Making the Country Side More Attractive</a:t>
+              <a:t>1. Causes of Rural Exodus</a:t>
             </a:r>
             <a:endParaRPr lang="en-US" sz="3600" dirty="0"/>
           </a:p>
@@ -14230,8 +15152,47 @@
         </p:nvSpPr>
         <p:spPr>
           <a:xfrm>
-            <a:off x="2697480" y="1783080"/>
-            <a:ext cx="9174175" cy="4663440"/>
+            <a:off x="1691640" y="1737360"/>
+            <a:ext cx="10180015" cy="457200"/>
+          </a:xfrm>
+          <a:prstGeom prst="rect">
+            <a:avLst/>
+          </a:prstGeom>
+          <a:noFill/>
+          <a:ln/>
+        </p:spPr>
+        <p:txBody>
+          <a:bodyPr wrap="square" lIns="0" tIns="0" rIns="0" bIns="0" rtlCol="0" anchor="ctr"/>
+          <a:lstStyle/>
+          <a:p>
+            <a:pPr algn="l" indent="0" marL="0">
+              <a:buNone/>
+            </a:pPr>
+            <a:r>
+              <a:rPr lang="en-US" sz="3200" b="1" dirty="0">
+                <a:solidFill>
+                  <a:srgbClr val="990011"/>
+                </a:solidFill>
+                <a:latin typeface="Times New Roman" pitchFamily="34" charset="0"/>
+                <a:ea typeface="Times New Roman" pitchFamily="34" charset="-122"/>
+                <a:cs typeface="Times New Roman" pitchFamily="34" charset="-120"/>
+              </a:rPr>
+              <a:t>A) Push Factors (continued)</a:t>
+            </a:r>
+            <a:endParaRPr lang="en-US" sz="3200" dirty="0"/>
+          </a:p>
+        </p:txBody>
+      </p:sp>
+      <p:sp>
+        <p:nvSpPr>
+          <p:cNvPr id="6" name="Text 3"/>
+          <p:cNvSpPr/>
+          <p:nvPr/>
+        </p:nvSpPr>
+        <p:spPr>
+          <a:xfrm>
+            <a:off x="1691640" y="2240280"/>
+            <a:ext cx="10180015" cy="4206240"/>
           </a:xfrm>
           <a:prstGeom prst="rect">
             <a:avLst/>
@@ -14250,7 +15211,7 @@
               <a:buNone/>
             </a:pPr>
             <a:r>
-              <a:rPr lang="en-US" sz="4000" i="1" dirty="0">
+              <a:rPr lang="en-US" sz="4000" b="1" dirty="0">
                 <a:solidFill>
                   <a:srgbClr val="111111"/>
                 </a:solidFill>
@@ -14258,11 +15219,8 @@
                 <a:ea typeface="Times New Roman" pitchFamily="34" charset="-122"/>
                 <a:cs typeface="Times New Roman" pitchFamily="34" charset="-120"/>
               </a:rPr>
-              <a:t>The country side can be made attractive by the following measures:</a:t>
-            </a:r>
-            <a:endParaRPr lang="en-US" sz="4000" dirty="0"/>
-          </a:p>
-          <a:p>
+              <a:t>Shortage of land and hard work: </a:t>
+            </a:r>
             <a:pPr algn="l" indent="0" marL="0">
               <a:spcAft>
                 <a:spcPts val="800"/>
@@ -14270,7 +15228,7 @@
               <a:buNone/>
             </a:pPr>
             <a:r>
-              <a:rPr lang="en-US" sz="4000" b="1" dirty="0">
+              <a:rPr lang="en-US" sz="4000" dirty="0">
                 <a:solidFill>
                   <a:srgbClr val="111111"/>
                 </a:solidFill>
@@ -14278,8 +15236,11 @@
                 <a:ea typeface="Times New Roman" pitchFamily="34" charset="-122"/>
                 <a:cs typeface="Times New Roman" pitchFamily="34" charset="-120"/>
               </a:rPr>
-              <a:t>Infrastructure: </a:t>
-            </a:r>
+              <a:t>Land is scarce in crowded areas, and farming with simple tools is tiring.</a:t>
+            </a:r>
+            <a:endParaRPr lang="en-US" sz="4000" dirty="0"/>
+          </a:p>
+          <a:p>
             <a:pPr algn="l" indent="0" marL="0">
               <a:spcAft>
                 <a:spcPts val="800"/>
@@ -14287,7 +15248,7 @@
               <a:buNone/>
             </a:pPr>
             <a:r>
-              <a:rPr lang="en-US" sz="4000" dirty="0">
+              <a:rPr lang="en-US" sz="4000" b="1" dirty="0">
                 <a:solidFill>
                   <a:srgbClr val="111111"/>
                 </a:solidFill>
@@ -14295,11 +15256,8 @@
                 <a:ea typeface="Times New Roman" pitchFamily="34" charset="-122"/>
                 <a:cs typeface="Times New Roman" pitchFamily="34" charset="-120"/>
               </a:rPr>
-              <a:t>Roads, electricity, water, schools and health centres improve village life.</a:t>
-            </a:r>
-            <a:endParaRPr lang="en-US" sz="4000" dirty="0"/>
-          </a:p>
-          <a:p>
+              <a:t>Insecurity and traditions: </a:t>
+            </a:r>
             <a:pPr algn="l" indent="0" marL="0">
               <a:spcAft>
                 <a:spcPts val="800"/>
@@ -14307,7 +15265,7 @@
               <a:buNone/>
             </a:pPr>
             <a:r>
-              <a:rPr lang="en-US" sz="4000" b="1" dirty="0">
+              <a:rPr lang="en-US" sz="4000" dirty="0">
                 <a:solidFill>
                   <a:srgbClr val="111111"/>
                 </a:solidFill>
@@ -14315,24 +15273,7 @@
                 <a:ea typeface="Times New Roman" pitchFamily="34" charset="-122"/>
                 <a:cs typeface="Times New Roman" pitchFamily="34" charset="-120"/>
               </a:rPr>
-              <a:t>Jobs: </a:t>
-            </a:r>
-            <a:pPr algn="l" indent="0" marL="0">
-              <a:spcAft>
-                <a:spcPts val="800"/>
-              </a:spcAft>
-              <a:buNone/>
-            </a:pPr>
-            <a:r>
-              <a:rPr lang="en-US" sz="4000" dirty="0">
-                <a:solidFill>
-                  <a:srgbClr val="111111"/>
-                </a:solidFill>
-                <a:latin typeface="Times New Roman" pitchFamily="34" charset="0"/>
-                <a:ea typeface="Times New Roman" pitchFamily="34" charset="-122"/>
-                <a:cs typeface="Times New Roman" pitchFamily="34" charset="-120"/>
-              </a:rPr>
-              <a:t>Modern farming, cooperatives and crafts give young people income.</a:t>
+              <a:t>Conflicts, kidnappings and heavy traditional constraints make some young people leave.</a:t>
             </a:r>
             <a:endParaRPr lang="en-US" sz="4000" dirty="0"/>
           </a:p>
@@ -14450,9 +15391,170 @@
           </a:p>
         </p:txBody>
       </p:sp>
+      <p:sp>
+        <p:nvSpPr>
+          <p:cNvPr id="3" name="Text 1"/>
+          <p:cNvSpPr/>
+          <p:nvPr/>
+        </p:nvSpPr>
+        <p:spPr>
+          <a:xfrm>
+            <a:off x="365760" y="1005840"/>
+            <a:ext cx="11460175" cy="731520"/>
+          </a:xfrm>
+          <a:prstGeom prst="rect">
+            <a:avLst/>
+          </a:prstGeom>
+          <a:noFill/>
+          <a:ln/>
+        </p:spPr>
+        <p:txBody>
+          <a:bodyPr wrap="square" lIns="0" tIns="0" rIns="0" bIns="0" rtlCol="0" anchor="ctr">
+            <a:normAutofit/>
+          </a:bodyPr>
+          <a:lstStyle/>
+          <a:p>
+            <a:pPr algn="ctr" indent="0" marL="0">
+              <a:buNone/>
+            </a:pPr>
+            <a:r>
+              <a:rPr lang="en-US" sz="3600" b="1" dirty="0">
+                <a:solidFill>
+                  <a:srgbClr val="990011"/>
+                </a:solidFill>
+                <a:latin typeface="Times New Roman" pitchFamily="34" charset="0"/>
+                <a:ea typeface="Times New Roman" pitchFamily="34" charset="-122"/>
+                <a:cs typeface="Times New Roman" pitchFamily="34" charset="-120"/>
+              </a:rPr>
+              <a:t>1. Causes of Rural Exodus</a:t>
+            </a:r>
+            <a:endParaRPr lang="en-US" sz="3600" dirty="0"/>
+          </a:p>
+        </p:txBody>
+      </p:sp>
+      <p:sp>
+        <p:nvSpPr>
+          <p:cNvPr id="4" name="Text 2"/>
+          <p:cNvSpPr/>
+          <p:nvPr/>
+        </p:nvSpPr>
+        <p:spPr>
+          <a:xfrm>
+            <a:off x="365760" y="1737360"/>
+            <a:ext cx="5120640" cy="457200"/>
+          </a:xfrm>
+          <a:prstGeom prst="rect">
+            <a:avLst/>
+          </a:prstGeom>
+          <a:noFill/>
+          <a:ln/>
+        </p:spPr>
+        <p:txBody>
+          <a:bodyPr wrap="square" lIns="0" tIns="0" rIns="0" bIns="0" rtlCol="0" anchor="ctr">
+            <a:normAutofit/>
+          </a:bodyPr>
+          <a:lstStyle/>
+          <a:p>
+            <a:pPr algn="l" indent="0" marL="0">
+              <a:buNone/>
+            </a:pPr>
+            <a:r>
+              <a:rPr lang="en-US" sz="3000" b="1" dirty="0">
+                <a:solidFill>
+                  <a:srgbClr val="990011"/>
+                </a:solidFill>
+                <a:latin typeface="Times New Roman" pitchFamily="34" charset="0"/>
+                <a:ea typeface="Times New Roman" pitchFamily="34" charset="-122"/>
+                <a:cs typeface="Times New Roman" pitchFamily="34" charset="-120"/>
+              </a:rPr>
+              <a:t>B) Pull Factors</a:t>
+            </a:r>
+            <a:endParaRPr lang="en-US" sz="3000" dirty="0"/>
+          </a:p>
+        </p:txBody>
+      </p:sp>
+      <p:sp>
+        <p:nvSpPr>
+          <p:cNvPr id="5" name="Text 3"/>
+          <p:cNvSpPr/>
+          <p:nvPr/>
+        </p:nvSpPr>
+        <p:spPr>
+          <a:xfrm>
+            <a:off x="365760" y="2240280"/>
+            <a:ext cx="4846320" cy="4160520"/>
+          </a:xfrm>
+          <a:prstGeom prst="rect">
+            <a:avLst/>
+          </a:prstGeom>
+          <a:noFill/>
+          <a:ln/>
+        </p:spPr>
+        <p:txBody>
+          <a:bodyPr wrap="square" lIns="0" tIns="0" rIns="0" bIns="0" rtlCol="0" anchor="t"/>
+          <a:lstStyle/>
+          <a:p>
+            <a:pPr algn="l" indent="0" marL="0">
+              <a:spcAft>
+                <a:spcPts val="800"/>
+              </a:spcAft>
+              <a:buNone/>
+            </a:pPr>
+            <a:r>
+              <a:rPr lang="en-US" sz="3600" i="1" dirty="0">
+                <a:solidFill>
+                  <a:srgbClr val="111111"/>
+                </a:solidFill>
+                <a:latin typeface="Times New Roman" pitchFamily="34" charset="0"/>
+                <a:ea typeface="Times New Roman" pitchFamily="34" charset="-122"/>
+                <a:cs typeface="Times New Roman" pitchFamily="34" charset="-120"/>
+              </a:rPr>
+              <a:t>The following attractions pull people to towns:</a:t>
+            </a:r>
+            <a:endParaRPr lang="en-US" sz="3600" dirty="0"/>
+          </a:p>
+          <a:p>
+            <a:pPr algn="l" indent="0" marL="0">
+              <a:spcAft>
+                <a:spcPts val="800"/>
+              </a:spcAft>
+              <a:buNone/>
+            </a:pPr>
+            <a:r>
+              <a:rPr lang="en-US" sz="3600" b="1" dirty="0">
+                <a:solidFill>
+                  <a:srgbClr val="111111"/>
+                </a:solidFill>
+                <a:latin typeface="Times New Roman" pitchFamily="34" charset="0"/>
+                <a:ea typeface="Times New Roman" pitchFamily="34" charset="-122"/>
+                <a:cs typeface="Times New Roman" pitchFamily="34" charset="-120"/>
+              </a:rPr>
+              <a:t>Jobs: </a:t>
+            </a:r>
+            <a:pPr algn="l" indent="0" marL="0">
+              <a:spcAft>
+                <a:spcPts val="800"/>
+              </a:spcAft>
+              <a:buNone/>
+            </a:pPr>
+            <a:r>
+              <a:rPr lang="en-US" sz="3600" dirty="0">
+                <a:solidFill>
+                  <a:srgbClr val="111111"/>
+                </a:solidFill>
+                <a:latin typeface="Times New Roman" pitchFamily="34" charset="0"/>
+                <a:ea typeface="Times New Roman" pitchFamily="34" charset="-122"/>
+                <a:cs typeface="Times New Roman" pitchFamily="34" charset="-120"/>
+              </a:rPr>
+              <a:t>Towns offer jobs in industries, offices, trade and the informal sector.</a:t>
+            </a:r>
+            <a:endParaRPr lang="en-US" sz="3600" dirty="0"/>
+          </a:p>
+        </p:txBody>
+      </p:sp>
       <p:pic>
         <p:nvPicPr>
-          <p:cNvPr id="3" name="Image 0" descr="/home/claude/f4/img/minesec_sheet.png">    </p:cNvPr>
+          <p:cNvPr id="6" name="Image 0" descr="/home/claude/f4/img/v2/lsa_yaounde.jpg">    </p:cNvPr>
           <p:cNvPicPr>
             <a:picLocks noChangeAspect="1"/>
           </p:cNvPicPr>
@@ -14466,8 +15568,8 @@
         </p:blipFill>
         <p:spPr>
           <a:xfrm>
-            <a:off x="0" y="658368"/>
-            <a:ext cx="5120640" cy="5833872"/>
+            <a:off x="5349240" y="2071212"/>
+            <a:ext cx="6659575" cy="3693983"/>
           </a:xfrm>
           <a:prstGeom prst="rect">
             <a:avLst/>
@@ -14476,14 +15578,14 @@
       </p:pic>
       <p:sp>
         <p:nvSpPr>
-          <p:cNvPr id="4" name="Text 1"/>
+          <p:cNvPr id="7" name="Text 4"/>
           <p:cNvSpPr/>
           <p:nvPr/>
         </p:nvSpPr>
         <p:spPr>
           <a:xfrm>
-            <a:off x="5349240" y="1005840"/>
-            <a:ext cx="6522415" cy="731520"/>
+            <a:off x="5349240" y="6089904"/>
+            <a:ext cx="6659575" cy="347472"/>
           </a:xfrm>
           <a:prstGeom prst="rect">
             <a:avLst/>
@@ -14492,85 +15594,24 @@
           <a:ln/>
         </p:spPr>
         <p:txBody>
-          <a:bodyPr wrap="square" lIns="0" tIns="0" rIns="0" bIns="0" rtlCol="0" anchor="ctr">
-            <a:normAutofit/>
-          </a:bodyPr>
+          <a:bodyPr wrap="square" lIns="0" tIns="0" rIns="0" bIns="0" rtlCol="0" anchor="ctr"/>
           <a:lstStyle/>
           <a:p>
             <a:pPr algn="ctr" indent="0" marL="0">
               <a:buNone/>
             </a:pPr>
             <a:r>
-              <a:rPr lang="en-US" sz="3600" b="1" dirty="0">
-                <a:solidFill>
-                  <a:srgbClr val="990011"/>
+              <a:rPr lang="en-US" sz="1600" i="1" dirty="0">
+                <a:solidFill>
+                  <a:srgbClr val="555555"/>
                 </a:solidFill>
                 <a:latin typeface="Times New Roman" pitchFamily="34" charset="0"/>
                 <a:ea typeface="Times New Roman" pitchFamily="34" charset="-122"/>
                 <a:cs typeface="Times New Roman" pitchFamily="34" charset="-120"/>
               </a:rPr>
-              <a:t>3. Making the Country Side More Attractive (continued)</a:t>
-            </a:r>
-            <a:endParaRPr lang="en-US" sz="3600" dirty="0"/>
-          </a:p>
-        </p:txBody>
-      </p:sp>
-      <p:sp>
-        <p:nvSpPr>
-          <p:cNvPr id="5" name="Text 2"/>
-          <p:cNvSpPr/>
-          <p:nvPr/>
-        </p:nvSpPr>
-        <p:spPr>
-          <a:xfrm>
-            <a:off x="5349240" y="1783080"/>
-            <a:ext cx="6522415" cy="4663440"/>
-          </a:xfrm>
-          <a:prstGeom prst="rect">
-            <a:avLst/>
-          </a:prstGeom>
-          <a:noFill/>
-          <a:ln/>
-        </p:spPr>
-        <p:txBody>
-          <a:bodyPr wrap="square" lIns="0" tIns="0" rIns="0" bIns="0" rtlCol="0" anchor="t"/>
-          <a:lstStyle/>
-          <a:p>
-            <a:pPr algn="l" indent="0" marL="0">
-              <a:spcAft>
-                <a:spcPts val="800"/>
-              </a:spcAft>
-              <a:buNone/>
-            </a:pPr>
-            <a:r>
-              <a:rPr lang="en-US" sz="4000" b="1" dirty="0">
-                <a:solidFill>
-                  <a:srgbClr val="111111"/>
-                </a:solidFill>
-                <a:latin typeface="Times New Roman" pitchFamily="34" charset="0"/>
-                <a:ea typeface="Times New Roman" pitchFamily="34" charset="-122"/>
-                <a:cs typeface="Times New Roman" pitchFamily="34" charset="-120"/>
-              </a:rPr>
-              <a:t>Culture: </a:t>
-            </a:r>
-            <a:pPr algn="l" indent="0" marL="0">
-              <a:spcAft>
-                <a:spcPts val="800"/>
-              </a:spcAft>
-              <a:buNone/>
-            </a:pPr>
-            <a:r>
-              <a:rPr lang="en-US" sz="4000" dirty="0">
-                <a:solidFill>
-                  <a:srgbClr val="111111"/>
-                </a:solidFill>
-                <a:latin typeface="Times New Roman" pitchFamily="34" charset="0"/>
-                <a:ea typeface="Times New Roman" pitchFamily="34" charset="-122"/>
-                <a:cs typeface="Times New Roman" pitchFamily="34" charset="-120"/>
-              </a:rPr>
-              <a:t>Cultural festivals and community projects keep people attached to their village.</a:t>
-            </a:r>
-            <a:endParaRPr lang="en-US" sz="4000" dirty="0"/>
+              <a:t>Illustration: Yaoundé</a:t>
+            </a:r>
+            <a:endParaRPr lang="en-US" sz="1600" dirty="0"/>
           </a:p>
         </p:txBody>
       </p:sp>
@@ -14919,7 +15960,7 @@
                 <a:ea typeface="Calibri" pitchFamily="34" charset="-122"/>
                 <a:cs typeface="Calibri" pitchFamily="34" charset="-120"/>
               </a:rPr>
-              <a:t>FORMATIVE EVALUATION</a:t>
+              <a:t>BOARD SUMMARY</a:t>
             </a:r>
             <a:endParaRPr lang="en-US" sz="1400" dirty="0"/>
           </a:p>
@@ -14942,7 +15983,7 @@
         <p:spPr>
           <a:xfrm>
             <a:off x="0" y="658368"/>
-            <a:ext cx="5120640" cy="5833872"/>
+            <a:ext cx="1463040" cy="5833872"/>
           </a:xfrm>
           <a:prstGeom prst="rect">
             <a:avLst/>
@@ -14957,8 +15998,8 @@
         </p:nvSpPr>
         <p:spPr>
           <a:xfrm>
-            <a:off x="5349240" y="1005840"/>
-            <a:ext cx="6522415" cy="731520"/>
+            <a:off x="1691640" y="1005840"/>
+            <a:ext cx="10180015" cy="731520"/>
           </a:xfrm>
           <a:prstGeom prst="rect">
             <a:avLst/>
@@ -14984,7 +16025,7 @@
                 <a:ea typeface="Times New Roman" pitchFamily="34" charset="-122"/>
                 <a:cs typeface="Times New Roman" pitchFamily="34" charset="-120"/>
               </a:rPr>
-              <a:t>Evaluation 1</a:t>
+              <a:t>1. Causes of Rural Exodus</a:t>
             </a:r>
             <a:endParaRPr lang="en-US" sz="3600" dirty="0"/>
           </a:p>
@@ -14998,8 +16039,47 @@
         </p:nvSpPr>
         <p:spPr>
           <a:xfrm>
-            <a:off x="5349240" y="1783080"/>
-            <a:ext cx="6522415" cy="4663440"/>
+            <a:off x="1691640" y="1737360"/>
+            <a:ext cx="10180015" cy="457200"/>
+          </a:xfrm>
+          <a:prstGeom prst="rect">
+            <a:avLst/>
+          </a:prstGeom>
+          <a:noFill/>
+          <a:ln/>
+        </p:spPr>
+        <p:txBody>
+          <a:bodyPr wrap="square" lIns="0" tIns="0" rIns="0" bIns="0" rtlCol="0" anchor="ctr"/>
+          <a:lstStyle/>
+          <a:p>
+            <a:pPr algn="l" indent="0" marL="0">
+              <a:buNone/>
+            </a:pPr>
+            <a:r>
+              <a:rPr lang="en-US" sz="3200" b="1" dirty="0">
+                <a:solidFill>
+                  <a:srgbClr val="990011"/>
+                </a:solidFill>
+                <a:latin typeface="Times New Roman" pitchFamily="34" charset="0"/>
+                <a:ea typeface="Times New Roman" pitchFamily="34" charset="-122"/>
+                <a:cs typeface="Times New Roman" pitchFamily="34" charset="-120"/>
+              </a:rPr>
+              <a:t>B) Pull Factors</a:t>
+            </a:r>
+            <a:endParaRPr lang="en-US" sz="3200" dirty="0"/>
+          </a:p>
+        </p:txBody>
+      </p:sp>
+      <p:sp>
+        <p:nvSpPr>
+          <p:cNvPr id="6" name="Text 3"/>
+          <p:cNvSpPr/>
+          <p:nvPr/>
+        </p:nvSpPr>
+        <p:spPr>
+          <a:xfrm>
+            <a:off x="1691640" y="2240280"/>
+            <a:ext cx="10180015" cy="4206240"/>
           </a:xfrm>
           <a:prstGeom prst="rect">
             <a:avLst/>
@@ -15018,7 +16098,7 @@
               <a:buNone/>
             </a:pPr>
             <a:r>
-              <a:rPr lang="en-US" sz="4000" dirty="0">
+              <a:rPr lang="en-US" sz="4000" b="1" dirty="0">
                 <a:solidFill>
                   <a:srgbClr val="111111"/>
                 </a:solidFill>
@@ -15026,7 +16106,98 @@
                 <a:ea typeface="Times New Roman" pitchFamily="34" charset="-122"/>
                 <a:cs typeface="Times New Roman" pitchFamily="34" charset="-120"/>
               </a:rPr>
-              <a:t>Give two causes of rural exodus.</a:t>
+              <a:t>Social amenities: </a:t>
+            </a:r>
+            <a:pPr algn="l" indent="0" marL="0">
+              <a:spcAft>
+                <a:spcPts val="800"/>
+              </a:spcAft>
+              <a:buNone/>
+            </a:pPr>
+            <a:r>
+              <a:rPr lang="en-US" sz="4000" dirty="0">
+                <a:solidFill>
+                  <a:srgbClr val="111111"/>
+                </a:solidFill>
+                <a:latin typeface="Times New Roman" pitchFamily="34" charset="0"/>
+                <a:ea typeface="Times New Roman" pitchFamily="34" charset="-122"/>
+                <a:cs typeface="Times New Roman" pitchFamily="34" charset="-120"/>
+              </a:rPr>
+              <a:t>Towns have universities, hospitals, electricity and water.</a:t>
+            </a:r>
+            <a:endParaRPr lang="en-US" sz="4000" dirty="0"/>
+          </a:p>
+          <a:p>
+            <a:pPr algn="l" indent="0" marL="0">
+              <a:spcAft>
+                <a:spcPts val="800"/>
+              </a:spcAft>
+              <a:buNone/>
+            </a:pPr>
+            <a:r>
+              <a:rPr lang="en-US" sz="4000" b="1" dirty="0">
+                <a:solidFill>
+                  <a:srgbClr val="111111"/>
+                </a:solidFill>
+                <a:latin typeface="Times New Roman" pitchFamily="34" charset="0"/>
+                <a:ea typeface="Times New Roman" pitchFamily="34" charset="-122"/>
+                <a:cs typeface="Times New Roman" pitchFamily="34" charset="-120"/>
+              </a:rPr>
+              <a:t>Modern life: </a:t>
+            </a:r>
+            <a:pPr algn="l" indent="0" marL="0">
+              <a:spcAft>
+                <a:spcPts val="800"/>
+              </a:spcAft>
+              <a:buNone/>
+            </a:pPr>
+            <a:r>
+              <a:rPr lang="en-US" sz="4000" dirty="0">
+                <a:solidFill>
+                  <a:srgbClr val="111111"/>
+                </a:solidFill>
+                <a:latin typeface="Times New Roman" pitchFamily="34" charset="0"/>
+                <a:ea typeface="Times New Roman" pitchFamily="34" charset="-122"/>
+                <a:cs typeface="Times New Roman" pitchFamily="34" charset="-120"/>
+              </a:rPr>
+              <a:t>Young people are attracted by leisure, fashion and freedom.</a:t>
+            </a:r>
+            <a:endParaRPr lang="en-US" sz="4000" dirty="0"/>
+          </a:p>
+          <a:p>
+            <a:pPr algn="l" indent="0" marL="0">
+              <a:spcAft>
+                <a:spcPts val="800"/>
+              </a:spcAft>
+              <a:buNone/>
+            </a:pPr>
+            <a:r>
+              <a:rPr lang="en-US" sz="4000" b="1" dirty="0">
+                <a:solidFill>
+                  <a:srgbClr val="111111"/>
+                </a:solidFill>
+                <a:latin typeface="Times New Roman" pitchFamily="34" charset="0"/>
+                <a:ea typeface="Times New Roman" pitchFamily="34" charset="-122"/>
+                <a:cs typeface="Times New Roman" pitchFamily="34" charset="-120"/>
+              </a:rPr>
+              <a:t>Family links: </a:t>
+            </a:r>
+            <a:pPr algn="l" indent="0" marL="0">
+              <a:spcAft>
+                <a:spcPts val="800"/>
+              </a:spcAft>
+              <a:buNone/>
+            </a:pPr>
+            <a:r>
+              <a:rPr lang="en-US" sz="4000" dirty="0">
+                <a:solidFill>
+                  <a:srgbClr val="111111"/>
+                </a:solidFill>
+                <a:latin typeface="Times New Roman" pitchFamily="34" charset="0"/>
+                <a:ea typeface="Times New Roman" pitchFamily="34" charset="-122"/>
+                <a:cs typeface="Times New Roman" pitchFamily="34" charset="-120"/>
+              </a:rPr>
+              <a:t>Relatives already living in town receive the new migrants.</a:t>
             </a:r>
             <a:endParaRPr lang="en-US" sz="4000" dirty="0"/>
           </a:p>
@@ -15138,7 +16309,7 @@
                 <a:ea typeface="Calibri" pitchFamily="34" charset="-122"/>
                 <a:cs typeface="Calibri" pitchFamily="34" charset="-120"/>
               </a:rPr>
-              <a:t>FORMATIVE EVALUATION</a:t>
+              <a:t>BOARD SUMMARY</a:t>
             </a:r>
             <a:endParaRPr lang="en-US" sz="1400" dirty="0"/>
           </a:p>
@@ -15161,7 +16332,7 @@
         <p:spPr>
           <a:xfrm>
             <a:off x="0" y="658368"/>
-            <a:ext cx="5120640" cy="5833872"/>
+            <a:ext cx="3840480" cy="5833872"/>
           </a:xfrm>
           <a:prstGeom prst="rect">
             <a:avLst/>
@@ -15176,8 +16347,8 @@
         </p:nvSpPr>
         <p:spPr>
           <a:xfrm>
-            <a:off x="5349240" y="1005840"/>
-            <a:ext cx="6522415" cy="731520"/>
+            <a:off x="4069080" y="1005840"/>
+            <a:ext cx="7802575" cy="731520"/>
           </a:xfrm>
           <a:prstGeom prst="rect">
             <a:avLst/>
@@ -15203,7 +16374,7 @@
                 <a:ea typeface="Times New Roman" pitchFamily="34" charset="-122"/>
                 <a:cs typeface="Times New Roman" pitchFamily="34" charset="-120"/>
               </a:rPr>
-              <a:t>Expected Answer</a:t>
+              <a:t>2. Consequences of Rural Exodus</a:t>
             </a:r>
             <a:endParaRPr lang="en-US" sz="3600" dirty="0"/>
           </a:p>
@@ -15217,8 +16388,47 @@
         </p:nvSpPr>
         <p:spPr>
           <a:xfrm>
-            <a:off x="5349240" y="1783080"/>
-            <a:ext cx="6522415" cy="4663440"/>
+            <a:off x="4069080" y="1737360"/>
+            <a:ext cx="7802575" cy="457200"/>
+          </a:xfrm>
+          <a:prstGeom prst="rect">
+            <a:avLst/>
+          </a:prstGeom>
+          <a:noFill/>
+          <a:ln/>
+        </p:spPr>
+        <p:txBody>
+          <a:bodyPr wrap="square" lIns="0" tIns="0" rIns="0" bIns="0" rtlCol="0" anchor="ctr"/>
+          <a:lstStyle/>
+          <a:p>
+            <a:pPr algn="l" indent="0" marL="0">
+              <a:buNone/>
+            </a:pPr>
+            <a:r>
+              <a:rPr lang="en-US" sz="3200" b="1" dirty="0">
+                <a:solidFill>
+                  <a:srgbClr val="990011"/>
+                </a:solidFill>
+                <a:latin typeface="Times New Roman" pitchFamily="34" charset="0"/>
+                <a:ea typeface="Times New Roman" pitchFamily="34" charset="-122"/>
+                <a:cs typeface="Times New Roman" pitchFamily="34" charset="-120"/>
+              </a:rPr>
+              <a:t>A) In the Country Side</a:t>
+            </a:r>
+            <a:endParaRPr lang="en-US" sz="3200" dirty="0"/>
+          </a:p>
+        </p:txBody>
+      </p:sp>
+      <p:sp>
+        <p:nvSpPr>
+          <p:cNvPr id="6" name="Text 3"/>
+          <p:cNvSpPr/>
+          <p:nvPr/>
+        </p:nvSpPr>
+        <p:spPr>
+          <a:xfrm>
+            <a:off x="4069080" y="2240280"/>
+            <a:ext cx="7802575" cy="4206240"/>
           </a:xfrm>
           <a:prstGeom prst="rect">
             <a:avLst/>
@@ -15237,7 +16447,7 @@
               <a:buNone/>
             </a:pPr>
             <a:r>
-              <a:rPr lang="en-US" sz="4000" dirty="0">
+              <a:rPr lang="en-US" sz="4000" i="1" dirty="0">
                 <a:solidFill>
                   <a:srgbClr val="111111"/>
                 </a:solidFill>
@@ -15245,7 +16455,44 @@
                 <a:ea typeface="Times New Roman" pitchFamily="34" charset="-122"/>
                 <a:cs typeface="Times New Roman" pitchFamily="34" charset="-120"/>
               </a:rPr>
-              <a:t>Lack of jobs in villages and attractive services in towns.</a:t>
+              <a:t>Rural exodus has the following consequences in villages:</a:t>
+            </a:r>
+            <a:endParaRPr lang="en-US" sz="4000" dirty="0"/>
+          </a:p>
+          <a:p>
+            <a:pPr algn="l" indent="0" marL="0">
+              <a:spcAft>
+                <a:spcPts val="800"/>
+              </a:spcAft>
+              <a:buNone/>
+            </a:pPr>
+            <a:r>
+              <a:rPr lang="en-US" sz="4000" b="1" dirty="0">
+                <a:solidFill>
+                  <a:srgbClr val="111111"/>
+                </a:solidFill>
+                <a:latin typeface="Times New Roman" pitchFamily="34" charset="0"/>
+                <a:ea typeface="Times New Roman" pitchFamily="34" charset="-122"/>
+                <a:cs typeface="Times New Roman" pitchFamily="34" charset="-120"/>
+              </a:rPr>
+              <a:t>Loss of young workers: </a:t>
+            </a:r>
+            <a:pPr algn="l" indent="0" marL="0">
+              <a:spcAft>
+                <a:spcPts val="800"/>
+              </a:spcAft>
+              <a:buNone/>
+            </a:pPr>
+            <a:r>
+              <a:rPr lang="en-US" sz="4000" dirty="0">
+                <a:solidFill>
+                  <a:srgbClr val="111111"/>
+                </a:solidFill>
+                <a:latin typeface="Times New Roman" pitchFamily="34" charset="0"/>
+                <a:ea typeface="Times New Roman" pitchFamily="34" charset="-122"/>
+                <a:cs typeface="Times New Roman" pitchFamily="34" charset="-120"/>
+              </a:rPr>
+              <a:t>Only old people and children remain, and many fields are abandoned.</a:t>
             </a:r>
             <a:endParaRPr lang="en-US" sz="4000" dirty="0"/>
           </a:p>
@@ -15357,7 +16604,7 @@
                 <a:ea typeface="Calibri" pitchFamily="34" charset="-122"/>
                 <a:cs typeface="Calibri" pitchFamily="34" charset="-120"/>
               </a:rPr>
-              <a:t>FORMATIVE EVALUATION</a:t>
+              <a:t>BOARD SUMMARY</a:t>
             </a:r>
             <a:endParaRPr lang="en-US" sz="1400" dirty="0"/>
           </a:p>
@@ -15380,7 +16627,7 @@
         <p:spPr>
           <a:xfrm>
             <a:off x="0" y="658368"/>
-            <a:ext cx="5120640" cy="5833872"/>
+            <a:ext cx="1463040" cy="5833872"/>
           </a:xfrm>
           <a:prstGeom prst="rect">
             <a:avLst/>
@@ -15395,8 +16642,8 @@
         </p:nvSpPr>
         <p:spPr>
           <a:xfrm>
-            <a:off x="5349240" y="1005840"/>
-            <a:ext cx="6522415" cy="731520"/>
+            <a:off x="1691640" y="1005840"/>
+            <a:ext cx="10180015" cy="731520"/>
           </a:xfrm>
           <a:prstGeom prst="rect">
             <a:avLst/>
@@ -15422,7 +16669,7 @@
                 <a:ea typeface="Times New Roman" pitchFamily="34" charset="-122"/>
                 <a:cs typeface="Times New Roman" pitchFamily="34" charset="-120"/>
               </a:rPr>
-              <a:t>Evaluation 2</a:t>
+              <a:t>2. Consequences of Rural Exodus</a:t>
             </a:r>
             <a:endParaRPr lang="en-US" sz="3600" dirty="0"/>
           </a:p>
@@ -15436,8 +16683,47 @@
         </p:nvSpPr>
         <p:spPr>
           <a:xfrm>
-            <a:off x="5349240" y="1783080"/>
-            <a:ext cx="6522415" cy="4663440"/>
+            <a:off x="1691640" y="1737360"/>
+            <a:ext cx="10180015" cy="457200"/>
+          </a:xfrm>
+          <a:prstGeom prst="rect">
+            <a:avLst/>
+          </a:prstGeom>
+          <a:noFill/>
+          <a:ln/>
+        </p:spPr>
+        <p:txBody>
+          <a:bodyPr wrap="square" lIns="0" tIns="0" rIns="0" bIns="0" rtlCol="0" anchor="ctr"/>
+          <a:lstStyle/>
+          <a:p>
+            <a:pPr algn="l" indent="0" marL="0">
+              <a:buNone/>
+            </a:pPr>
+            <a:r>
+              <a:rPr lang="en-US" sz="3200" b="1" dirty="0">
+                <a:solidFill>
+                  <a:srgbClr val="990011"/>
+                </a:solidFill>
+                <a:latin typeface="Times New Roman" pitchFamily="34" charset="0"/>
+                <a:ea typeface="Times New Roman" pitchFamily="34" charset="-122"/>
+                <a:cs typeface="Times New Roman" pitchFamily="34" charset="-120"/>
+              </a:rPr>
+              <a:t>A) In the Country Side (continued)</a:t>
+            </a:r>
+            <a:endParaRPr lang="en-US" sz="3200" dirty="0"/>
+          </a:p>
+        </p:txBody>
+      </p:sp>
+      <p:sp>
+        <p:nvSpPr>
+          <p:cNvPr id="6" name="Text 3"/>
+          <p:cNvSpPr/>
+          <p:nvPr/>
+        </p:nvSpPr>
+        <p:spPr>
+          <a:xfrm>
+            <a:off x="1691640" y="2240280"/>
+            <a:ext cx="10180015" cy="4206240"/>
           </a:xfrm>
           <a:prstGeom prst="rect">
             <a:avLst/>
@@ -15456,7 +16742,7 @@
               <a:buNone/>
             </a:pPr>
             <a:r>
-              <a:rPr lang="en-US" sz="4000" dirty="0">
+              <a:rPr lang="en-US" sz="4000" b="1" dirty="0">
                 <a:solidFill>
                   <a:srgbClr val="111111"/>
                 </a:solidFill>
@@ -15464,7 +16750,98 @@
                 <a:ea typeface="Times New Roman" pitchFamily="34" charset="-122"/>
                 <a:cs typeface="Times New Roman" pitchFamily="34" charset="-120"/>
               </a:rPr>
-              <a:t>Give two ways to make villages attractive.</a:t>
+              <a:t>Fall of food production: </a:t>
+            </a:r>
+            <a:pPr algn="l" indent="0" marL="0">
+              <a:spcAft>
+                <a:spcPts val="800"/>
+              </a:spcAft>
+              <a:buNone/>
+            </a:pPr>
+            <a:r>
+              <a:rPr lang="en-US" sz="4000" dirty="0">
+                <a:solidFill>
+                  <a:srgbClr val="111111"/>
+                </a:solidFill>
+                <a:latin typeface="Times New Roman" pitchFamily="34" charset="0"/>
+                <a:ea typeface="Times New Roman" pitchFamily="34" charset="-122"/>
+                <a:cs typeface="Times New Roman" pitchFamily="34" charset="-120"/>
+              </a:rPr>
+              <a:t>Villages produce less food for themselves and for towns.</a:t>
+            </a:r>
+            <a:endParaRPr lang="en-US" sz="4000" dirty="0"/>
+          </a:p>
+          <a:p>
+            <a:pPr algn="l" indent="0" marL="0">
+              <a:spcAft>
+                <a:spcPts val="800"/>
+              </a:spcAft>
+              <a:buNone/>
+            </a:pPr>
+            <a:r>
+              <a:rPr lang="en-US" sz="4000" b="1" dirty="0">
+                <a:solidFill>
+                  <a:srgbClr val="111111"/>
+                </a:solidFill>
+                <a:latin typeface="Times New Roman" pitchFamily="34" charset="0"/>
+                <a:ea typeface="Times New Roman" pitchFamily="34" charset="-122"/>
+                <a:cs typeface="Times New Roman" pitchFamily="34" charset="-120"/>
+              </a:rPr>
+              <a:t>Money from migrants: </a:t>
+            </a:r>
+            <a:pPr algn="l" indent="0" marL="0">
+              <a:spcAft>
+                <a:spcPts val="800"/>
+              </a:spcAft>
+              <a:buNone/>
+            </a:pPr>
+            <a:r>
+              <a:rPr lang="en-US" sz="4000" dirty="0">
+                <a:solidFill>
+                  <a:srgbClr val="111111"/>
+                </a:solidFill>
+                <a:latin typeface="Times New Roman" pitchFamily="34" charset="0"/>
+                <a:ea typeface="Times New Roman" pitchFamily="34" charset="-122"/>
+                <a:cs typeface="Times New Roman" pitchFamily="34" charset="-120"/>
+              </a:rPr>
+              <a:t>Migrants send money and goods that help their families.</a:t>
+            </a:r>
+            <a:endParaRPr lang="en-US" sz="4000" dirty="0"/>
+          </a:p>
+          <a:p>
+            <a:pPr algn="l" indent="0" marL="0">
+              <a:spcAft>
+                <a:spcPts val="800"/>
+              </a:spcAft>
+              <a:buNone/>
+            </a:pPr>
+            <a:r>
+              <a:rPr lang="en-US" sz="4000" b="1" dirty="0">
+                <a:solidFill>
+                  <a:srgbClr val="111111"/>
+                </a:solidFill>
+                <a:latin typeface="Times New Roman" pitchFamily="34" charset="0"/>
+                <a:ea typeface="Times New Roman" pitchFamily="34" charset="-122"/>
+                <a:cs typeface="Times New Roman" pitchFamily="34" charset="-120"/>
+              </a:rPr>
+              <a:t>Village development: </a:t>
+            </a:r>
+            <a:pPr algn="l" indent="0" marL="0">
+              <a:spcAft>
+                <a:spcPts val="800"/>
+              </a:spcAft>
+              <a:buNone/>
+            </a:pPr>
+            <a:r>
+              <a:rPr lang="en-US" sz="4000" dirty="0">
+                <a:solidFill>
+                  <a:srgbClr val="111111"/>
+                </a:solidFill>
+                <a:latin typeface="Times New Roman" pitchFamily="34" charset="0"/>
+                <a:ea typeface="Times New Roman" pitchFamily="34" charset="-122"/>
+                <a:cs typeface="Times New Roman" pitchFamily="34" charset="-120"/>
+              </a:rPr>
+              <a:t>Elites in town finance schools, wells and roads in their villages.</a:t>
             </a:r>
             <a:endParaRPr lang="en-US" sz="4000" dirty="0"/>
           </a:p>
@@ -15576,15 +16953,176 @@
                 <a:ea typeface="Calibri" pitchFamily="34" charset="-122"/>
                 <a:cs typeface="Calibri" pitchFamily="34" charset="-120"/>
               </a:rPr>
-              <a:t>FORMATIVE EVALUATION</a:t>
+              <a:t>BOARD SUMMARY</a:t>
             </a:r>
             <a:endParaRPr lang="en-US" sz="1400" dirty="0"/>
+          </a:p>
+        </p:txBody>
+      </p:sp>
+      <p:sp>
+        <p:nvSpPr>
+          <p:cNvPr id="3" name="Text 1"/>
+          <p:cNvSpPr/>
+          <p:nvPr/>
+        </p:nvSpPr>
+        <p:spPr>
+          <a:xfrm>
+            <a:off x="365760" y="1005840"/>
+            <a:ext cx="11460175" cy="731520"/>
+          </a:xfrm>
+          <a:prstGeom prst="rect">
+            <a:avLst/>
+          </a:prstGeom>
+          <a:noFill/>
+          <a:ln/>
+        </p:spPr>
+        <p:txBody>
+          <a:bodyPr wrap="square" lIns="0" tIns="0" rIns="0" bIns="0" rtlCol="0" anchor="ctr">
+            <a:normAutofit/>
+          </a:bodyPr>
+          <a:lstStyle/>
+          <a:p>
+            <a:pPr algn="ctr" indent="0" marL="0">
+              <a:buNone/>
+            </a:pPr>
+            <a:r>
+              <a:rPr lang="en-US" sz="3600" b="1" dirty="0">
+                <a:solidFill>
+                  <a:srgbClr val="990011"/>
+                </a:solidFill>
+                <a:latin typeface="Times New Roman" pitchFamily="34" charset="0"/>
+                <a:ea typeface="Times New Roman" pitchFamily="34" charset="-122"/>
+                <a:cs typeface="Times New Roman" pitchFamily="34" charset="-120"/>
+              </a:rPr>
+              <a:t>2. Consequences of Rural Exodus</a:t>
+            </a:r>
+            <a:endParaRPr lang="en-US" sz="3600" dirty="0"/>
+          </a:p>
+        </p:txBody>
+      </p:sp>
+      <p:sp>
+        <p:nvSpPr>
+          <p:cNvPr id="4" name="Text 2"/>
+          <p:cNvSpPr/>
+          <p:nvPr/>
+        </p:nvSpPr>
+        <p:spPr>
+          <a:xfrm>
+            <a:off x="365760" y="1737360"/>
+            <a:ext cx="5120640" cy="457200"/>
+          </a:xfrm>
+          <a:prstGeom prst="rect">
+            <a:avLst/>
+          </a:prstGeom>
+          <a:noFill/>
+          <a:ln/>
+        </p:spPr>
+        <p:txBody>
+          <a:bodyPr wrap="square" lIns="0" tIns="0" rIns="0" bIns="0" rtlCol="0" anchor="ctr">
+            <a:normAutofit/>
+          </a:bodyPr>
+          <a:lstStyle/>
+          <a:p>
+            <a:pPr algn="l" indent="0" marL="0">
+              <a:buNone/>
+            </a:pPr>
+            <a:r>
+              <a:rPr lang="en-US" sz="3000" b="1" dirty="0">
+                <a:solidFill>
+                  <a:srgbClr val="990011"/>
+                </a:solidFill>
+                <a:latin typeface="Times New Roman" pitchFamily="34" charset="0"/>
+                <a:ea typeface="Times New Roman" pitchFamily="34" charset="-122"/>
+                <a:cs typeface="Times New Roman" pitchFamily="34" charset="-120"/>
+              </a:rPr>
+              <a:t>B) In the Towns</a:t>
+            </a:r>
+            <a:endParaRPr lang="en-US" sz="3000" dirty="0"/>
+          </a:p>
+        </p:txBody>
+      </p:sp>
+      <p:sp>
+        <p:nvSpPr>
+          <p:cNvPr id="5" name="Text 3"/>
+          <p:cNvSpPr/>
+          <p:nvPr/>
+        </p:nvSpPr>
+        <p:spPr>
+          <a:xfrm>
+            <a:off x="365760" y="2240280"/>
+            <a:ext cx="4846320" cy="4160520"/>
+          </a:xfrm>
+          <a:prstGeom prst="rect">
+            <a:avLst/>
+          </a:prstGeom>
+          <a:noFill/>
+          <a:ln/>
+        </p:spPr>
+        <p:txBody>
+          <a:bodyPr wrap="square" lIns="0" tIns="0" rIns="0" bIns="0" rtlCol="0" anchor="t"/>
+          <a:lstStyle/>
+          <a:p>
+            <a:pPr algn="l" indent="0" marL="0">
+              <a:spcAft>
+                <a:spcPts val="800"/>
+              </a:spcAft>
+              <a:buNone/>
+            </a:pPr>
+            <a:r>
+              <a:rPr lang="en-US" sz="3200" i="1" dirty="0">
+                <a:solidFill>
+                  <a:srgbClr val="111111"/>
+                </a:solidFill>
+                <a:latin typeface="Times New Roman" pitchFamily="34" charset="0"/>
+                <a:ea typeface="Times New Roman" pitchFamily="34" charset="-122"/>
+                <a:cs typeface="Times New Roman" pitchFamily="34" charset="-120"/>
+              </a:rPr>
+              <a:t>Rural exodus has the following consequences in towns:</a:t>
+            </a:r>
+            <a:endParaRPr lang="en-US" sz="3200" dirty="0"/>
+          </a:p>
+          <a:p>
+            <a:pPr algn="l" indent="0" marL="0">
+              <a:spcAft>
+                <a:spcPts val="800"/>
+              </a:spcAft>
+              <a:buNone/>
+            </a:pPr>
+            <a:r>
+              <a:rPr lang="en-US" sz="3200" b="1" dirty="0">
+                <a:solidFill>
+                  <a:srgbClr val="111111"/>
+                </a:solidFill>
+                <a:latin typeface="Times New Roman" pitchFamily="34" charset="0"/>
+                <a:ea typeface="Times New Roman" pitchFamily="34" charset="-122"/>
+                <a:cs typeface="Times New Roman" pitchFamily="34" charset="-120"/>
+              </a:rPr>
+              <a:t>Rapid growth and slums: </a:t>
+            </a:r>
+            <a:pPr algn="l" indent="0" marL="0">
+              <a:spcAft>
+                <a:spcPts val="800"/>
+              </a:spcAft>
+              <a:buNone/>
+            </a:pPr>
+            <a:r>
+              <a:rPr lang="en-US" sz="3200" dirty="0">
+                <a:solidFill>
+                  <a:srgbClr val="111111"/>
+                </a:solidFill>
+                <a:latin typeface="Times New Roman" pitchFamily="34" charset="0"/>
+                <a:ea typeface="Times New Roman" pitchFamily="34" charset="-122"/>
+                <a:cs typeface="Times New Roman" pitchFamily="34" charset="-120"/>
+              </a:rPr>
+              <a:t>Towns grow too fast, and migrants settle in crowded, unplanned quarters.</a:t>
+            </a:r>
+            <a:endParaRPr lang="en-US" sz="3200" dirty="0"/>
           </a:p>
         </p:txBody>
       </p:sp>
       <p:pic>
         <p:nvPicPr>
-          <p:cNvPr id="3" name="Image 0" descr="/home/claude/f4/img/minesec_sheet.png">    </p:cNvPr>
+          <p:cNvPr id="6" name="Image 0" descr="/home/claude/f4/img/v2/usa_slum.jpg">    </p:cNvPr>
           <p:cNvPicPr>
             <a:picLocks noChangeAspect="1"/>
           </p:cNvPicPr>
@@ -15598,8 +17136,8 @@
         </p:blipFill>
         <p:spPr>
           <a:xfrm>
-            <a:off x="0" y="658368"/>
-            <a:ext cx="5120640" cy="5833872"/>
+            <a:off x="5349240" y="2069407"/>
+            <a:ext cx="6659575" cy="3697594"/>
           </a:xfrm>
           <a:prstGeom prst="rect">
             <a:avLst/>
@@ -15608,14 +17146,14 @@
       </p:pic>
       <p:sp>
         <p:nvSpPr>
-          <p:cNvPr id="4" name="Text 1"/>
+          <p:cNvPr id="7" name="Text 4"/>
           <p:cNvSpPr/>
           <p:nvPr/>
         </p:nvSpPr>
         <p:spPr>
           <a:xfrm>
-            <a:off x="5349240" y="1005840"/>
-            <a:ext cx="6522415" cy="731520"/>
+            <a:off x="5349240" y="6089904"/>
+            <a:ext cx="6659575" cy="347472"/>
           </a:xfrm>
           <a:prstGeom prst="rect">
             <a:avLst/>
@@ -15624,68 +17162,24 @@
           <a:ln/>
         </p:spPr>
         <p:txBody>
-          <a:bodyPr wrap="square" lIns="0" tIns="0" rIns="0" bIns="0" rtlCol="0" anchor="ctr">
-            <a:normAutofit/>
-          </a:bodyPr>
+          <a:bodyPr wrap="square" lIns="0" tIns="0" rIns="0" bIns="0" rtlCol="0" anchor="ctr"/>
           <a:lstStyle/>
           <a:p>
             <a:pPr algn="ctr" indent="0" marL="0">
               <a:buNone/>
             </a:pPr>
             <a:r>
-              <a:rPr lang="en-US" sz="3600" b="1" dirty="0">
-                <a:solidFill>
-                  <a:srgbClr val="990011"/>
+              <a:rPr lang="en-US" sz="1600" i="1" dirty="0">
+                <a:solidFill>
+                  <a:srgbClr val="555555"/>
                 </a:solidFill>
                 <a:latin typeface="Times New Roman" pitchFamily="34" charset="0"/>
                 <a:ea typeface="Times New Roman" pitchFamily="34" charset="-122"/>
                 <a:cs typeface="Times New Roman" pitchFamily="34" charset="-120"/>
               </a:rPr>
-              <a:t>Expected Answer</a:t>
-            </a:r>
-            <a:endParaRPr lang="en-US" sz="3600" dirty="0"/>
-          </a:p>
-        </p:txBody>
-      </p:sp>
-      <p:sp>
-        <p:nvSpPr>
-          <p:cNvPr id="5" name="Text 2"/>
-          <p:cNvSpPr/>
-          <p:nvPr/>
-        </p:nvSpPr>
-        <p:spPr>
-          <a:xfrm>
-            <a:off x="5349240" y="1783080"/>
-            <a:ext cx="6522415" cy="4663440"/>
-          </a:xfrm>
-          <a:prstGeom prst="rect">
-            <a:avLst/>
-          </a:prstGeom>
-          <a:noFill/>
-          <a:ln/>
-        </p:spPr>
-        <p:txBody>
-          <a:bodyPr wrap="square" lIns="0" tIns="0" rIns="0" bIns="0" rtlCol="0" anchor="t"/>
-          <a:lstStyle/>
-          <a:p>
-            <a:pPr algn="l" indent="0" marL="0">
-              <a:spcAft>
-                <a:spcPts val="800"/>
-              </a:spcAft>
-              <a:buNone/>
-            </a:pPr>
-            <a:r>
-              <a:rPr lang="en-US" sz="4000" dirty="0">
-                <a:solidFill>
-                  <a:srgbClr val="111111"/>
-                </a:solidFill>
-                <a:latin typeface="Times New Roman" pitchFamily="34" charset="0"/>
-                <a:ea typeface="Times New Roman" pitchFamily="34" charset="-122"/>
-                <a:cs typeface="Times New Roman" pitchFamily="34" charset="-120"/>
-              </a:rPr>
-              <a:t>Build roads and create jobs in modern farming.</a:t>
-            </a:r>
-            <a:endParaRPr lang="en-US" sz="4000" dirty="0"/>
+              <a:t>Illustration: a slum</a:t>
+            </a:r>
+            <a:endParaRPr lang="en-US" sz="1600" dirty="0"/>
           </a:p>
         </p:txBody>
       </p:sp>
@@ -15795,7 +17289,7 @@
                 <a:ea typeface="Calibri" pitchFamily="34" charset="-122"/>
                 <a:cs typeface="Calibri" pitchFamily="34" charset="-120"/>
               </a:rPr>
-              <a:t>REMEDIATION</a:t>
+              <a:t>BOARD SUMMARY</a:t>
             </a:r>
             <a:endParaRPr lang="en-US" sz="1400" dirty="0"/>
           </a:p>
@@ -15818,7 +17312,7 @@
         <p:spPr>
           <a:xfrm>
             <a:off x="0" y="658368"/>
-            <a:ext cx="2468880" cy="5833872"/>
+            <a:ext cx="1463040" cy="5833872"/>
           </a:xfrm>
           <a:prstGeom prst="rect">
             <a:avLst/>
@@ -15833,8 +17327,8 @@
         </p:nvSpPr>
         <p:spPr>
           <a:xfrm>
-            <a:off x="2697480" y="1005840"/>
-            <a:ext cx="9174175" cy="731520"/>
+            <a:off x="1691640" y="1005840"/>
+            <a:ext cx="10180015" cy="731520"/>
           </a:xfrm>
           <a:prstGeom prst="rect">
             <a:avLst/>
@@ -15860,7 +17354,7 @@
                 <a:ea typeface="Times New Roman" pitchFamily="34" charset="-122"/>
                 <a:cs typeface="Times New Roman" pitchFamily="34" charset="-120"/>
               </a:rPr>
-              <a:t>Remediation</a:t>
+              <a:t>2. Consequences of Rural Exodus</a:t>
             </a:r>
             <a:endParaRPr lang="en-US" sz="3600" dirty="0"/>
           </a:p>
@@ -15874,8 +17368,47 @@
         </p:nvSpPr>
         <p:spPr>
           <a:xfrm>
-            <a:off x="2697480" y="1783080"/>
-            <a:ext cx="9174175" cy="4663440"/>
+            <a:off x="1691640" y="1737360"/>
+            <a:ext cx="10180015" cy="457200"/>
+          </a:xfrm>
+          <a:prstGeom prst="rect">
+            <a:avLst/>
+          </a:prstGeom>
+          <a:noFill/>
+          <a:ln/>
+        </p:spPr>
+        <p:txBody>
+          <a:bodyPr wrap="square" lIns="0" tIns="0" rIns="0" bIns="0" rtlCol="0" anchor="ctr"/>
+          <a:lstStyle/>
+          <a:p>
+            <a:pPr algn="l" indent="0" marL="0">
+              <a:buNone/>
+            </a:pPr>
+            <a:r>
+              <a:rPr lang="en-US" sz="3200" b="1" dirty="0">
+                <a:solidFill>
+                  <a:srgbClr val="990011"/>
+                </a:solidFill>
+                <a:latin typeface="Times New Roman" pitchFamily="34" charset="0"/>
+                <a:ea typeface="Times New Roman" pitchFamily="34" charset="-122"/>
+                <a:cs typeface="Times New Roman" pitchFamily="34" charset="-120"/>
+              </a:rPr>
+              <a:t>B) In the Towns</a:t>
+            </a:r>
+            <a:endParaRPr lang="en-US" sz="3200" dirty="0"/>
+          </a:p>
+        </p:txBody>
+      </p:sp>
+      <p:sp>
+        <p:nvSpPr>
+          <p:cNvPr id="6" name="Text 3"/>
+          <p:cNvSpPr/>
+          <p:nvPr/>
+        </p:nvSpPr>
+        <p:spPr>
+          <a:xfrm>
+            <a:off x="1691640" y="2240280"/>
+            <a:ext cx="10180015" cy="4206240"/>
           </a:xfrm>
           <a:prstGeom prst="rect">
             <a:avLst/>
@@ -15902,18 +17435,13 @@
                 <a:ea typeface="Times New Roman" pitchFamily="34" charset="-122"/>
                 <a:cs typeface="Times New Roman" pitchFamily="34" charset="-120"/>
               </a:rPr>
-              <a:t>Fill in the blanks:</a:t>
-            </a:r>
-            <a:endParaRPr lang="en-US" sz="4000" dirty="0"/>
-          </a:p>
-          <a:p>
-            <a:pPr algn="l" marL="342900" indent="-342900">
+              <a:t>Unemployment: </a:t>
+            </a:r>
+            <a:pPr algn="l" indent="0" marL="0">
               <a:spcAft>
                 <a:spcPts val="800"/>
               </a:spcAft>
-              <a:buSzPct val="100000"/>
-              <a:buFont typeface="+mj-lt"/>
-              <a:buAutoNum type="arabicPeriod" startAt="1"/>
+              <a:buNone/>
             </a:pPr>
             <a:r>
               <a:rPr lang="en-US" sz="4000" dirty="0">
@@ -15924,21 +17452,19 @@
                 <a:ea typeface="Times New Roman" pitchFamily="34" charset="-122"/>
                 <a:cs typeface="Times New Roman" pitchFamily="34" charset="-120"/>
               </a:rPr>
-              <a:t>The movement from villages to towns is rural ______.</a:t>
+              <a:t>There are not enough jobs, so many migrants work in the informal sector.</a:t>
             </a:r>
             <a:endParaRPr lang="en-US" sz="4000" dirty="0"/>
           </a:p>
           <a:p>
-            <a:pPr algn="l" marL="342900" indent="-342900">
+            <a:pPr algn="l" indent="0" marL="0">
               <a:spcAft>
                 <a:spcPts val="800"/>
               </a:spcAft>
-              <a:buSzPct val="100000"/>
-              <a:buFont typeface="+mj-lt"/>
-              <a:buAutoNum type="arabicPeriod" startAt="1"/>
-            </a:pPr>
-            <a:r>
-              <a:rPr lang="en-US" sz="4000" dirty="0">
+              <a:buNone/>
+            </a:pPr>
+            <a:r>
+              <a:rPr lang="en-US" sz="4000" b="1" dirty="0">
                 <a:solidFill>
                   <a:srgbClr val="111111"/>
                 </a:solidFill>
@@ -15946,18 +17472,13 @@
                 <a:ea typeface="Times New Roman" pitchFamily="34" charset="-122"/>
                 <a:cs typeface="Times New Roman" pitchFamily="34" charset="-120"/>
               </a:rPr>
-              <a:t>Jobs in towns are ______ factors.</a:t>
-            </a:r>
-            <a:endParaRPr lang="en-US" sz="4000" dirty="0"/>
-          </a:p>
-          <a:p>
-            <a:pPr algn="l" marL="342900" indent="-342900">
+              <a:t>Pressure on services: </a:t>
+            </a:r>
+            <a:pPr algn="l" indent="0" marL="0">
               <a:spcAft>
                 <a:spcPts val="800"/>
               </a:spcAft>
-              <a:buSzPct val="100000"/>
-              <a:buFont typeface="+mj-lt"/>
-              <a:buAutoNum type="arabicPeriod" startAt="1"/>
+              <a:buNone/>
             </a:pPr>
             <a:r>
               <a:rPr lang="en-US" sz="4000" dirty="0">
@@ -15968,7 +17489,44 @@
                 <a:ea typeface="Times New Roman" pitchFamily="34" charset="-122"/>
                 <a:cs typeface="Times New Roman" pitchFamily="34" charset="-120"/>
               </a:rPr>
-              <a:t>Poverty in villages is a ______ factor.</a:t>
+              <a:t>Schools, hospitals, water and transport become insufficient.</a:t>
+            </a:r>
+            <a:endParaRPr lang="en-US" sz="4000" dirty="0"/>
+          </a:p>
+          <a:p>
+            <a:pPr algn="l" indent="0" marL="0">
+              <a:spcAft>
+                <a:spcPts val="800"/>
+              </a:spcAft>
+              <a:buNone/>
+            </a:pPr>
+            <a:r>
+              <a:rPr lang="en-US" sz="4000" b="1" dirty="0">
+                <a:solidFill>
+                  <a:srgbClr val="111111"/>
+                </a:solidFill>
+                <a:latin typeface="Times New Roman" pitchFamily="34" charset="0"/>
+                <a:ea typeface="Times New Roman" pitchFamily="34" charset="-122"/>
+                <a:cs typeface="Times New Roman" pitchFamily="34" charset="-120"/>
+              </a:rPr>
+              <a:t>Insecurity: </a:t>
+            </a:r>
+            <a:pPr algn="l" indent="0" marL="0">
+              <a:spcAft>
+                <a:spcPts val="800"/>
+              </a:spcAft>
+              <a:buNone/>
+            </a:pPr>
+            <a:r>
+              <a:rPr lang="en-US" sz="4000" dirty="0">
+                <a:solidFill>
+                  <a:srgbClr val="111111"/>
+                </a:solidFill>
+                <a:latin typeface="Times New Roman" pitchFamily="34" charset="0"/>
+                <a:ea typeface="Times New Roman" pitchFamily="34" charset="-122"/>
+                <a:cs typeface="Times New Roman" pitchFamily="34" charset="-120"/>
+              </a:rPr>
+              <a:t>Poverty and unemployment favour theft and delinquency.</a:t>
             </a:r>
             <a:endParaRPr lang="en-US" sz="4000" dirty="0"/>
           </a:p>
@@ -16080,7 +17638,7 @@
                 <a:ea typeface="Calibri" pitchFamily="34" charset="-122"/>
                 <a:cs typeface="Calibri" pitchFamily="34" charset="-120"/>
               </a:rPr>
-              <a:t>HOMEWORK</a:t>
+              <a:t>BOARD SUMMARY</a:t>
             </a:r>
             <a:endParaRPr lang="en-US" sz="1400" dirty="0"/>
           </a:p>
@@ -16145,7 +17703,7 @@
                 <a:ea typeface="Times New Roman" pitchFamily="34" charset="-122"/>
                 <a:cs typeface="Times New Roman" pitchFamily="34" charset="-120"/>
               </a:rPr>
-              <a:t>Homework</a:t>
+              <a:t>3. Making the Country Side More Attractive</a:t>
             </a:r>
             <a:endParaRPr lang="en-US" sz="3600" dirty="0"/>
           </a:p>
@@ -16179,7 +17737,7 @@
               <a:buNone/>
             </a:pPr>
             <a:r>
-              <a:rPr lang="en-US" sz="4000" dirty="0">
+              <a:rPr lang="en-US" sz="4000" i="1" dirty="0">
                 <a:solidFill>
                   <a:srgbClr val="111111"/>
                 </a:solidFill>
@@ -16187,7 +17745,44 @@
                 <a:ea typeface="Times New Roman" pitchFamily="34" charset="-122"/>
                 <a:cs typeface="Times New Roman" pitchFamily="34" charset="-120"/>
               </a:rPr>
-              <a:t>Propose three projects that could keep young people in your village.</a:t>
+              <a:t>The country side can be made more attractive by the following measures:</a:t>
+            </a:r>
+            <a:endParaRPr lang="en-US" sz="4000" dirty="0"/>
+          </a:p>
+          <a:p>
+            <a:pPr algn="l" indent="0" marL="0">
+              <a:spcAft>
+                <a:spcPts val="800"/>
+              </a:spcAft>
+              <a:buNone/>
+            </a:pPr>
+            <a:r>
+              <a:rPr lang="en-US" sz="4000" b="1" dirty="0">
+                <a:solidFill>
+                  <a:srgbClr val="111111"/>
+                </a:solidFill>
+                <a:latin typeface="Times New Roman" pitchFamily="34" charset="0"/>
+                <a:ea typeface="Times New Roman" pitchFamily="34" charset="-122"/>
+                <a:cs typeface="Times New Roman" pitchFamily="34" charset="-120"/>
+              </a:rPr>
+              <a:t>Roads: </a:t>
+            </a:r>
+            <a:pPr algn="l" indent="0" marL="0">
+              <a:spcAft>
+                <a:spcPts val="800"/>
+              </a:spcAft>
+              <a:buNone/>
+            </a:pPr>
+            <a:r>
+              <a:rPr lang="en-US" sz="4000" dirty="0">
+                <a:solidFill>
+                  <a:srgbClr val="111111"/>
+                </a:solidFill>
+                <a:latin typeface="Times New Roman" pitchFamily="34" charset="0"/>
+                <a:ea typeface="Times New Roman" pitchFamily="34" charset="-122"/>
+                <a:cs typeface="Times New Roman" pitchFamily="34" charset="-120"/>
+              </a:rPr>
+              <a:t>Good rural roads link villages to markets and towns.</a:t>
             </a:r>
             <a:endParaRPr lang="en-US" sz="4000" dirty="0"/>
           </a:p>
@@ -16299,7 +17894,7 @@
                 <a:ea typeface="Calibri" pitchFamily="34" charset="-122"/>
                 <a:cs typeface="Calibri" pitchFamily="34" charset="-120"/>
               </a:rPr>
-              <a:t>BILINGUAL GAME</a:t>
+              <a:t>BOARD SUMMARY</a:t>
             </a:r>
             <a:endParaRPr lang="en-US" sz="1400" dirty="0"/>
           </a:p>
@@ -16313,8 +17908,8 @@
         </p:nvSpPr>
         <p:spPr>
           <a:xfrm>
-            <a:off x="457200" y="1005840"/>
-            <a:ext cx="11277295" cy="731520"/>
+            <a:off x="365760" y="1005840"/>
+            <a:ext cx="11460175" cy="731520"/>
           </a:xfrm>
           <a:prstGeom prst="rect">
             <a:avLst/>
@@ -16323,7 +17918,9 @@
           <a:ln/>
         </p:spPr>
         <p:txBody>
-          <a:bodyPr wrap="square" lIns="0" tIns="0" rIns="0" bIns="0" rtlCol="0" anchor="ctr"/>
+          <a:bodyPr wrap="square" lIns="0" tIns="0" rIns="0" bIns="0" rtlCol="0" anchor="ctr">
+            <a:normAutofit/>
+          </a:bodyPr>
           <a:lstStyle/>
           <a:p>
             <a:pPr algn="ctr" indent="0" marL="0">
@@ -16338,6 +17935,2424 @@
                 <a:ea typeface="Times New Roman" pitchFamily="34" charset="-122"/>
                 <a:cs typeface="Times New Roman" pitchFamily="34" charset="-120"/>
               </a:rPr>
+              <a:t>3. Making the Country Side More Attractive</a:t>
+            </a:r>
+            <a:endParaRPr lang="en-US" sz="3600" dirty="0"/>
+          </a:p>
+        </p:txBody>
+      </p:sp>
+      <p:sp>
+        <p:nvSpPr>
+          <p:cNvPr id="4" name="Text 2"/>
+          <p:cNvSpPr/>
+          <p:nvPr/>
+        </p:nvSpPr>
+        <p:spPr>
+          <a:xfrm>
+            <a:off x="365760" y="1783080"/>
+            <a:ext cx="4846320" cy="4617720"/>
+          </a:xfrm>
+          <a:prstGeom prst="rect">
+            <a:avLst/>
+          </a:prstGeom>
+          <a:noFill/>
+          <a:ln/>
+        </p:spPr>
+        <p:txBody>
+          <a:bodyPr wrap="square" lIns="0" tIns="0" rIns="0" bIns="0" rtlCol="0" anchor="t"/>
+          <a:lstStyle/>
+          <a:p>
+            <a:pPr algn="l" indent="0" marL="0">
+              <a:spcAft>
+                <a:spcPts val="800"/>
+              </a:spcAft>
+              <a:buNone/>
+            </a:pPr>
+            <a:r>
+              <a:rPr lang="en-US" sz="3600" b="1" dirty="0">
+                <a:solidFill>
+                  <a:srgbClr val="111111"/>
+                </a:solidFill>
+                <a:latin typeface="Times New Roman" pitchFamily="34" charset="0"/>
+                <a:ea typeface="Times New Roman" pitchFamily="34" charset="-122"/>
+                <a:cs typeface="Times New Roman" pitchFamily="34" charset="-120"/>
+              </a:rPr>
+              <a:t>Social amenities: </a:t>
+            </a:r>
+            <a:pPr algn="l" indent="0" marL="0">
+              <a:spcAft>
+                <a:spcPts val="800"/>
+              </a:spcAft>
+              <a:buNone/>
+            </a:pPr>
+            <a:r>
+              <a:rPr lang="en-US" sz="3600" dirty="0">
+                <a:solidFill>
+                  <a:srgbClr val="111111"/>
+                </a:solidFill>
+                <a:latin typeface="Times New Roman" pitchFamily="34" charset="0"/>
+                <a:ea typeface="Times New Roman" pitchFamily="34" charset="-122"/>
+                <a:cs typeface="Times New Roman" pitchFamily="34" charset="-120"/>
+              </a:rPr>
+              <a:t>Schools, health centres, water points and electricity improve daily life.</a:t>
+            </a:r>
+            <a:endParaRPr lang="en-US" sz="3600" dirty="0"/>
+          </a:p>
+        </p:txBody>
+      </p:sp>
+      <p:pic>
+        <p:nvPicPr>
+          <p:cNvPr id="5" name="Image 0" descr="/home/claude/f4/img/v2/usa_pump.jpg">    </p:cNvPr>
+          <p:cNvPicPr>
+            <a:picLocks noChangeAspect="1"/>
+          </p:cNvPicPr>
+          <p:nvPr/>
+        </p:nvPicPr>
+        <p:blipFill>
+          <a:blip r:embed="rId1"/>
+          <a:stretch>
+            <a:fillRect/>
+          </a:stretch>
+        </p:blipFill>
+        <p:spPr>
+          <a:xfrm>
+            <a:off x="5349240" y="2070315"/>
+            <a:ext cx="6659575" cy="3695777"/>
+          </a:xfrm>
+          <a:prstGeom prst="rect">
+            <a:avLst/>
+          </a:prstGeom>
+        </p:spPr>
+      </p:pic>
+      <p:sp>
+        <p:nvSpPr>
+          <p:cNvPr id="6" name="Text 3"/>
+          <p:cNvSpPr/>
+          <p:nvPr/>
+        </p:nvSpPr>
+        <p:spPr>
+          <a:xfrm>
+            <a:off x="5349240" y="6089904"/>
+            <a:ext cx="6659575" cy="347472"/>
+          </a:xfrm>
+          <a:prstGeom prst="rect">
+            <a:avLst/>
+          </a:prstGeom>
+          <a:noFill/>
+          <a:ln/>
+        </p:spPr>
+        <p:txBody>
+          <a:bodyPr wrap="square" lIns="0" tIns="0" rIns="0" bIns="0" rtlCol="0" anchor="ctr"/>
+          <a:lstStyle/>
+          <a:p>
+            <a:pPr algn="ctr" indent="0" marL="0">
+              <a:buNone/>
+            </a:pPr>
+            <a:r>
+              <a:rPr lang="en-US" sz="1600" i="1" dirty="0">
+                <a:solidFill>
+                  <a:srgbClr val="555555"/>
+                </a:solidFill>
+                <a:latin typeface="Times New Roman" pitchFamily="34" charset="0"/>
+                <a:ea typeface="Times New Roman" pitchFamily="34" charset="-122"/>
+                <a:cs typeface="Times New Roman" pitchFamily="34" charset="-120"/>
+              </a:rPr>
+              <a:t>Illustration: a village water pump</a:t>
+            </a:r>
+            <a:endParaRPr lang="en-US" sz="1600" dirty="0"/>
+          </a:p>
+        </p:txBody>
+      </p:sp>
+      <p:sp>
+        <p:nvSpPr>
+          <p:cNvPr id="25" name="Slide Number Placeholder 0"/>
+          <p:cNvSpPr>
+            <a:spLocks noGrp="1"/>
+          </p:cNvSpPr>
+          <p:nvPr>
+            <p:ph type="sldNum" sz="quarter" idx="4294967295"/>
+          </p:nvPr>
+        </p:nvSpPr>
+        <p:spPr>
+          <a:xfrm>
+            <a:off x="27432" y="91440"/>
+            <a:ext cx="585216" cy="475488"/>
+          </a:xfrm>
+          <a:prstGeom prst="rect">
+            <a:avLst/>
+          </a:prstGeom>
+          <a:extLst>
+            <a:ext uri="{C572A759-6A51-4108-AA02-DFA0A04FC94B}">
+              <ma14:wrappingTextBoxFlag xmlns:ma14="http://schemas.microsoft.com/office/mac/drawingml/2011/main" val="0"/>
+            </a:ext>
+          </a:extLst>
+        </p:spPr>
+        <p:txBody>
+          <a:bodyPr/>
+          <a:lstStyle>
+            <a:lvl1pPr>
+              <a:defRPr sz="2000">
+                <a:solidFill>
+                  <a:srgbClr val="FFFFFF"/>
+                </a:solidFill>
+                <a:latin typeface="Calibri"/>
+                <a:ea typeface="Calibri"/>
+                <a:cs typeface="Calibri"/>
+              </a:defRPr>
+            </a:lvl1pPr>
+          </a:lstStyle>
+          <a:p>
+            <a:pPr algn="ctr"/>
+            <a:fld id="{F7021451-1387-4CA6-816F-3879F97B5CBC}" type="slidenum">
+              <a:rPr b="1" lang="en-US"/>
+              <a:t>46</a:t>
+            </a:fld>
+            <a:endParaRPr lang="en-US"/>
+          </a:p>
+        </p:txBody>
+      </p:sp>
+    </p:spTree>
+  </p:cSld>
+  <p:clrMapOvr>
+    <a:masterClrMapping/>
+  </p:clrMapOvr>
+</p:sld>
+</file>
+
+<file path=ppt/slides/slide47.xml><?xml version="1.0" encoding="utf-8"?>
+<p:sld xmlns:a="http://schemas.openxmlformats.org/drawingml/2006/main" xmlns:r="http://schemas.openxmlformats.org/officeDocument/2006/relationships" xmlns:p="http://schemas.openxmlformats.org/presentationml/2006/main">
+  <p:cSld name="Slide 47">
+    <p:spTree>
+      <p:nvGrpSpPr>
+        <p:cNvPr id="1" name=""/>
+        <p:cNvGrpSpPr/>
+        <p:nvPr/>
+      </p:nvGrpSpPr>
+      <p:grpSpPr>
+        <a:xfrm>
+          <a:off x="0" y="0"/>
+          <a:ext cx="0" cy="0"/>
+          <a:chOff x="0" y="0"/>
+          <a:chExt cx="0" cy="0"/>
+        </a:xfrm>
+      </p:grpSpPr>
+      <p:sp>
+        <p:nvSpPr>
+          <p:cNvPr id="2" name="Text 0"/>
+          <p:cNvSpPr/>
+          <p:nvPr/>
+        </p:nvSpPr>
+        <p:spPr>
+          <a:xfrm>
+            <a:off x="457200" y="713232"/>
+            <a:ext cx="11368735" cy="274320"/>
+          </a:xfrm>
+          <a:prstGeom prst="rect">
+            <a:avLst/>
+          </a:prstGeom>
+          <a:noFill/>
+          <a:ln/>
+        </p:spPr>
+        <p:txBody>
+          <a:bodyPr wrap="square" lIns="0" tIns="0" rIns="0" bIns="0" rtlCol="0" anchor="ctr"/>
+          <a:lstStyle/>
+          <a:p>
+            <a:pPr algn="r" indent="0" marL="0">
+              <a:buNone/>
+            </a:pPr>
+            <a:r>
+              <a:rPr lang="en-US" sz="1400" b="1" dirty="0">
+                <a:solidFill>
+                  <a:srgbClr val="1C3F6E"/>
+                </a:solidFill>
+                <a:latin typeface="Calibri" pitchFamily="34" charset="0"/>
+                <a:ea typeface="Calibri" pitchFamily="34" charset="-122"/>
+                <a:cs typeface="Calibri" pitchFamily="34" charset="-120"/>
+              </a:rPr>
+              <a:t>BOARD SUMMARY</a:t>
+            </a:r>
+            <a:endParaRPr lang="en-US" sz="1400" dirty="0"/>
+          </a:p>
+        </p:txBody>
+      </p:sp>
+      <p:pic>
+        <p:nvPicPr>
+          <p:cNvPr id="3" name="Image 0" descr="/home/claude/f4/img/minesec_sheet.png">    </p:cNvPr>
+          <p:cNvPicPr>
+            <a:picLocks noChangeAspect="1"/>
+          </p:cNvPicPr>
+          <p:nvPr/>
+        </p:nvPicPr>
+        <p:blipFill>
+          <a:blip r:embed="rId1"/>
+          <a:stretch>
+            <a:fillRect/>
+          </a:stretch>
+        </p:blipFill>
+        <p:spPr>
+          <a:xfrm>
+            <a:off x="0" y="658368"/>
+            <a:ext cx="3840480" cy="5833872"/>
+          </a:xfrm>
+          <a:prstGeom prst="rect">
+            <a:avLst/>
+          </a:prstGeom>
+        </p:spPr>
+      </p:pic>
+      <p:sp>
+        <p:nvSpPr>
+          <p:cNvPr id="4" name="Text 1"/>
+          <p:cNvSpPr/>
+          <p:nvPr/>
+        </p:nvSpPr>
+        <p:spPr>
+          <a:xfrm>
+            <a:off x="4069080" y="1005840"/>
+            <a:ext cx="7802575" cy="731520"/>
+          </a:xfrm>
+          <a:prstGeom prst="rect">
+            <a:avLst/>
+          </a:prstGeom>
+          <a:noFill/>
+          <a:ln/>
+        </p:spPr>
+        <p:txBody>
+          <a:bodyPr wrap="square" lIns="0" tIns="0" rIns="0" bIns="0" rtlCol="0" anchor="ctr">
+            <a:normAutofit/>
+          </a:bodyPr>
+          <a:lstStyle/>
+          <a:p>
+            <a:pPr algn="ctr" indent="0" marL="0">
+              <a:buNone/>
+            </a:pPr>
+            <a:r>
+              <a:rPr lang="en-US" sz="3600" b="1" dirty="0">
+                <a:solidFill>
+                  <a:srgbClr val="990011"/>
+                </a:solidFill>
+                <a:latin typeface="Times New Roman" pitchFamily="34" charset="0"/>
+                <a:ea typeface="Times New Roman" pitchFamily="34" charset="-122"/>
+                <a:cs typeface="Times New Roman" pitchFamily="34" charset="-120"/>
+              </a:rPr>
+              <a:t>3. Making the Country Side More Attractive</a:t>
+            </a:r>
+            <a:endParaRPr lang="en-US" sz="3600" dirty="0"/>
+          </a:p>
+        </p:txBody>
+      </p:sp>
+      <p:sp>
+        <p:nvSpPr>
+          <p:cNvPr id="5" name="Text 2"/>
+          <p:cNvSpPr/>
+          <p:nvPr/>
+        </p:nvSpPr>
+        <p:spPr>
+          <a:xfrm>
+            <a:off x="4069080" y="1783080"/>
+            <a:ext cx="7802575" cy="4663440"/>
+          </a:xfrm>
+          <a:prstGeom prst="rect">
+            <a:avLst/>
+          </a:prstGeom>
+          <a:noFill/>
+          <a:ln/>
+        </p:spPr>
+        <p:txBody>
+          <a:bodyPr wrap="square" lIns="0" tIns="0" rIns="0" bIns="0" rtlCol="0" anchor="t"/>
+          <a:lstStyle/>
+          <a:p>
+            <a:pPr algn="l" indent="0" marL="0">
+              <a:spcAft>
+                <a:spcPts val="800"/>
+              </a:spcAft>
+              <a:buNone/>
+            </a:pPr>
+            <a:r>
+              <a:rPr lang="en-US" sz="4000" b="1" dirty="0">
+                <a:solidFill>
+                  <a:srgbClr val="111111"/>
+                </a:solidFill>
+                <a:latin typeface="Times New Roman" pitchFamily="34" charset="0"/>
+                <a:ea typeface="Times New Roman" pitchFamily="34" charset="-122"/>
+                <a:cs typeface="Times New Roman" pitchFamily="34" charset="-120"/>
+              </a:rPr>
+              <a:t>Modern farming: </a:t>
+            </a:r>
+            <a:pPr algn="l" indent="0" marL="0">
+              <a:spcAft>
+                <a:spcPts val="800"/>
+              </a:spcAft>
+              <a:buNone/>
+            </a:pPr>
+            <a:r>
+              <a:rPr lang="en-US" sz="4000" dirty="0">
+                <a:solidFill>
+                  <a:srgbClr val="111111"/>
+                </a:solidFill>
+                <a:latin typeface="Times New Roman" pitchFamily="34" charset="0"/>
+                <a:ea typeface="Times New Roman" pitchFamily="34" charset="-122"/>
+                <a:cs typeface="Times New Roman" pitchFamily="34" charset="-120"/>
+              </a:rPr>
+              <a:t>Credit, tools, improved seeds and extension workers raise incomes.</a:t>
+            </a:r>
+            <a:endParaRPr lang="en-US" sz="4000" dirty="0"/>
+          </a:p>
+          <a:p>
+            <a:pPr algn="l" indent="0" marL="0">
+              <a:spcAft>
+                <a:spcPts val="800"/>
+              </a:spcAft>
+              <a:buNone/>
+            </a:pPr>
+            <a:r>
+              <a:rPr lang="en-US" sz="4000" b="1" dirty="0">
+                <a:solidFill>
+                  <a:srgbClr val="111111"/>
+                </a:solidFill>
+                <a:latin typeface="Times New Roman" pitchFamily="34" charset="0"/>
+                <a:ea typeface="Times New Roman" pitchFamily="34" charset="-122"/>
+                <a:cs typeface="Times New Roman" pitchFamily="34" charset="-120"/>
+              </a:rPr>
+              <a:t>Cooperatives and CIGs: </a:t>
+            </a:r>
+            <a:pPr algn="l" indent="0" marL="0">
+              <a:spcAft>
+                <a:spcPts val="800"/>
+              </a:spcAft>
+              <a:buNone/>
+            </a:pPr>
+            <a:r>
+              <a:rPr lang="en-US" sz="4000" dirty="0">
+                <a:solidFill>
+                  <a:srgbClr val="111111"/>
+                </a:solidFill>
+                <a:latin typeface="Times New Roman" pitchFamily="34" charset="0"/>
+                <a:ea typeface="Times New Roman" pitchFamily="34" charset="-122"/>
+                <a:cs typeface="Times New Roman" pitchFamily="34" charset="-120"/>
+              </a:rPr>
+              <a:t>Farmers group together to buy inputs and sell at better prices.</a:t>
+            </a:r>
+            <a:endParaRPr lang="en-US" sz="4000" dirty="0"/>
+          </a:p>
+        </p:txBody>
+      </p:sp>
+      <p:sp>
+        <p:nvSpPr>
+          <p:cNvPr id="25" name="Slide Number Placeholder 0"/>
+          <p:cNvSpPr>
+            <a:spLocks noGrp="1"/>
+          </p:cNvSpPr>
+          <p:nvPr>
+            <p:ph type="sldNum" sz="quarter" idx="4294967295"/>
+          </p:nvPr>
+        </p:nvSpPr>
+        <p:spPr>
+          <a:xfrm>
+            <a:off x="27432" y="91440"/>
+            <a:ext cx="585216" cy="475488"/>
+          </a:xfrm>
+          <a:prstGeom prst="rect">
+            <a:avLst/>
+          </a:prstGeom>
+          <a:extLst>
+            <a:ext uri="{C572A759-6A51-4108-AA02-DFA0A04FC94B}">
+              <ma14:wrappingTextBoxFlag xmlns:ma14="http://schemas.microsoft.com/office/mac/drawingml/2011/main" val="0"/>
+            </a:ext>
+          </a:extLst>
+        </p:spPr>
+        <p:txBody>
+          <a:bodyPr/>
+          <a:lstStyle>
+            <a:lvl1pPr>
+              <a:defRPr sz="2000">
+                <a:solidFill>
+                  <a:srgbClr val="FFFFFF"/>
+                </a:solidFill>
+                <a:latin typeface="Calibri"/>
+                <a:ea typeface="Calibri"/>
+                <a:cs typeface="Calibri"/>
+              </a:defRPr>
+            </a:lvl1pPr>
+          </a:lstStyle>
+          <a:p>
+            <a:pPr algn="ctr"/>
+            <a:fld id="{F7021451-1387-4CA6-816F-3879F97B5CBC}" type="slidenum">
+              <a:rPr b="1" lang="en-US"/>
+              <a:t>47</a:t>
+            </a:fld>
+            <a:endParaRPr lang="en-US"/>
+          </a:p>
+        </p:txBody>
+      </p:sp>
+    </p:spTree>
+  </p:cSld>
+  <p:clrMapOvr>
+    <a:masterClrMapping/>
+  </p:clrMapOvr>
+</p:sld>
+</file>
+
+<file path=ppt/slides/slide48.xml><?xml version="1.0" encoding="utf-8"?>
+<p:sld xmlns:a="http://schemas.openxmlformats.org/drawingml/2006/main" xmlns:r="http://schemas.openxmlformats.org/officeDocument/2006/relationships" xmlns:p="http://schemas.openxmlformats.org/presentationml/2006/main">
+  <p:cSld name="Slide 48">
+    <p:spTree>
+      <p:nvGrpSpPr>
+        <p:cNvPr id="1" name=""/>
+        <p:cNvGrpSpPr/>
+        <p:nvPr/>
+      </p:nvGrpSpPr>
+      <p:grpSpPr>
+        <a:xfrm>
+          <a:off x="0" y="0"/>
+          <a:ext cx="0" cy="0"/>
+          <a:chOff x="0" y="0"/>
+          <a:chExt cx="0" cy="0"/>
+        </a:xfrm>
+      </p:grpSpPr>
+      <p:sp>
+        <p:nvSpPr>
+          <p:cNvPr id="2" name="Text 0"/>
+          <p:cNvSpPr/>
+          <p:nvPr/>
+        </p:nvSpPr>
+        <p:spPr>
+          <a:xfrm>
+            <a:off x="457200" y="713232"/>
+            <a:ext cx="11368735" cy="274320"/>
+          </a:xfrm>
+          <a:prstGeom prst="rect">
+            <a:avLst/>
+          </a:prstGeom>
+          <a:noFill/>
+          <a:ln/>
+        </p:spPr>
+        <p:txBody>
+          <a:bodyPr wrap="square" lIns="0" tIns="0" rIns="0" bIns="0" rtlCol="0" anchor="ctr"/>
+          <a:lstStyle/>
+          <a:p>
+            <a:pPr algn="r" indent="0" marL="0">
+              <a:buNone/>
+            </a:pPr>
+            <a:r>
+              <a:rPr lang="en-US" sz="1400" b="1" dirty="0">
+                <a:solidFill>
+                  <a:srgbClr val="1C3F6E"/>
+                </a:solidFill>
+                <a:latin typeface="Calibri" pitchFamily="34" charset="0"/>
+                <a:ea typeface="Calibri" pitchFamily="34" charset="-122"/>
+                <a:cs typeface="Calibri" pitchFamily="34" charset="-120"/>
+              </a:rPr>
+              <a:t>BOARD SUMMARY</a:t>
+            </a:r>
+            <a:endParaRPr lang="en-US" sz="1400" dirty="0"/>
+          </a:p>
+        </p:txBody>
+      </p:sp>
+      <p:pic>
+        <p:nvPicPr>
+          <p:cNvPr id="3" name="Image 0" descr="/home/claude/f4/img/minesec_sheet.png">    </p:cNvPr>
+          <p:cNvPicPr>
+            <a:picLocks noChangeAspect="1"/>
+          </p:cNvPicPr>
+          <p:nvPr/>
+        </p:nvPicPr>
+        <p:blipFill>
+          <a:blip r:embed="rId1"/>
+          <a:stretch>
+            <a:fillRect/>
+          </a:stretch>
+        </p:blipFill>
+        <p:spPr>
+          <a:xfrm>
+            <a:off x="0" y="658368"/>
+            <a:ext cx="2468880" cy="5833872"/>
+          </a:xfrm>
+          <a:prstGeom prst="rect">
+            <a:avLst/>
+          </a:prstGeom>
+        </p:spPr>
+      </p:pic>
+      <p:sp>
+        <p:nvSpPr>
+          <p:cNvPr id="4" name="Text 1"/>
+          <p:cNvSpPr/>
+          <p:nvPr/>
+        </p:nvSpPr>
+        <p:spPr>
+          <a:xfrm>
+            <a:off x="2697480" y="1005840"/>
+            <a:ext cx="9174175" cy="731520"/>
+          </a:xfrm>
+          <a:prstGeom prst="rect">
+            <a:avLst/>
+          </a:prstGeom>
+          <a:noFill/>
+          <a:ln/>
+        </p:spPr>
+        <p:txBody>
+          <a:bodyPr wrap="square" lIns="0" tIns="0" rIns="0" bIns="0" rtlCol="0" anchor="ctr">
+            <a:normAutofit/>
+          </a:bodyPr>
+          <a:lstStyle/>
+          <a:p>
+            <a:pPr algn="ctr" indent="0" marL="0">
+              <a:buNone/>
+            </a:pPr>
+            <a:r>
+              <a:rPr lang="en-US" sz="3600" b="1" dirty="0">
+                <a:solidFill>
+                  <a:srgbClr val="990011"/>
+                </a:solidFill>
+                <a:latin typeface="Times New Roman" pitchFamily="34" charset="0"/>
+                <a:ea typeface="Times New Roman" pitchFamily="34" charset="-122"/>
+                <a:cs typeface="Times New Roman" pitchFamily="34" charset="-120"/>
+              </a:rPr>
+              <a:t>3. Making the Country Side More Attractive (continued)</a:t>
+            </a:r>
+            <a:endParaRPr lang="en-US" sz="3600" dirty="0"/>
+          </a:p>
+        </p:txBody>
+      </p:sp>
+      <p:sp>
+        <p:nvSpPr>
+          <p:cNvPr id="5" name="Text 2"/>
+          <p:cNvSpPr/>
+          <p:nvPr/>
+        </p:nvSpPr>
+        <p:spPr>
+          <a:xfrm>
+            <a:off x="2697480" y="1783080"/>
+            <a:ext cx="9174175" cy="4663440"/>
+          </a:xfrm>
+          <a:prstGeom prst="rect">
+            <a:avLst/>
+          </a:prstGeom>
+          <a:noFill/>
+          <a:ln/>
+        </p:spPr>
+        <p:txBody>
+          <a:bodyPr wrap="square" lIns="0" tIns="0" rIns="0" bIns="0" rtlCol="0" anchor="t"/>
+          <a:lstStyle/>
+          <a:p>
+            <a:pPr algn="l" indent="0" marL="0">
+              <a:spcAft>
+                <a:spcPts val="800"/>
+              </a:spcAft>
+              <a:buNone/>
+            </a:pPr>
+            <a:r>
+              <a:rPr lang="en-US" sz="4000" b="1" dirty="0">
+                <a:solidFill>
+                  <a:srgbClr val="111111"/>
+                </a:solidFill>
+                <a:latin typeface="Times New Roman" pitchFamily="34" charset="0"/>
+                <a:ea typeface="Times New Roman" pitchFamily="34" charset="-122"/>
+                <a:cs typeface="Times New Roman" pitchFamily="34" charset="-120"/>
+              </a:rPr>
+              <a:t>Rural jobs: </a:t>
+            </a:r>
+            <a:pPr algn="l" indent="0" marL="0">
+              <a:spcAft>
+                <a:spcPts val="800"/>
+              </a:spcAft>
+              <a:buNone/>
+            </a:pPr>
+            <a:r>
+              <a:rPr lang="en-US" sz="4000" dirty="0">
+                <a:solidFill>
+                  <a:srgbClr val="111111"/>
+                </a:solidFill>
+                <a:latin typeface="Times New Roman" pitchFamily="34" charset="0"/>
+                <a:ea typeface="Times New Roman" pitchFamily="34" charset="-122"/>
+                <a:cs typeface="Times New Roman" pitchFamily="34" charset="-120"/>
+              </a:rPr>
+              <a:t>Crafts, small processing units and self-employment projects give young people income.</a:t>
+            </a:r>
+            <a:endParaRPr lang="en-US" sz="4000" dirty="0"/>
+          </a:p>
+          <a:p>
+            <a:pPr algn="l" indent="0" marL="0">
+              <a:spcAft>
+                <a:spcPts val="800"/>
+              </a:spcAft>
+              <a:buNone/>
+            </a:pPr>
+            <a:r>
+              <a:rPr lang="en-US" sz="4000" b="1" dirty="0">
+                <a:solidFill>
+                  <a:srgbClr val="111111"/>
+                </a:solidFill>
+                <a:latin typeface="Times New Roman" pitchFamily="34" charset="0"/>
+                <a:ea typeface="Times New Roman" pitchFamily="34" charset="-122"/>
+                <a:cs typeface="Times New Roman" pitchFamily="34" charset="-120"/>
+              </a:rPr>
+              <a:t>Culture and leisure: </a:t>
+            </a:r>
+            <a:pPr algn="l" indent="0" marL="0">
+              <a:spcAft>
+                <a:spcPts val="800"/>
+              </a:spcAft>
+              <a:buNone/>
+            </a:pPr>
+            <a:r>
+              <a:rPr lang="en-US" sz="4000" dirty="0">
+                <a:solidFill>
+                  <a:srgbClr val="111111"/>
+                </a:solidFill>
+                <a:latin typeface="Times New Roman" pitchFamily="34" charset="0"/>
+                <a:ea typeface="Times New Roman" pitchFamily="34" charset="-122"/>
+                <a:cs typeface="Times New Roman" pitchFamily="34" charset="-120"/>
+              </a:rPr>
+              <a:t>Festivals, sports and community projects keep young people attached to their village.</a:t>
+            </a:r>
+            <a:endParaRPr lang="en-US" sz="4000" dirty="0"/>
+          </a:p>
+        </p:txBody>
+      </p:sp>
+      <p:sp>
+        <p:nvSpPr>
+          <p:cNvPr id="25" name="Slide Number Placeholder 0"/>
+          <p:cNvSpPr>
+            <a:spLocks noGrp="1"/>
+          </p:cNvSpPr>
+          <p:nvPr>
+            <p:ph type="sldNum" sz="quarter" idx="4294967295"/>
+          </p:nvPr>
+        </p:nvSpPr>
+        <p:spPr>
+          <a:xfrm>
+            <a:off x="27432" y="91440"/>
+            <a:ext cx="585216" cy="475488"/>
+          </a:xfrm>
+          <a:prstGeom prst="rect">
+            <a:avLst/>
+          </a:prstGeom>
+          <a:extLst>
+            <a:ext uri="{C572A759-6A51-4108-AA02-DFA0A04FC94B}">
+              <ma14:wrappingTextBoxFlag xmlns:ma14="http://schemas.microsoft.com/office/mac/drawingml/2011/main" val="0"/>
+            </a:ext>
+          </a:extLst>
+        </p:spPr>
+        <p:txBody>
+          <a:bodyPr/>
+          <a:lstStyle>
+            <a:lvl1pPr>
+              <a:defRPr sz="2000">
+                <a:solidFill>
+                  <a:srgbClr val="FFFFFF"/>
+                </a:solidFill>
+                <a:latin typeface="Calibri"/>
+                <a:ea typeface="Calibri"/>
+                <a:cs typeface="Calibri"/>
+              </a:defRPr>
+            </a:lvl1pPr>
+          </a:lstStyle>
+          <a:p>
+            <a:pPr algn="ctr"/>
+            <a:fld id="{F7021451-1387-4CA6-816F-3879F97B5CBC}" type="slidenum">
+              <a:rPr b="1" lang="en-US"/>
+              <a:t>48</a:t>
+            </a:fld>
+            <a:endParaRPr lang="en-US"/>
+          </a:p>
+        </p:txBody>
+      </p:sp>
+    </p:spTree>
+  </p:cSld>
+  <p:clrMapOvr>
+    <a:masterClrMapping/>
+  </p:clrMapOvr>
+</p:sld>
+</file>
+
+<file path=ppt/slides/slide49.xml><?xml version="1.0" encoding="utf-8"?>
+<p:sld xmlns:a="http://schemas.openxmlformats.org/drawingml/2006/main" xmlns:r="http://schemas.openxmlformats.org/officeDocument/2006/relationships" xmlns:p="http://schemas.openxmlformats.org/presentationml/2006/main">
+  <p:cSld name="Slide 49">
+    <p:spTree>
+      <p:nvGrpSpPr>
+        <p:cNvPr id="1" name=""/>
+        <p:cNvGrpSpPr/>
+        <p:nvPr/>
+      </p:nvGrpSpPr>
+      <p:grpSpPr>
+        <a:xfrm>
+          <a:off x="0" y="0"/>
+          <a:ext cx="0" cy="0"/>
+          <a:chOff x="0" y="0"/>
+          <a:chExt cx="0" cy="0"/>
+        </a:xfrm>
+      </p:grpSpPr>
+      <p:sp>
+        <p:nvSpPr>
+          <p:cNvPr id="2" name="Text 0"/>
+          <p:cNvSpPr/>
+          <p:nvPr/>
+        </p:nvSpPr>
+        <p:spPr>
+          <a:xfrm>
+            <a:off x="457200" y="713232"/>
+            <a:ext cx="11368735" cy="274320"/>
+          </a:xfrm>
+          <a:prstGeom prst="rect">
+            <a:avLst/>
+          </a:prstGeom>
+          <a:noFill/>
+          <a:ln/>
+        </p:spPr>
+        <p:txBody>
+          <a:bodyPr wrap="square" lIns="0" tIns="0" rIns="0" bIns="0" rtlCol="0" anchor="ctr"/>
+          <a:lstStyle/>
+          <a:p>
+            <a:pPr algn="r" indent="0" marL="0">
+              <a:buNone/>
+            </a:pPr>
+            <a:r>
+              <a:rPr lang="en-US" sz="1400" b="1" dirty="0">
+                <a:solidFill>
+                  <a:srgbClr val="1C3F6E"/>
+                </a:solidFill>
+                <a:latin typeface="Calibri" pitchFamily="34" charset="0"/>
+                <a:ea typeface="Calibri" pitchFamily="34" charset="-122"/>
+                <a:cs typeface="Calibri" pitchFamily="34" charset="-120"/>
+              </a:rPr>
+              <a:t>FORMATIVE EVALUATION</a:t>
+            </a:r>
+            <a:endParaRPr lang="en-US" sz="1400" dirty="0"/>
+          </a:p>
+        </p:txBody>
+      </p:sp>
+      <p:pic>
+        <p:nvPicPr>
+          <p:cNvPr id="3" name="Image 0" descr="/home/claude/f4/img/minesec_sheet.png">    </p:cNvPr>
+          <p:cNvPicPr>
+            <a:picLocks noChangeAspect="1"/>
+          </p:cNvPicPr>
+          <p:nvPr/>
+        </p:nvPicPr>
+        <p:blipFill>
+          <a:blip r:embed="rId1"/>
+          <a:stretch>
+            <a:fillRect/>
+          </a:stretch>
+        </p:blipFill>
+        <p:spPr>
+          <a:xfrm>
+            <a:off x="0" y="658368"/>
+            <a:ext cx="5120640" cy="5833872"/>
+          </a:xfrm>
+          <a:prstGeom prst="rect">
+            <a:avLst/>
+          </a:prstGeom>
+        </p:spPr>
+      </p:pic>
+      <p:sp>
+        <p:nvSpPr>
+          <p:cNvPr id="4" name="Text 1"/>
+          <p:cNvSpPr/>
+          <p:nvPr/>
+        </p:nvSpPr>
+        <p:spPr>
+          <a:xfrm>
+            <a:off x="5349240" y="1005840"/>
+            <a:ext cx="6522415" cy="731520"/>
+          </a:xfrm>
+          <a:prstGeom prst="rect">
+            <a:avLst/>
+          </a:prstGeom>
+          <a:noFill/>
+          <a:ln/>
+        </p:spPr>
+        <p:txBody>
+          <a:bodyPr wrap="square" lIns="0" tIns="0" rIns="0" bIns="0" rtlCol="0" anchor="ctr">
+            <a:normAutofit/>
+          </a:bodyPr>
+          <a:lstStyle/>
+          <a:p>
+            <a:pPr algn="ctr" indent="0" marL="0">
+              <a:buNone/>
+            </a:pPr>
+            <a:r>
+              <a:rPr lang="en-US" sz="3600" b="1" dirty="0">
+                <a:solidFill>
+                  <a:srgbClr val="990011"/>
+                </a:solidFill>
+                <a:latin typeface="Times New Roman" pitchFamily="34" charset="0"/>
+                <a:ea typeface="Times New Roman" pitchFamily="34" charset="-122"/>
+                <a:cs typeface="Times New Roman" pitchFamily="34" charset="-120"/>
+              </a:rPr>
+              <a:t>Evaluation 1</a:t>
+            </a:r>
+            <a:endParaRPr lang="en-US" sz="3600" dirty="0"/>
+          </a:p>
+        </p:txBody>
+      </p:sp>
+      <p:sp>
+        <p:nvSpPr>
+          <p:cNvPr id="5" name="Text 2"/>
+          <p:cNvSpPr/>
+          <p:nvPr/>
+        </p:nvSpPr>
+        <p:spPr>
+          <a:xfrm>
+            <a:off x="5349240" y="1783080"/>
+            <a:ext cx="6522415" cy="4663440"/>
+          </a:xfrm>
+          <a:prstGeom prst="rect">
+            <a:avLst/>
+          </a:prstGeom>
+          <a:noFill/>
+          <a:ln/>
+        </p:spPr>
+        <p:txBody>
+          <a:bodyPr wrap="square" lIns="0" tIns="0" rIns="0" bIns="0" rtlCol="0" anchor="t"/>
+          <a:lstStyle/>
+          <a:p>
+            <a:pPr algn="l" indent="0" marL="0">
+              <a:spcAft>
+                <a:spcPts val="800"/>
+              </a:spcAft>
+              <a:buNone/>
+            </a:pPr>
+            <a:r>
+              <a:rPr lang="en-US" sz="4000" dirty="0">
+                <a:solidFill>
+                  <a:srgbClr val="111111"/>
+                </a:solidFill>
+                <a:latin typeface="Times New Roman" pitchFamily="34" charset="0"/>
+                <a:ea typeface="Times New Roman" pitchFamily="34" charset="-122"/>
+                <a:cs typeface="Times New Roman" pitchFamily="34" charset="-120"/>
+              </a:rPr>
+              <a:t>Give two causes of rural exodus.</a:t>
+            </a:r>
+            <a:endParaRPr lang="en-US" sz="4000" dirty="0"/>
+          </a:p>
+        </p:txBody>
+      </p:sp>
+      <p:sp>
+        <p:nvSpPr>
+          <p:cNvPr id="25" name="Slide Number Placeholder 0"/>
+          <p:cNvSpPr>
+            <a:spLocks noGrp="1"/>
+          </p:cNvSpPr>
+          <p:nvPr>
+            <p:ph type="sldNum" sz="quarter" idx="4294967295"/>
+          </p:nvPr>
+        </p:nvSpPr>
+        <p:spPr>
+          <a:xfrm>
+            <a:off x="27432" y="91440"/>
+            <a:ext cx="585216" cy="475488"/>
+          </a:xfrm>
+          <a:prstGeom prst="rect">
+            <a:avLst/>
+          </a:prstGeom>
+          <a:extLst>
+            <a:ext uri="{C572A759-6A51-4108-AA02-DFA0A04FC94B}">
+              <ma14:wrappingTextBoxFlag xmlns:ma14="http://schemas.microsoft.com/office/mac/drawingml/2011/main" val="0"/>
+            </a:ext>
+          </a:extLst>
+        </p:spPr>
+        <p:txBody>
+          <a:bodyPr/>
+          <a:lstStyle>
+            <a:lvl1pPr>
+              <a:defRPr sz="2000">
+                <a:solidFill>
+                  <a:srgbClr val="FFFFFF"/>
+                </a:solidFill>
+                <a:latin typeface="Calibri"/>
+                <a:ea typeface="Calibri"/>
+                <a:cs typeface="Calibri"/>
+              </a:defRPr>
+            </a:lvl1pPr>
+          </a:lstStyle>
+          <a:p>
+            <a:pPr algn="ctr"/>
+            <a:fld id="{F7021451-1387-4CA6-816F-3879F97B5CBC}" type="slidenum">
+              <a:rPr b="1" lang="en-US"/>
+              <a:t>49</a:t>
+            </a:fld>
+            <a:endParaRPr lang="en-US"/>
+          </a:p>
+        </p:txBody>
+      </p:sp>
+    </p:spTree>
+  </p:cSld>
+  <p:clrMapOvr>
+    <a:masterClrMapping/>
+  </p:clrMapOvr>
+</p:sld>
+</file>
+
+<file path=ppt/slides/slide5.xml><?xml version="1.0" encoding="utf-8"?>
+<p:sld xmlns:a="http://schemas.openxmlformats.org/drawingml/2006/main" xmlns:r="http://schemas.openxmlformats.org/officeDocument/2006/relationships" xmlns:p="http://schemas.openxmlformats.org/presentationml/2006/main">
+  <p:cSld name="Slide 5">
+    <p:spTree>
+      <p:nvGrpSpPr>
+        <p:cNvPr id="1" name=""/>
+        <p:cNvGrpSpPr/>
+        <p:nvPr/>
+      </p:nvGrpSpPr>
+      <p:grpSpPr>
+        <a:xfrm>
+          <a:off x="0" y="0"/>
+          <a:ext cx="0" cy="0"/>
+          <a:chOff x="0" y="0"/>
+          <a:chExt cx="0" cy="0"/>
+        </a:xfrm>
+      </p:grpSpPr>
+      <p:sp>
+        <p:nvSpPr>
+          <p:cNvPr id="2" name="Text 0"/>
+          <p:cNvSpPr/>
+          <p:nvPr/>
+        </p:nvSpPr>
+        <p:spPr>
+          <a:xfrm>
+            <a:off x="457200" y="713232"/>
+            <a:ext cx="11368735" cy="274320"/>
+          </a:xfrm>
+          <a:prstGeom prst="rect">
+            <a:avLst/>
+          </a:prstGeom>
+          <a:noFill/>
+          <a:ln/>
+        </p:spPr>
+        <p:txBody>
+          <a:bodyPr wrap="square" lIns="0" tIns="0" rIns="0" bIns="0" rtlCol="0" anchor="ctr"/>
+          <a:lstStyle/>
+          <a:p>
+            <a:pPr algn="r" indent="0" marL="0">
+              <a:buNone/>
+            </a:pPr>
+            <a:r>
+              <a:rPr lang="en-US" sz="1400" b="1" dirty="0">
+                <a:solidFill>
+                  <a:srgbClr val="1C3F6E"/>
+                </a:solidFill>
+                <a:latin typeface="Calibri" pitchFamily="34" charset="0"/>
+                <a:ea typeface="Calibri" pitchFamily="34" charset="-122"/>
+                <a:cs typeface="Calibri" pitchFamily="34" charset="-120"/>
+              </a:rPr>
+              <a:t>HOMEWORK CORRECTION</a:t>
+            </a:r>
+            <a:endParaRPr lang="en-US" sz="1400" dirty="0"/>
+          </a:p>
+        </p:txBody>
+      </p:sp>
+      <p:pic>
+        <p:nvPicPr>
+          <p:cNvPr id="3" name="Image 0" descr="/home/claude/f4/img/minesec_sheet.png">    </p:cNvPr>
+          <p:cNvPicPr>
+            <a:picLocks noChangeAspect="1"/>
+          </p:cNvPicPr>
+          <p:nvPr/>
+        </p:nvPicPr>
+        <p:blipFill>
+          <a:blip r:embed="rId1"/>
+          <a:stretch>
+            <a:fillRect/>
+          </a:stretch>
+        </p:blipFill>
+        <p:spPr>
+          <a:xfrm>
+            <a:off x="0" y="658368"/>
+            <a:ext cx="5120640" cy="5833872"/>
+          </a:xfrm>
+          <a:prstGeom prst="rect">
+            <a:avLst/>
+          </a:prstGeom>
+        </p:spPr>
+      </p:pic>
+      <p:sp>
+        <p:nvSpPr>
+          <p:cNvPr id="4" name="Text 1"/>
+          <p:cNvSpPr/>
+          <p:nvPr/>
+        </p:nvSpPr>
+        <p:spPr>
+          <a:xfrm>
+            <a:off x="5349240" y="1005840"/>
+            <a:ext cx="6522415" cy="731520"/>
+          </a:xfrm>
+          <a:prstGeom prst="rect">
+            <a:avLst/>
+          </a:prstGeom>
+          <a:noFill/>
+          <a:ln/>
+        </p:spPr>
+        <p:txBody>
+          <a:bodyPr wrap="square" lIns="0" tIns="0" rIns="0" bIns="0" rtlCol="0" anchor="ctr">
+            <a:normAutofit/>
+          </a:bodyPr>
+          <a:lstStyle/>
+          <a:p>
+            <a:pPr algn="ctr" indent="0" marL="0">
+              <a:buNone/>
+            </a:pPr>
+            <a:r>
+              <a:rPr lang="en-US" sz="3600" b="1" dirty="0">
+                <a:solidFill>
+                  <a:srgbClr val="990011"/>
+                </a:solidFill>
+                <a:latin typeface="Times New Roman" pitchFamily="34" charset="0"/>
+                <a:ea typeface="Times New Roman" pitchFamily="34" charset="-122"/>
+                <a:cs typeface="Times New Roman" pitchFamily="34" charset="-120"/>
+              </a:rPr>
+              <a:t>Correction: Possible Answer</a:t>
+            </a:r>
+            <a:endParaRPr lang="en-US" sz="3600" dirty="0"/>
+          </a:p>
+        </p:txBody>
+      </p:sp>
+      <p:sp>
+        <p:nvSpPr>
+          <p:cNvPr id="5" name="Text 2"/>
+          <p:cNvSpPr/>
+          <p:nvPr/>
+        </p:nvSpPr>
+        <p:spPr>
+          <a:xfrm>
+            <a:off x="5349240" y="1783080"/>
+            <a:ext cx="6522415" cy="4663440"/>
+          </a:xfrm>
+          <a:prstGeom prst="rect">
+            <a:avLst/>
+          </a:prstGeom>
+          <a:noFill/>
+          <a:ln/>
+        </p:spPr>
+        <p:txBody>
+          <a:bodyPr wrap="square" lIns="0" tIns="0" rIns="0" bIns="0" rtlCol="0" anchor="t"/>
+          <a:lstStyle/>
+          <a:p>
+            <a:pPr algn="l" indent="0" marL="0">
+              <a:spcAft>
+                <a:spcPts val="800"/>
+              </a:spcAft>
+              <a:buNone/>
+            </a:pPr>
+            <a:r>
+              <a:rPr lang="en-US" sz="4000" dirty="0">
+                <a:solidFill>
+                  <a:srgbClr val="111111"/>
+                </a:solidFill>
+                <a:latin typeface="Times New Roman" pitchFamily="34" charset="0"/>
+                <a:ea typeface="Times New Roman" pitchFamily="34" charset="-122"/>
+                <a:cs typeface="Times New Roman" pitchFamily="34" charset="-120"/>
+              </a:rPr>
+              <a:t>From villages: onions, groundnuts, maize (or firewood). From town: soap, cooking oil, clothes (also phones, sugar).</a:t>
+            </a:r>
+            <a:endParaRPr lang="en-US" sz="4000" dirty="0"/>
+          </a:p>
+        </p:txBody>
+      </p:sp>
+      <p:sp>
+        <p:nvSpPr>
+          <p:cNvPr id="25" name="Slide Number Placeholder 0"/>
+          <p:cNvSpPr>
+            <a:spLocks noGrp="1"/>
+          </p:cNvSpPr>
+          <p:nvPr>
+            <p:ph type="sldNum" sz="quarter" idx="4294967295"/>
+          </p:nvPr>
+        </p:nvSpPr>
+        <p:spPr>
+          <a:xfrm>
+            <a:off x="27432" y="91440"/>
+            <a:ext cx="585216" cy="475488"/>
+          </a:xfrm>
+          <a:prstGeom prst="rect">
+            <a:avLst/>
+          </a:prstGeom>
+          <a:extLst>
+            <a:ext uri="{C572A759-6A51-4108-AA02-DFA0A04FC94B}">
+              <ma14:wrappingTextBoxFlag xmlns:ma14="http://schemas.microsoft.com/office/mac/drawingml/2011/main" val="0"/>
+            </a:ext>
+          </a:extLst>
+        </p:spPr>
+        <p:txBody>
+          <a:bodyPr/>
+          <a:lstStyle>
+            <a:lvl1pPr>
+              <a:defRPr sz="2000">
+                <a:solidFill>
+                  <a:srgbClr val="FFFFFF"/>
+                </a:solidFill>
+                <a:latin typeface="Calibri"/>
+                <a:ea typeface="Calibri"/>
+                <a:cs typeface="Calibri"/>
+              </a:defRPr>
+            </a:lvl1pPr>
+          </a:lstStyle>
+          <a:p>
+            <a:pPr algn="ctr"/>
+            <a:fld id="{F7021451-1387-4CA6-816F-3879F97B5CBC}" type="slidenum">
+              <a:rPr b="1" lang="en-US"/>
+              <a:t>5</a:t>
+            </a:fld>
+            <a:endParaRPr lang="en-US"/>
+          </a:p>
+        </p:txBody>
+      </p:sp>
+    </p:spTree>
+  </p:cSld>
+  <p:clrMapOvr>
+    <a:masterClrMapping/>
+  </p:clrMapOvr>
+</p:sld>
+</file>
+
+<file path=ppt/slides/slide50.xml><?xml version="1.0" encoding="utf-8"?>
+<p:sld xmlns:a="http://schemas.openxmlformats.org/drawingml/2006/main" xmlns:r="http://schemas.openxmlformats.org/officeDocument/2006/relationships" xmlns:p="http://schemas.openxmlformats.org/presentationml/2006/main">
+  <p:cSld name="Slide 50">
+    <p:spTree>
+      <p:nvGrpSpPr>
+        <p:cNvPr id="1" name=""/>
+        <p:cNvGrpSpPr/>
+        <p:nvPr/>
+      </p:nvGrpSpPr>
+      <p:grpSpPr>
+        <a:xfrm>
+          <a:off x="0" y="0"/>
+          <a:ext cx="0" cy="0"/>
+          <a:chOff x="0" y="0"/>
+          <a:chExt cx="0" cy="0"/>
+        </a:xfrm>
+      </p:grpSpPr>
+      <p:sp>
+        <p:nvSpPr>
+          <p:cNvPr id="2" name="Text 0"/>
+          <p:cNvSpPr/>
+          <p:nvPr/>
+        </p:nvSpPr>
+        <p:spPr>
+          <a:xfrm>
+            <a:off x="457200" y="713232"/>
+            <a:ext cx="11368735" cy="274320"/>
+          </a:xfrm>
+          <a:prstGeom prst="rect">
+            <a:avLst/>
+          </a:prstGeom>
+          <a:noFill/>
+          <a:ln/>
+        </p:spPr>
+        <p:txBody>
+          <a:bodyPr wrap="square" lIns="0" tIns="0" rIns="0" bIns="0" rtlCol="0" anchor="ctr"/>
+          <a:lstStyle/>
+          <a:p>
+            <a:pPr algn="r" indent="0" marL="0">
+              <a:buNone/>
+            </a:pPr>
+            <a:r>
+              <a:rPr lang="en-US" sz="1400" b="1" dirty="0">
+                <a:solidFill>
+                  <a:srgbClr val="1C3F6E"/>
+                </a:solidFill>
+                <a:latin typeface="Calibri" pitchFamily="34" charset="0"/>
+                <a:ea typeface="Calibri" pitchFamily="34" charset="-122"/>
+                <a:cs typeface="Calibri" pitchFamily="34" charset="-120"/>
+              </a:rPr>
+              <a:t>FORMATIVE EVALUATION</a:t>
+            </a:r>
+            <a:endParaRPr lang="en-US" sz="1400" dirty="0"/>
+          </a:p>
+        </p:txBody>
+      </p:sp>
+      <p:pic>
+        <p:nvPicPr>
+          <p:cNvPr id="3" name="Image 0" descr="/home/claude/f4/img/minesec_sheet.png">    </p:cNvPr>
+          <p:cNvPicPr>
+            <a:picLocks noChangeAspect="1"/>
+          </p:cNvPicPr>
+          <p:nvPr/>
+        </p:nvPicPr>
+        <p:blipFill>
+          <a:blip r:embed="rId1"/>
+          <a:stretch>
+            <a:fillRect/>
+          </a:stretch>
+        </p:blipFill>
+        <p:spPr>
+          <a:xfrm>
+            <a:off x="0" y="658368"/>
+            <a:ext cx="5120640" cy="5833872"/>
+          </a:xfrm>
+          <a:prstGeom prst="rect">
+            <a:avLst/>
+          </a:prstGeom>
+        </p:spPr>
+      </p:pic>
+      <p:sp>
+        <p:nvSpPr>
+          <p:cNvPr id="4" name="Text 1"/>
+          <p:cNvSpPr/>
+          <p:nvPr/>
+        </p:nvSpPr>
+        <p:spPr>
+          <a:xfrm>
+            <a:off x="5349240" y="1005840"/>
+            <a:ext cx="6522415" cy="731520"/>
+          </a:xfrm>
+          <a:prstGeom prst="rect">
+            <a:avLst/>
+          </a:prstGeom>
+          <a:noFill/>
+          <a:ln/>
+        </p:spPr>
+        <p:txBody>
+          <a:bodyPr wrap="square" lIns="0" tIns="0" rIns="0" bIns="0" rtlCol="0" anchor="ctr">
+            <a:normAutofit/>
+          </a:bodyPr>
+          <a:lstStyle/>
+          <a:p>
+            <a:pPr algn="ctr" indent="0" marL="0">
+              <a:buNone/>
+            </a:pPr>
+            <a:r>
+              <a:rPr lang="en-US" sz="3600" b="1" dirty="0">
+                <a:solidFill>
+                  <a:srgbClr val="990011"/>
+                </a:solidFill>
+                <a:latin typeface="Times New Roman" pitchFamily="34" charset="0"/>
+                <a:ea typeface="Times New Roman" pitchFamily="34" charset="-122"/>
+                <a:cs typeface="Times New Roman" pitchFamily="34" charset="-120"/>
+              </a:rPr>
+              <a:t>Expected Answer</a:t>
+            </a:r>
+            <a:endParaRPr lang="en-US" sz="3600" dirty="0"/>
+          </a:p>
+        </p:txBody>
+      </p:sp>
+      <p:sp>
+        <p:nvSpPr>
+          <p:cNvPr id="5" name="Text 2"/>
+          <p:cNvSpPr/>
+          <p:nvPr/>
+        </p:nvSpPr>
+        <p:spPr>
+          <a:xfrm>
+            <a:off x="5349240" y="1783080"/>
+            <a:ext cx="6522415" cy="4663440"/>
+          </a:xfrm>
+          <a:prstGeom prst="rect">
+            <a:avLst/>
+          </a:prstGeom>
+          <a:noFill/>
+          <a:ln/>
+        </p:spPr>
+        <p:txBody>
+          <a:bodyPr wrap="square" lIns="0" tIns="0" rIns="0" bIns="0" rtlCol="0" anchor="t"/>
+          <a:lstStyle/>
+          <a:p>
+            <a:pPr algn="l" indent="0" marL="0">
+              <a:spcAft>
+                <a:spcPts val="800"/>
+              </a:spcAft>
+              <a:buNone/>
+            </a:pPr>
+            <a:r>
+              <a:rPr lang="en-US" sz="4000" dirty="0">
+                <a:solidFill>
+                  <a:srgbClr val="111111"/>
+                </a:solidFill>
+                <a:latin typeface="Times New Roman" pitchFamily="34" charset="0"/>
+                <a:ea typeface="Times New Roman" pitchFamily="34" charset="-122"/>
+                <a:cs typeface="Times New Roman" pitchFamily="34" charset="-120"/>
+              </a:rPr>
+              <a:t>Lack of jobs in villages and attractive services in towns.</a:t>
+            </a:r>
+            <a:endParaRPr lang="en-US" sz="4000" dirty="0"/>
+          </a:p>
+        </p:txBody>
+      </p:sp>
+      <p:sp>
+        <p:nvSpPr>
+          <p:cNvPr id="25" name="Slide Number Placeholder 0"/>
+          <p:cNvSpPr>
+            <a:spLocks noGrp="1"/>
+          </p:cNvSpPr>
+          <p:nvPr>
+            <p:ph type="sldNum" sz="quarter" idx="4294967295"/>
+          </p:nvPr>
+        </p:nvSpPr>
+        <p:spPr>
+          <a:xfrm>
+            <a:off x="27432" y="91440"/>
+            <a:ext cx="585216" cy="475488"/>
+          </a:xfrm>
+          <a:prstGeom prst="rect">
+            <a:avLst/>
+          </a:prstGeom>
+          <a:extLst>
+            <a:ext uri="{C572A759-6A51-4108-AA02-DFA0A04FC94B}">
+              <ma14:wrappingTextBoxFlag xmlns:ma14="http://schemas.microsoft.com/office/mac/drawingml/2011/main" val="0"/>
+            </a:ext>
+          </a:extLst>
+        </p:spPr>
+        <p:txBody>
+          <a:bodyPr/>
+          <a:lstStyle>
+            <a:lvl1pPr>
+              <a:defRPr sz="2000">
+                <a:solidFill>
+                  <a:srgbClr val="FFFFFF"/>
+                </a:solidFill>
+                <a:latin typeface="Calibri"/>
+                <a:ea typeface="Calibri"/>
+                <a:cs typeface="Calibri"/>
+              </a:defRPr>
+            </a:lvl1pPr>
+          </a:lstStyle>
+          <a:p>
+            <a:pPr algn="ctr"/>
+            <a:fld id="{F7021451-1387-4CA6-816F-3879F97B5CBC}" type="slidenum">
+              <a:rPr b="1" lang="en-US"/>
+              <a:t>50</a:t>
+            </a:fld>
+            <a:endParaRPr lang="en-US"/>
+          </a:p>
+        </p:txBody>
+      </p:sp>
+    </p:spTree>
+  </p:cSld>
+  <p:clrMapOvr>
+    <a:masterClrMapping/>
+  </p:clrMapOvr>
+</p:sld>
+</file>
+
+<file path=ppt/slides/slide51.xml><?xml version="1.0" encoding="utf-8"?>
+<p:sld xmlns:a="http://schemas.openxmlformats.org/drawingml/2006/main" xmlns:r="http://schemas.openxmlformats.org/officeDocument/2006/relationships" xmlns:p="http://schemas.openxmlformats.org/presentationml/2006/main">
+  <p:cSld name="Slide 51">
+    <p:spTree>
+      <p:nvGrpSpPr>
+        <p:cNvPr id="1" name=""/>
+        <p:cNvGrpSpPr/>
+        <p:nvPr/>
+      </p:nvGrpSpPr>
+      <p:grpSpPr>
+        <a:xfrm>
+          <a:off x="0" y="0"/>
+          <a:ext cx="0" cy="0"/>
+          <a:chOff x="0" y="0"/>
+          <a:chExt cx="0" cy="0"/>
+        </a:xfrm>
+      </p:grpSpPr>
+      <p:sp>
+        <p:nvSpPr>
+          <p:cNvPr id="2" name="Text 0"/>
+          <p:cNvSpPr/>
+          <p:nvPr/>
+        </p:nvSpPr>
+        <p:spPr>
+          <a:xfrm>
+            <a:off x="457200" y="713232"/>
+            <a:ext cx="11368735" cy="274320"/>
+          </a:xfrm>
+          <a:prstGeom prst="rect">
+            <a:avLst/>
+          </a:prstGeom>
+          <a:noFill/>
+          <a:ln/>
+        </p:spPr>
+        <p:txBody>
+          <a:bodyPr wrap="square" lIns="0" tIns="0" rIns="0" bIns="0" rtlCol="0" anchor="ctr"/>
+          <a:lstStyle/>
+          <a:p>
+            <a:pPr algn="r" indent="0" marL="0">
+              <a:buNone/>
+            </a:pPr>
+            <a:r>
+              <a:rPr lang="en-US" sz="1400" b="1" dirty="0">
+                <a:solidFill>
+                  <a:srgbClr val="1C3F6E"/>
+                </a:solidFill>
+                <a:latin typeface="Calibri" pitchFamily="34" charset="0"/>
+                <a:ea typeface="Calibri" pitchFamily="34" charset="-122"/>
+                <a:cs typeface="Calibri" pitchFamily="34" charset="-120"/>
+              </a:rPr>
+              <a:t>FORMATIVE EVALUATION</a:t>
+            </a:r>
+            <a:endParaRPr lang="en-US" sz="1400" dirty="0"/>
+          </a:p>
+        </p:txBody>
+      </p:sp>
+      <p:pic>
+        <p:nvPicPr>
+          <p:cNvPr id="3" name="Image 0" descr="/home/claude/f4/img/minesec_sheet.png">    </p:cNvPr>
+          <p:cNvPicPr>
+            <a:picLocks noChangeAspect="1"/>
+          </p:cNvPicPr>
+          <p:nvPr/>
+        </p:nvPicPr>
+        <p:blipFill>
+          <a:blip r:embed="rId1"/>
+          <a:stretch>
+            <a:fillRect/>
+          </a:stretch>
+        </p:blipFill>
+        <p:spPr>
+          <a:xfrm>
+            <a:off x="0" y="658368"/>
+            <a:ext cx="5120640" cy="5833872"/>
+          </a:xfrm>
+          <a:prstGeom prst="rect">
+            <a:avLst/>
+          </a:prstGeom>
+        </p:spPr>
+      </p:pic>
+      <p:sp>
+        <p:nvSpPr>
+          <p:cNvPr id="4" name="Text 1"/>
+          <p:cNvSpPr/>
+          <p:nvPr/>
+        </p:nvSpPr>
+        <p:spPr>
+          <a:xfrm>
+            <a:off x="5349240" y="1005840"/>
+            <a:ext cx="6522415" cy="731520"/>
+          </a:xfrm>
+          <a:prstGeom prst="rect">
+            <a:avLst/>
+          </a:prstGeom>
+          <a:noFill/>
+          <a:ln/>
+        </p:spPr>
+        <p:txBody>
+          <a:bodyPr wrap="square" lIns="0" tIns="0" rIns="0" bIns="0" rtlCol="0" anchor="ctr">
+            <a:normAutofit/>
+          </a:bodyPr>
+          <a:lstStyle/>
+          <a:p>
+            <a:pPr algn="ctr" indent="0" marL="0">
+              <a:buNone/>
+            </a:pPr>
+            <a:r>
+              <a:rPr lang="en-US" sz="3600" b="1" dirty="0">
+                <a:solidFill>
+                  <a:srgbClr val="990011"/>
+                </a:solidFill>
+                <a:latin typeface="Times New Roman" pitchFamily="34" charset="0"/>
+                <a:ea typeface="Times New Roman" pitchFamily="34" charset="-122"/>
+                <a:cs typeface="Times New Roman" pitchFamily="34" charset="-120"/>
+              </a:rPr>
+              <a:t>Evaluation 2</a:t>
+            </a:r>
+            <a:endParaRPr lang="en-US" sz="3600" dirty="0"/>
+          </a:p>
+        </p:txBody>
+      </p:sp>
+      <p:sp>
+        <p:nvSpPr>
+          <p:cNvPr id="5" name="Text 2"/>
+          <p:cNvSpPr/>
+          <p:nvPr/>
+        </p:nvSpPr>
+        <p:spPr>
+          <a:xfrm>
+            <a:off x="5349240" y="1783080"/>
+            <a:ext cx="6522415" cy="4663440"/>
+          </a:xfrm>
+          <a:prstGeom prst="rect">
+            <a:avLst/>
+          </a:prstGeom>
+          <a:noFill/>
+          <a:ln/>
+        </p:spPr>
+        <p:txBody>
+          <a:bodyPr wrap="square" lIns="0" tIns="0" rIns="0" bIns="0" rtlCol="0" anchor="t"/>
+          <a:lstStyle/>
+          <a:p>
+            <a:pPr algn="l" indent="0" marL="0">
+              <a:spcAft>
+                <a:spcPts val="800"/>
+              </a:spcAft>
+              <a:buNone/>
+            </a:pPr>
+            <a:r>
+              <a:rPr lang="en-US" sz="4000" dirty="0">
+                <a:solidFill>
+                  <a:srgbClr val="111111"/>
+                </a:solidFill>
+                <a:latin typeface="Times New Roman" pitchFamily="34" charset="0"/>
+                <a:ea typeface="Times New Roman" pitchFamily="34" charset="-122"/>
+                <a:cs typeface="Times New Roman" pitchFamily="34" charset="-120"/>
+              </a:rPr>
+              <a:t>Give two ways to make villages attractive.</a:t>
+            </a:r>
+            <a:endParaRPr lang="en-US" sz="4000" dirty="0"/>
+          </a:p>
+        </p:txBody>
+      </p:sp>
+      <p:sp>
+        <p:nvSpPr>
+          <p:cNvPr id="25" name="Slide Number Placeholder 0"/>
+          <p:cNvSpPr>
+            <a:spLocks noGrp="1"/>
+          </p:cNvSpPr>
+          <p:nvPr>
+            <p:ph type="sldNum" sz="quarter" idx="4294967295"/>
+          </p:nvPr>
+        </p:nvSpPr>
+        <p:spPr>
+          <a:xfrm>
+            <a:off x="27432" y="91440"/>
+            <a:ext cx="585216" cy="475488"/>
+          </a:xfrm>
+          <a:prstGeom prst="rect">
+            <a:avLst/>
+          </a:prstGeom>
+          <a:extLst>
+            <a:ext uri="{C572A759-6A51-4108-AA02-DFA0A04FC94B}">
+              <ma14:wrappingTextBoxFlag xmlns:ma14="http://schemas.microsoft.com/office/mac/drawingml/2011/main" val="0"/>
+            </a:ext>
+          </a:extLst>
+        </p:spPr>
+        <p:txBody>
+          <a:bodyPr/>
+          <a:lstStyle>
+            <a:lvl1pPr>
+              <a:defRPr sz="2000">
+                <a:solidFill>
+                  <a:srgbClr val="FFFFFF"/>
+                </a:solidFill>
+                <a:latin typeface="Calibri"/>
+                <a:ea typeface="Calibri"/>
+                <a:cs typeface="Calibri"/>
+              </a:defRPr>
+            </a:lvl1pPr>
+          </a:lstStyle>
+          <a:p>
+            <a:pPr algn="ctr"/>
+            <a:fld id="{F7021451-1387-4CA6-816F-3879F97B5CBC}" type="slidenum">
+              <a:rPr b="1" lang="en-US"/>
+              <a:t>51</a:t>
+            </a:fld>
+            <a:endParaRPr lang="en-US"/>
+          </a:p>
+        </p:txBody>
+      </p:sp>
+    </p:spTree>
+  </p:cSld>
+  <p:clrMapOvr>
+    <a:masterClrMapping/>
+  </p:clrMapOvr>
+</p:sld>
+</file>
+
+<file path=ppt/slides/slide52.xml><?xml version="1.0" encoding="utf-8"?>
+<p:sld xmlns:a="http://schemas.openxmlformats.org/drawingml/2006/main" xmlns:r="http://schemas.openxmlformats.org/officeDocument/2006/relationships" xmlns:p="http://schemas.openxmlformats.org/presentationml/2006/main">
+  <p:cSld name="Slide 52">
+    <p:spTree>
+      <p:nvGrpSpPr>
+        <p:cNvPr id="1" name=""/>
+        <p:cNvGrpSpPr/>
+        <p:nvPr/>
+      </p:nvGrpSpPr>
+      <p:grpSpPr>
+        <a:xfrm>
+          <a:off x="0" y="0"/>
+          <a:ext cx="0" cy="0"/>
+          <a:chOff x="0" y="0"/>
+          <a:chExt cx="0" cy="0"/>
+        </a:xfrm>
+      </p:grpSpPr>
+      <p:sp>
+        <p:nvSpPr>
+          <p:cNvPr id="2" name="Text 0"/>
+          <p:cNvSpPr/>
+          <p:nvPr/>
+        </p:nvSpPr>
+        <p:spPr>
+          <a:xfrm>
+            <a:off x="457200" y="713232"/>
+            <a:ext cx="11368735" cy="274320"/>
+          </a:xfrm>
+          <a:prstGeom prst="rect">
+            <a:avLst/>
+          </a:prstGeom>
+          <a:noFill/>
+          <a:ln/>
+        </p:spPr>
+        <p:txBody>
+          <a:bodyPr wrap="square" lIns="0" tIns="0" rIns="0" bIns="0" rtlCol="0" anchor="ctr"/>
+          <a:lstStyle/>
+          <a:p>
+            <a:pPr algn="r" indent="0" marL="0">
+              <a:buNone/>
+            </a:pPr>
+            <a:r>
+              <a:rPr lang="en-US" sz="1400" b="1" dirty="0">
+                <a:solidFill>
+                  <a:srgbClr val="1C3F6E"/>
+                </a:solidFill>
+                <a:latin typeface="Calibri" pitchFamily="34" charset="0"/>
+                <a:ea typeface="Calibri" pitchFamily="34" charset="-122"/>
+                <a:cs typeface="Calibri" pitchFamily="34" charset="-120"/>
+              </a:rPr>
+              <a:t>FORMATIVE EVALUATION</a:t>
+            </a:r>
+            <a:endParaRPr lang="en-US" sz="1400" dirty="0"/>
+          </a:p>
+        </p:txBody>
+      </p:sp>
+      <p:pic>
+        <p:nvPicPr>
+          <p:cNvPr id="3" name="Image 0" descr="/home/claude/f4/img/minesec_sheet.png">    </p:cNvPr>
+          <p:cNvPicPr>
+            <a:picLocks noChangeAspect="1"/>
+          </p:cNvPicPr>
+          <p:nvPr/>
+        </p:nvPicPr>
+        <p:blipFill>
+          <a:blip r:embed="rId1"/>
+          <a:stretch>
+            <a:fillRect/>
+          </a:stretch>
+        </p:blipFill>
+        <p:spPr>
+          <a:xfrm>
+            <a:off x="0" y="658368"/>
+            <a:ext cx="5120640" cy="5833872"/>
+          </a:xfrm>
+          <a:prstGeom prst="rect">
+            <a:avLst/>
+          </a:prstGeom>
+        </p:spPr>
+      </p:pic>
+      <p:sp>
+        <p:nvSpPr>
+          <p:cNvPr id="4" name="Text 1"/>
+          <p:cNvSpPr/>
+          <p:nvPr/>
+        </p:nvSpPr>
+        <p:spPr>
+          <a:xfrm>
+            <a:off x="5349240" y="1005840"/>
+            <a:ext cx="6522415" cy="731520"/>
+          </a:xfrm>
+          <a:prstGeom prst="rect">
+            <a:avLst/>
+          </a:prstGeom>
+          <a:noFill/>
+          <a:ln/>
+        </p:spPr>
+        <p:txBody>
+          <a:bodyPr wrap="square" lIns="0" tIns="0" rIns="0" bIns="0" rtlCol="0" anchor="ctr">
+            <a:normAutofit/>
+          </a:bodyPr>
+          <a:lstStyle/>
+          <a:p>
+            <a:pPr algn="ctr" indent="0" marL="0">
+              <a:buNone/>
+            </a:pPr>
+            <a:r>
+              <a:rPr lang="en-US" sz="3600" b="1" dirty="0">
+                <a:solidFill>
+                  <a:srgbClr val="990011"/>
+                </a:solidFill>
+                <a:latin typeface="Times New Roman" pitchFamily="34" charset="0"/>
+                <a:ea typeface="Times New Roman" pitchFamily="34" charset="-122"/>
+                <a:cs typeface="Times New Roman" pitchFamily="34" charset="-120"/>
+              </a:rPr>
+              <a:t>Expected Answer</a:t>
+            </a:r>
+            <a:endParaRPr lang="en-US" sz="3600" dirty="0"/>
+          </a:p>
+        </p:txBody>
+      </p:sp>
+      <p:sp>
+        <p:nvSpPr>
+          <p:cNvPr id="5" name="Text 2"/>
+          <p:cNvSpPr/>
+          <p:nvPr/>
+        </p:nvSpPr>
+        <p:spPr>
+          <a:xfrm>
+            <a:off x="5349240" y="1783080"/>
+            <a:ext cx="6522415" cy="4663440"/>
+          </a:xfrm>
+          <a:prstGeom prst="rect">
+            <a:avLst/>
+          </a:prstGeom>
+          <a:noFill/>
+          <a:ln/>
+        </p:spPr>
+        <p:txBody>
+          <a:bodyPr wrap="square" lIns="0" tIns="0" rIns="0" bIns="0" rtlCol="0" anchor="t"/>
+          <a:lstStyle/>
+          <a:p>
+            <a:pPr algn="l" indent="0" marL="0">
+              <a:spcAft>
+                <a:spcPts val="800"/>
+              </a:spcAft>
+              <a:buNone/>
+            </a:pPr>
+            <a:r>
+              <a:rPr lang="en-US" sz="4000" dirty="0">
+                <a:solidFill>
+                  <a:srgbClr val="111111"/>
+                </a:solidFill>
+                <a:latin typeface="Times New Roman" pitchFamily="34" charset="0"/>
+                <a:ea typeface="Times New Roman" pitchFamily="34" charset="-122"/>
+                <a:cs typeface="Times New Roman" pitchFamily="34" charset="-120"/>
+              </a:rPr>
+              <a:t>Build roads and create jobs in modern farming.</a:t>
+            </a:r>
+            <a:endParaRPr lang="en-US" sz="4000" dirty="0"/>
+          </a:p>
+        </p:txBody>
+      </p:sp>
+      <p:sp>
+        <p:nvSpPr>
+          <p:cNvPr id="25" name="Slide Number Placeholder 0"/>
+          <p:cNvSpPr>
+            <a:spLocks noGrp="1"/>
+          </p:cNvSpPr>
+          <p:nvPr>
+            <p:ph type="sldNum" sz="quarter" idx="4294967295"/>
+          </p:nvPr>
+        </p:nvSpPr>
+        <p:spPr>
+          <a:xfrm>
+            <a:off x="27432" y="91440"/>
+            <a:ext cx="585216" cy="475488"/>
+          </a:xfrm>
+          <a:prstGeom prst="rect">
+            <a:avLst/>
+          </a:prstGeom>
+          <a:extLst>
+            <a:ext uri="{C572A759-6A51-4108-AA02-DFA0A04FC94B}">
+              <ma14:wrappingTextBoxFlag xmlns:ma14="http://schemas.microsoft.com/office/mac/drawingml/2011/main" val="0"/>
+            </a:ext>
+          </a:extLst>
+        </p:spPr>
+        <p:txBody>
+          <a:bodyPr/>
+          <a:lstStyle>
+            <a:lvl1pPr>
+              <a:defRPr sz="2000">
+                <a:solidFill>
+                  <a:srgbClr val="FFFFFF"/>
+                </a:solidFill>
+                <a:latin typeface="Calibri"/>
+                <a:ea typeface="Calibri"/>
+                <a:cs typeface="Calibri"/>
+              </a:defRPr>
+            </a:lvl1pPr>
+          </a:lstStyle>
+          <a:p>
+            <a:pPr algn="ctr"/>
+            <a:fld id="{F7021451-1387-4CA6-816F-3879F97B5CBC}" type="slidenum">
+              <a:rPr b="1" lang="en-US"/>
+              <a:t>52</a:t>
+            </a:fld>
+            <a:endParaRPr lang="en-US"/>
+          </a:p>
+        </p:txBody>
+      </p:sp>
+    </p:spTree>
+  </p:cSld>
+  <p:clrMapOvr>
+    <a:masterClrMapping/>
+  </p:clrMapOvr>
+</p:sld>
+</file>
+
+<file path=ppt/slides/slide53.xml><?xml version="1.0" encoding="utf-8"?>
+<p:sld xmlns:a="http://schemas.openxmlformats.org/drawingml/2006/main" xmlns:r="http://schemas.openxmlformats.org/officeDocument/2006/relationships" xmlns:p="http://schemas.openxmlformats.org/presentationml/2006/main">
+  <p:cSld name="Slide 53">
+    <p:spTree>
+      <p:nvGrpSpPr>
+        <p:cNvPr id="1" name=""/>
+        <p:cNvGrpSpPr/>
+        <p:nvPr/>
+      </p:nvGrpSpPr>
+      <p:grpSpPr>
+        <a:xfrm>
+          <a:off x="0" y="0"/>
+          <a:ext cx="0" cy="0"/>
+          <a:chOff x="0" y="0"/>
+          <a:chExt cx="0" cy="0"/>
+        </a:xfrm>
+      </p:grpSpPr>
+      <p:sp>
+        <p:nvSpPr>
+          <p:cNvPr id="2" name="Text 0"/>
+          <p:cNvSpPr/>
+          <p:nvPr/>
+        </p:nvSpPr>
+        <p:spPr>
+          <a:xfrm>
+            <a:off x="457200" y="713232"/>
+            <a:ext cx="11368735" cy="274320"/>
+          </a:xfrm>
+          <a:prstGeom prst="rect">
+            <a:avLst/>
+          </a:prstGeom>
+          <a:noFill/>
+          <a:ln/>
+        </p:spPr>
+        <p:txBody>
+          <a:bodyPr wrap="square" lIns="0" tIns="0" rIns="0" bIns="0" rtlCol="0" anchor="ctr"/>
+          <a:lstStyle/>
+          <a:p>
+            <a:pPr algn="r" indent="0" marL="0">
+              <a:buNone/>
+            </a:pPr>
+            <a:r>
+              <a:rPr lang="en-US" sz="1400" b="1" dirty="0">
+                <a:solidFill>
+                  <a:srgbClr val="1C3F6E"/>
+                </a:solidFill>
+                <a:latin typeface="Calibri" pitchFamily="34" charset="0"/>
+                <a:ea typeface="Calibri" pitchFamily="34" charset="-122"/>
+                <a:cs typeface="Calibri" pitchFamily="34" charset="-120"/>
+              </a:rPr>
+              <a:t>REMEDIATION</a:t>
+            </a:r>
+            <a:endParaRPr lang="en-US" sz="1400" dirty="0"/>
+          </a:p>
+        </p:txBody>
+      </p:sp>
+      <p:pic>
+        <p:nvPicPr>
+          <p:cNvPr id="3" name="Image 0" descr="/home/claude/f4/img/minesec_sheet.png">    </p:cNvPr>
+          <p:cNvPicPr>
+            <a:picLocks noChangeAspect="1"/>
+          </p:cNvPicPr>
+          <p:nvPr/>
+        </p:nvPicPr>
+        <p:blipFill>
+          <a:blip r:embed="rId1"/>
+          <a:stretch>
+            <a:fillRect/>
+          </a:stretch>
+        </p:blipFill>
+        <p:spPr>
+          <a:xfrm>
+            <a:off x="0" y="658368"/>
+            <a:ext cx="2468880" cy="5833872"/>
+          </a:xfrm>
+          <a:prstGeom prst="rect">
+            <a:avLst/>
+          </a:prstGeom>
+        </p:spPr>
+      </p:pic>
+      <p:sp>
+        <p:nvSpPr>
+          <p:cNvPr id="4" name="Text 1"/>
+          <p:cNvSpPr/>
+          <p:nvPr/>
+        </p:nvSpPr>
+        <p:spPr>
+          <a:xfrm>
+            <a:off x="2697480" y="1005840"/>
+            <a:ext cx="9174175" cy="731520"/>
+          </a:xfrm>
+          <a:prstGeom prst="rect">
+            <a:avLst/>
+          </a:prstGeom>
+          <a:noFill/>
+          <a:ln/>
+        </p:spPr>
+        <p:txBody>
+          <a:bodyPr wrap="square" lIns="0" tIns="0" rIns="0" bIns="0" rtlCol="0" anchor="ctr">
+            <a:normAutofit/>
+          </a:bodyPr>
+          <a:lstStyle/>
+          <a:p>
+            <a:pPr algn="ctr" indent="0" marL="0">
+              <a:buNone/>
+            </a:pPr>
+            <a:r>
+              <a:rPr lang="en-US" sz="3600" b="1" dirty="0">
+                <a:solidFill>
+                  <a:srgbClr val="990011"/>
+                </a:solidFill>
+                <a:latin typeface="Times New Roman" pitchFamily="34" charset="0"/>
+                <a:ea typeface="Times New Roman" pitchFamily="34" charset="-122"/>
+                <a:cs typeface="Times New Roman" pitchFamily="34" charset="-120"/>
+              </a:rPr>
+              <a:t>Remediation</a:t>
+            </a:r>
+            <a:endParaRPr lang="en-US" sz="3600" dirty="0"/>
+          </a:p>
+        </p:txBody>
+      </p:sp>
+      <p:sp>
+        <p:nvSpPr>
+          <p:cNvPr id="5" name="Text 2"/>
+          <p:cNvSpPr/>
+          <p:nvPr/>
+        </p:nvSpPr>
+        <p:spPr>
+          <a:xfrm>
+            <a:off x="2697480" y="1783080"/>
+            <a:ext cx="9174175" cy="4663440"/>
+          </a:xfrm>
+          <a:prstGeom prst="rect">
+            <a:avLst/>
+          </a:prstGeom>
+          <a:noFill/>
+          <a:ln/>
+        </p:spPr>
+        <p:txBody>
+          <a:bodyPr wrap="square" lIns="0" tIns="0" rIns="0" bIns="0" rtlCol="0" anchor="t"/>
+          <a:lstStyle/>
+          <a:p>
+            <a:pPr algn="l" indent="0" marL="0">
+              <a:spcAft>
+                <a:spcPts val="800"/>
+              </a:spcAft>
+              <a:buNone/>
+            </a:pPr>
+            <a:r>
+              <a:rPr lang="en-US" sz="4000" b="1" dirty="0">
+                <a:solidFill>
+                  <a:srgbClr val="111111"/>
+                </a:solidFill>
+                <a:latin typeface="Times New Roman" pitchFamily="34" charset="0"/>
+                <a:ea typeface="Times New Roman" pitchFamily="34" charset="-122"/>
+                <a:cs typeface="Times New Roman" pitchFamily="34" charset="-120"/>
+              </a:rPr>
+              <a:t>Fill in the blanks:</a:t>
+            </a:r>
+            <a:endParaRPr lang="en-US" sz="4000" dirty="0"/>
+          </a:p>
+          <a:p>
+            <a:pPr algn="l" marL="342900" indent="-342900">
+              <a:spcAft>
+                <a:spcPts val="800"/>
+              </a:spcAft>
+              <a:buSzPct val="100000"/>
+              <a:buFont typeface="+mj-lt"/>
+              <a:buAutoNum type="arabicPeriod" startAt="1"/>
+            </a:pPr>
+            <a:r>
+              <a:rPr lang="en-US" sz="4000" dirty="0">
+                <a:solidFill>
+                  <a:srgbClr val="111111"/>
+                </a:solidFill>
+                <a:latin typeface="Times New Roman" pitchFamily="34" charset="0"/>
+                <a:ea typeface="Times New Roman" pitchFamily="34" charset="-122"/>
+                <a:cs typeface="Times New Roman" pitchFamily="34" charset="-120"/>
+              </a:rPr>
+              <a:t>The movement from villages to towns is rural ______.</a:t>
+            </a:r>
+            <a:endParaRPr lang="en-US" sz="4000" dirty="0"/>
+          </a:p>
+          <a:p>
+            <a:pPr algn="l" marL="342900" indent="-342900">
+              <a:spcAft>
+                <a:spcPts val="800"/>
+              </a:spcAft>
+              <a:buSzPct val="100000"/>
+              <a:buFont typeface="+mj-lt"/>
+              <a:buAutoNum type="arabicPeriod" startAt="1"/>
+            </a:pPr>
+            <a:r>
+              <a:rPr lang="en-US" sz="4000" dirty="0">
+                <a:solidFill>
+                  <a:srgbClr val="111111"/>
+                </a:solidFill>
+                <a:latin typeface="Times New Roman" pitchFamily="34" charset="0"/>
+                <a:ea typeface="Times New Roman" pitchFamily="34" charset="-122"/>
+                <a:cs typeface="Times New Roman" pitchFamily="34" charset="-120"/>
+              </a:rPr>
+              <a:t>Jobs in towns are ______ factors.</a:t>
+            </a:r>
+            <a:endParaRPr lang="en-US" sz="4000" dirty="0"/>
+          </a:p>
+          <a:p>
+            <a:pPr algn="l" marL="342900" indent="-342900">
+              <a:spcAft>
+                <a:spcPts val="800"/>
+              </a:spcAft>
+              <a:buSzPct val="100000"/>
+              <a:buFont typeface="+mj-lt"/>
+              <a:buAutoNum type="arabicPeriod" startAt="1"/>
+            </a:pPr>
+            <a:r>
+              <a:rPr lang="en-US" sz="4000" dirty="0">
+                <a:solidFill>
+                  <a:srgbClr val="111111"/>
+                </a:solidFill>
+                <a:latin typeface="Times New Roman" pitchFamily="34" charset="0"/>
+                <a:ea typeface="Times New Roman" pitchFamily="34" charset="-122"/>
+                <a:cs typeface="Times New Roman" pitchFamily="34" charset="-120"/>
+              </a:rPr>
+              <a:t>Poverty in villages is a ______ factor.</a:t>
+            </a:r>
+            <a:endParaRPr lang="en-US" sz="4000" dirty="0"/>
+          </a:p>
+        </p:txBody>
+      </p:sp>
+      <p:sp>
+        <p:nvSpPr>
+          <p:cNvPr id="25" name="Slide Number Placeholder 0"/>
+          <p:cNvSpPr>
+            <a:spLocks noGrp="1"/>
+          </p:cNvSpPr>
+          <p:nvPr>
+            <p:ph type="sldNum" sz="quarter" idx="4294967295"/>
+          </p:nvPr>
+        </p:nvSpPr>
+        <p:spPr>
+          <a:xfrm>
+            <a:off x="27432" y="91440"/>
+            <a:ext cx="585216" cy="475488"/>
+          </a:xfrm>
+          <a:prstGeom prst="rect">
+            <a:avLst/>
+          </a:prstGeom>
+          <a:extLst>
+            <a:ext uri="{C572A759-6A51-4108-AA02-DFA0A04FC94B}">
+              <ma14:wrappingTextBoxFlag xmlns:ma14="http://schemas.microsoft.com/office/mac/drawingml/2011/main" val="0"/>
+            </a:ext>
+          </a:extLst>
+        </p:spPr>
+        <p:txBody>
+          <a:bodyPr/>
+          <a:lstStyle>
+            <a:lvl1pPr>
+              <a:defRPr sz="2000">
+                <a:solidFill>
+                  <a:srgbClr val="FFFFFF"/>
+                </a:solidFill>
+                <a:latin typeface="Calibri"/>
+                <a:ea typeface="Calibri"/>
+                <a:cs typeface="Calibri"/>
+              </a:defRPr>
+            </a:lvl1pPr>
+          </a:lstStyle>
+          <a:p>
+            <a:pPr algn="ctr"/>
+            <a:fld id="{F7021451-1387-4CA6-816F-3879F97B5CBC}" type="slidenum">
+              <a:rPr b="1" lang="en-US"/>
+              <a:t>53</a:t>
+            </a:fld>
+            <a:endParaRPr lang="en-US"/>
+          </a:p>
+        </p:txBody>
+      </p:sp>
+    </p:spTree>
+  </p:cSld>
+  <p:clrMapOvr>
+    <a:masterClrMapping/>
+  </p:clrMapOvr>
+</p:sld>
+</file>
+
+<file path=ppt/slides/slide54.xml><?xml version="1.0" encoding="utf-8"?>
+<p:sld xmlns:a="http://schemas.openxmlformats.org/drawingml/2006/main" xmlns:r="http://schemas.openxmlformats.org/officeDocument/2006/relationships" xmlns:p="http://schemas.openxmlformats.org/presentationml/2006/main">
+  <p:cSld name="Slide 54">
+    <p:spTree>
+      <p:nvGrpSpPr>
+        <p:cNvPr id="1" name=""/>
+        <p:cNvGrpSpPr/>
+        <p:nvPr/>
+      </p:nvGrpSpPr>
+      <p:grpSpPr>
+        <a:xfrm>
+          <a:off x="0" y="0"/>
+          <a:ext cx="0" cy="0"/>
+          <a:chOff x="0" y="0"/>
+          <a:chExt cx="0" cy="0"/>
+        </a:xfrm>
+      </p:grpSpPr>
+      <p:sp>
+        <p:nvSpPr>
+          <p:cNvPr id="2" name="Text 0"/>
+          <p:cNvSpPr/>
+          <p:nvPr/>
+        </p:nvSpPr>
+        <p:spPr>
+          <a:xfrm>
+            <a:off x="457200" y="713232"/>
+            <a:ext cx="11368735" cy="274320"/>
+          </a:xfrm>
+          <a:prstGeom prst="rect">
+            <a:avLst/>
+          </a:prstGeom>
+          <a:noFill/>
+          <a:ln/>
+        </p:spPr>
+        <p:txBody>
+          <a:bodyPr wrap="square" lIns="0" tIns="0" rIns="0" bIns="0" rtlCol="0" anchor="ctr"/>
+          <a:lstStyle/>
+          <a:p>
+            <a:pPr algn="r" indent="0" marL="0">
+              <a:buNone/>
+            </a:pPr>
+            <a:r>
+              <a:rPr lang="en-US" sz="1400" b="1" dirty="0">
+                <a:solidFill>
+                  <a:srgbClr val="1C3F6E"/>
+                </a:solidFill>
+                <a:latin typeface="Calibri" pitchFamily="34" charset="0"/>
+                <a:ea typeface="Calibri" pitchFamily="34" charset="-122"/>
+                <a:cs typeface="Calibri" pitchFamily="34" charset="-120"/>
+              </a:rPr>
+              <a:t>HOMEWORK</a:t>
+            </a:r>
+            <a:endParaRPr lang="en-US" sz="1400" dirty="0"/>
+          </a:p>
+        </p:txBody>
+      </p:sp>
+      <p:pic>
+        <p:nvPicPr>
+          <p:cNvPr id="3" name="Image 0" descr="/home/claude/f4/img/minesec_sheet.png">    </p:cNvPr>
+          <p:cNvPicPr>
+            <a:picLocks noChangeAspect="1"/>
+          </p:cNvPicPr>
+          <p:nvPr/>
+        </p:nvPicPr>
+        <p:blipFill>
+          <a:blip r:embed="rId1"/>
+          <a:stretch>
+            <a:fillRect/>
+          </a:stretch>
+        </p:blipFill>
+        <p:spPr>
+          <a:xfrm>
+            <a:off x="0" y="658368"/>
+            <a:ext cx="5120640" cy="5833872"/>
+          </a:xfrm>
+          <a:prstGeom prst="rect">
+            <a:avLst/>
+          </a:prstGeom>
+        </p:spPr>
+      </p:pic>
+      <p:sp>
+        <p:nvSpPr>
+          <p:cNvPr id="4" name="Text 1"/>
+          <p:cNvSpPr/>
+          <p:nvPr/>
+        </p:nvSpPr>
+        <p:spPr>
+          <a:xfrm>
+            <a:off x="5349240" y="1005840"/>
+            <a:ext cx="6522415" cy="731520"/>
+          </a:xfrm>
+          <a:prstGeom prst="rect">
+            <a:avLst/>
+          </a:prstGeom>
+          <a:noFill/>
+          <a:ln/>
+        </p:spPr>
+        <p:txBody>
+          <a:bodyPr wrap="square" lIns="0" tIns="0" rIns="0" bIns="0" rtlCol="0" anchor="ctr">
+            <a:normAutofit/>
+          </a:bodyPr>
+          <a:lstStyle/>
+          <a:p>
+            <a:pPr algn="ctr" indent="0" marL="0">
+              <a:buNone/>
+            </a:pPr>
+            <a:r>
+              <a:rPr lang="en-US" sz="3600" b="1" dirty="0">
+                <a:solidFill>
+                  <a:srgbClr val="990011"/>
+                </a:solidFill>
+                <a:latin typeface="Times New Roman" pitchFamily="34" charset="0"/>
+                <a:ea typeface="Times New Roman" pitchFamily="34" charset="-122"/>
+                <a:cs typeface="Times New Roman" pitchFamily="34" charset="-120"/>
+              </a:rPr>
+              <a:t>Homework</a:t>
+            </a:r>
+            <a:endParaRPr lang="en-US" sz="3600" dirty="0"/>
+          </a:p>
+        </p:txBody>
+      </p:sp>
+      <p:sp>
+        <p:nvSpPr>
+          <p:cNvPr id="5" name="Text 2"/>
+          <p:cNvSpPr/>
+          <p:nvPr/>
+        </p:nvSpPr>
+        <p:spPr>
+          <a:xfrm>
+            <a:off x="5349240" y="1783080"/>
+            <a:ext cx="6522415" cy="4663440"/>
+          </a:xfrm>
+          <a:prstGeom prst="rect">
+            <a:avLst/>
+          </a:prstGeom>
+          <a:noFill/>
+          <a:ln/>
+        </p:spPr>
+        <p:txBody>
+          <a:bodyPr wrap="square" lIns="0" tIns="0" rIns="0" bIns="0" rtlCol="0" anchor="t"/>
+          <a:lstStyle/>
+          <a:p>
+            <a:pPr algn="l" indent="0" marL="0">
+              <a:spcAft>
+                <a:spcPts val="800"/>
+              </a:spcAft>
+              <a:buNone/>
+            </a:pPr>
+            <a:r>
+              <a:rPr lang="en-US" sz="4000" dirty="0">
+                <a:solidFill>
+                  <a:srgbClr val="111111"/>
+                </a:solidFill>
+                <a:latin typeface="Times New Roman" pitchFamily="34" charset="0"/>
+                <a:ea typeface="Times New Roman" pitchFamily="34" charset="-122"/>
+                <a:cs typeface="Times New Roman" pitchFamily="34" charset="-120"/>
+              </a:rPr>
+              <a:t>Propose three projects that could keep young people in your village.</a:t>
+            </a:r>
+            <a:endParaRPr lang="en-US" sz="4000" dirty="0"/>
+          </a:p>
+        </p:txBody>
+      </p:sp>
+      <p:sp>
+        <p:nvSpPr>
+          <p:cNvPr id="25" name="Slide Number Placeholder 0"/>
+          <p:cNvSpPr>
+            <a:spLocks noGrp="1"/>
+          </p:cNvSpPr>
+          <p:nvPr>
+            <p:ph type="sldNum" sz="quarter" idx="4294967295"/>
+          </p:nvPr>
+        </p:nvSpPr>
+        <p:spPr>
+          <a:xfrm>
+            <a:off x="27432" y="91440"/>
+            <a:ext cx="585216" cy="475488"/>
+          </a:xfrm>
+          <a:prstGeom prst="rect">
+            <a:avLst/>
+          </a:prstGeom>
+          <a:extLst>
+            <a:ext uri="{C572A759-6A51-4108-AA02-DFA0A04FC94B}">
+              <ma14:wrappingTextBoxFlag xmlns:ma14="http://schemas.microsoft.com/office/mac/drawingml/2011/main" val="0"/>
+            </a:ext>
+          </a:extLst>
+        </p:spPr>
+        <p:txBody>
+          <a:bodyPr/>
+          <a:lstStyle>
+            <a:lvl1pPr>
+              <a:defRPr sz="2000">
+                <a:solidFill>
+                  <a:srgbClr val="FFFFFF"/>
+                </a:solidFill>
+                <a:latin typeface="Calibri"/>
+                <a:ea typeface="Calibri"/>
+                <a:cs typeface="Calibri"/>
+              </a:defRPr>
+            </a:lvl1pPr>
+          </a:lstStyle>
+          <a:p>
+            <a:pPr algn="ctr"/>
+            <a:fld id="{F7021451-1387-4CA6-816F-3879F97B5CBC}" type="slidenum">
+              <a:rPr b="1" lang="en-US"/>
+              <a:t>54</a:t>
+            </a:fld>
+            <a:endParaRPr lang="en-US"/>
+          </a:p>
+        </p:txBody>
+      </p:sp>
+    </p:spTree>
+  </p:cSld>
+  <p:clrMapOvr>
+    <a:masterClrMapping/>
+  </p:clrMapOvr>
+</p:sld>
+</file>
+
+<file path=ppt/slides/slide55.xml><?xml version="1.0" encoding="utf-8"?>
+<p:sld xmlns:a="http://schemas.openxmlformats.org/drawingml/2006/main" xmlns:r="http://schemas.openxmlformats.org/officeDocument/2006/relationships" xmlns:p="http://schemas.openxmlformats.org/presentationml/2006/main">
+  <p:cSld name="Slide 55">
+    <p:spTree>
+      <p:nvGrpSpPr>
+        <p:cNvPr id="1" name=""/>
+        <p:cNvGrpSpPr/>
+        <p:nvPr/>
+      </p:nvGrpSpPr>
+      <p:grpSpPr>
+        <a:xfrm>
+          <a:off x="0" y="0"/>
+          <a:ext cx="0" cy="0"/>
+          <a:chOff x="0" y="0"/>
+          <a:chExt cx="0" cy="0"/>
+        </a:xfrm>
+      </p:grpSpPr>
+      <p:sp>
+        <p:nvSpPr>
+          <p:cNvPr id="2" name="Text 0"/>
+          <p:cNvSpPr/>
+          <p:nvPr/>
+        </p:nvSpPr>
+        <p:spPr>
+          <a:xfrm>
+            <a:off x="457200" y="713232"/>
+            <a:ext cx="11368735" cy="274320"/>
+          </a:xfrm>
+          <a:prstGeom prst="rect">
+            <a:avLst/>
+          </a:prstGeom>
+          <a:noFill/>
+          <a:ln/>
+        </p:spPr>
+        <p:txBody>
+          <a:bodyPr wrap="square" lIns="0" tIns="0" rIns="0" bIns="0" rtlCol="0" anchor="ctr"/>
+          <a:lstStyle/>
+          <a:p>
+            <a:pPr algn="r" indent="0" marL="0">
+              <a:buNone/>
+            </a:pPr>
+            <a:r>
+              <a:rPr lang="en-US" sz="1400" b="1" dirty="0">
+                <a:solidFill>
+                  <a:srgbClr val="1C3F6E"/>
+                </a:solidFill>
+                <a:latin typeface="Calibri" pitchFamily="34" charset="0"/>
+                <a:ea typeface="Calibri" pitchFamily="34" charset="-122"/>
+                <a:cs typeface="Calibri" pitchFamily="34" charset="-120"/>
+              </a:rPr>
+              <a:t>BILINGUAL GAME</a:t>
+            </a:r>
+            <a:endParaRPr lang="en-US" sz="1400" dirty="0"/>
+          </a:p>
+        </p:txBody>
+      </p:sp>
+      <p:sp>
+        <p:nvSpPr>
+          <p:cNvPr id="3" name="Text 1"/>
+          <p:cNvSpPr/>
+          <p:nvPr/>
+        </p:nvSpPr>
+        <p:spPr>
+          <a:xfrm>
+            <a:off x="457200" y="1005840"/>
+            <a:ext cx="11277295" cy="731520"/>
+          </a:xfrm>
+          <a:prstGeom prst="rect">
+            <a:avLst/>
+          </a:prstGeom>
+          <a:noFill/>
+          <a:ln/>
+        </p:spPr>
+        <p:txBody>
+          <a:bodyPr wrap="square" lIns="0" tIns="0" rIns="0" bIns="0" rtlCol="0" anchor="ctr"/>
+          <a:lstStyle/>
+          <a:p>
+            <a:pPr algn="ctr" indent="0" marL="0">
+              <a:buNone/>
+            </a:pPr>
+            <a:r>
+              <a:rPr lang="en-US" sz="3600" b="1" dirty="0">
+                <a:solidFill>
+                  <a:srgbClr val="990011"/>
+                </a:solidFill>
+                <a:latin typeface="Times New Roman" pitchFamily="34" charset="0"/>
+                <a:ea typeface="Times New Roman" pitchFamily="34" charset="-122"/>
+                <a:cs typeface="Times New Roman" pitchFamily="34" charset="-120"/>
+              </a:rPr>
               <a:t>Bilingual Game (Jeu Bilingue)</a:t>
             </a:r>
             <a:endParaRPr lang="en-US" sz="3600" dirty="0"/>
@@ -16346,7 +20361,7 @@
       </p:sp>
       <p:graphicFrame>
         <p:nvGraphicFramePr>
-          <p:cNvPr id="47" name="Table 0"/>
+          <p:cNvPr id="56" name="Table 0"/>
           <p:cNvGraphicFramePr>
             <a:graphicFrameLocks noGrp="1"/>
           </p:cNvGraphicFramePr>
@@ -17382,7 +21397,7 @@
             <a:pPr algn="ctr"/>
             <a:fld id="{F7021451-1387-4CA6-816F-3879F97B5CBC}" type="slidenum">
               <a:rPr b="1" lang="en-US"/>
-              <a:t>46</a:t>
+              <a:t>55</a:t>
             </a:fld>
             <a:endParaRPr lang="en-US"/>
           </a:p>
@@ -17396,9 +21411,9 @@
 </p:sld>
 </file>
 
-<file path=ppt/slides/slide47.xml><?xml version="1.0" encoding="utf-8"?>
+<file path=ppt/slides/slide56.xml><?xml version="1.0" encoding="utf-8"?>
 <p:sld xmlns:a="http://schemas.openxmlformats.org/drawingml/2006/main" xmlns:r="http://schemas.openxmlformats.org/officeDocument/2006/relationships" xmlns:p="http://schemas.openxmlformats.org/presentationml/2006/main">
-  <p:cSld name="Slide 47">
+  <p:cSld name="Slide 56">
     <p:spTree>
       <p:nvGrpSpPr>
         <p:cNvPr id="1" name=""/>
@@ -17493,7 +21508,7 @@
       </p:sp>
       <p:graphicFrame>
         <p:nvGraphicFramePr>
-          <p:cNvPr id="48" name="Table 0"/>
+          <p:cNvPr id="57" name="Table 0"/>
           <p:cNvGraphicFramePr>
             <a:graphicFrameLocks noGrp="1"/>
           </p:cNvGraphicFramePr>
@@ -17879,7 +21894,7 @@
                           <a:ea typeface="Calibri" pitchFamily="34" charset="-122"/>
                           <a:cs typeface="Calibri" pitchFamily="34" charset="-120"/>
                         </a:rPr>
-                        <a:t>Define rural exodus. Explain its causes and consequences. Propose ways to make the country side more attractive.</a:t>
+                        <a:t>Explain the causes of rural exodus. Explain its consequences. Propose ways to make the country side more attractive.</a:t>
                       </a:r>
                       <a:endParaRPr lang="en-US" sz="1600" dirty="0">
                         <a:latin typeface="Calibri" charset="0"/>
@@ -18115,7 +22130,7 @@
             <a:pPr algn="ctr"/>
             <a:fld id="{F7021451-1387-4CA6-816F-3879F97B5CBC}" type="slidenum">
               <a:rPr b="1" lang="en-US"/>
-              <a:t>47</a:t>
+              <a:t>56</a:t>
             </a:fld>
             <a:endParaRPr lang="en-US"/>
           </a:p>
@@ -18129,9 +22144,9 @@
 </p:sld>
 </file>
 
-<file path=ppt/slides/slide48.xml><?xml version="1.0" encoding="utf-8"?>
+<file path=ppt/slides/slide57.xml><?xml version="1.0" encoding="utf-8"?>
 <p:sld xmlns:a="http://schemas.openxmlformats.org/drawingml/2006/main" xmlns:r="http://schemas.openxmlformats.org/officeDocument/2006/relationships" xmlns:p="http://schemas.openxmlformats.org/presentationml/2006/main">
-  <p:cSld name="Slide 48">
+  <p:cSld name="Slide 57">
     <p:spTree>
       <p:nvGrpSpPr>
         <p:cNvPr id="1" name=""/>
@@ -18226,7 +22241,7 @@
       </p:sp>
       <p:graphicFrame>
         <p:nvGraphicFramePr>
-          <p:cNvPr id="49" name="Table 0"/>
+          <p:cNvPr id="58" name="Table 0"/>
           <p:cNvGraphicFramePr>
             <a:graphicFrameLocks noGrp="1"/>
           </p:cNvGraphicFramePr>
@@ -18336,7 +22351,7 @@
                           <a:ea typeface="Calibri" pitchFamily="34" charset="-122"/>
                           <a:cs typeface="Calibri" pitchFamily="34" charset="-120"/>
                         </a:rPr>
-                        <a:t>DEFINITIONS; Causes; Consequences; Making the Country Side More Attractive.</a:t>
+                        <a:t>DEFINITIONS; Push Factors; Pull Factors; In the Country Side; In the Towns; Making the Country Side More Attractive.</a:t>
                       </a:r>
                       <a:endParaRPr lang="en-US" sz="1600" dirty="0">
                         <a:latin typeface="Calibri" charset="0"/>
@@ -18986,7 +23001,7 @@
             <a:pPr algn="ctr"/>
             <a:fld id="{F7021451-1387-4CA6-816F-3879F97B5CBC}" type="slidenum">
               <a:rPr b="1" lang="en-US"/>
-              <a:t>48</a:t>
+              <a:t>57</a:t>
             </a:fld>
             <a:endParaRPr lang="en-US"/>
           </a:p>
@@ -19000,9 +23015,9 @@
 </p:sld>
 </file>
 
-<file path=ppt/slides/slide49.xml><?xml version="1.0" encoding="utf-8"?>
+<file path=ppt/slides/slide58.xml><?xml version="1.0" encoding="utf-8"?>
 <p:sld xmlns:a="http://schemas.openxmlformats.org/drawingml/2006/main" xmlns:r="http://schemas.openxmlformats.org/officeDocument/2006/relationships" xmlns:p="http://schemas.openxmlformats.org/presentationml/2006/main">
-  <p:cSld name="Slide 49">
+  <p:cSld name="Slide 58">
     <p:spTree>
       <p:nvGrpSpPr>
         <p:cNvPr id="1" name=""/>
@@ -19311,7 +23326,7 @@
             <a:pPr algn="ctr"/>
             <a:fld id="{F7021451-1387-4CA6-816F-3879F97B5CBC}" type="slidenum">
               <a:rPr b="1" lang="en-US"/>
-              <a:t>49</a:t>
+              <a:t>58</a:t>
             </a:fld>
             <a:endParaRPr lang="en-US"/>
           </a:p>
@@ -19325,9 +23340,9 @@
 </p:sld>
 </file>
 
-<file path=ppt/slides/slide5.xml><?xml version="1.0" encoding="utf-8"?>
+<file path=ppt/slides/slide59.xml><?xml version="1.0" encoding="utf-8"?>
 <p:sld xmlns:a="http://schemas.openxmlformats.org/drawingml/2006/main" xmlns:r="http://schemas.openxmlformats.org/officeDocument/2006/relationships" xmlns:p="http://schemas.openxmlformats.org/presentationml/2006/main">
-  <p:cSld name="Slide 5">
+  <p:cSld name="Slide 59">
     <p:spTree>
       <p:nvGrpSpPr>
         <p:cNvPr id="1" name=""/>
@@ -19375,7 +23390,7 @@
                 <a:ea typeface="Calibri" pitchFamily="34" charset="-122"/>
                 <a:cs typeface="Calibri" pitchFamily="34" charset="-120"/>
               </a:rPr>
-              <a:t>HOMEWORK CORRECTION</a:t>
+              <a:t>REFERENCES</a:t>
             </a:r>
             <a:endParaRPr lang="en-US" sz="1400" dirty="0"/>
           </a:p>
@@ -19398,7 +23413,7 @@
         <p:spPr>
           <a:xfrm>
             <a:off x="0" y="658368"/>
-            <a:ext cx="5120640" cy="5833872"/>
+            <a:ext cx="3840480" cy="5833872"/>
           </a:xfrm>
           <a:prstGeom prst="rect">
             <a:avLst/>
@@ -19413,8 +23428,8 @@
         </p:nvSpPr>
         <p:spPr>
           <a:xfrm>
-            <a:off x="5349240" y="1005840"/>
-            <a:ext cx="6522415" cy="731520"/>
+            <a:off x="4069080" y="1005840"/>
+            <a:ext cx="7802575" cy="731520"/>
           </a:xfrm>
           <a:prstGeom prst="rect">
             <a:avLst/>
@@ -19440,7 +23455,7 @@
                 <a:ea typeface="Times New Roman" pitchFamily="34" charset="-122"/>
                 <a:cs typeface="Times New Roman" pitchFamily="34" charset="-120"/>
               </a:rPr>
-              <a:t>Correction: Possible Answer</a:t>
+              <a:t>References</a:t>
             </a:r>
             <a:endParaRPr lang="en-US" sz="3600" dirty="0"/>
           </a:p>
@@ -19454,8 +23469,8 @@
         </p:nvSpPr>
         <p:spPr>
           <a:xfrm>
-            <a:off x="5349240" y="1783080"/>
-            <a:ext cx="6522415" cy="4663440"/>
+            <a:off x="4069080" y="1783080"/>
+            <a:ext cx="7802575" cy="4663440"/>
           </a:xfrm>
           <a:prstGeom prst="rect">
             <a:avLst/>
@@ -19467,24 +23482,130 @@
           <a:bodyPr wrap="square" lIns="0" tIns="0" rIns="0" bIns="0" rtlCol="0" anchor="t"/>
           <a:lstStyle/>
           <a:p>
-            <a:pPr algn="l" indent="0" marL="0">
+            <a:pPr algn="l" marL="342900" indent="-342900">
               <a:spcAft>
                 <a:spcPts val="800"/>
               </a:spcAft>
-              <a:buNone/>
-            </a:pPr>
-            <a:r>
-              <a:rPr lang="en-US" sz="4000" dirty="0">
+              <a:buSzPct val="100000"/>
+              <a:buChar char="•"/>
+            </a:pPr>
+            <a:r>
+              <a:rPr lang="en-US" sz="1800" dirty="0">
                 <a:solidFill>
                   <a:srgbClr val="111111"/>
                 </a:solidFill>
-                <a:latin typeface="Times New Roman" pitchFamily="34" charset="0"/>
-                <a:ea typeface="Times New Roman" pitchFamily="34" charset="-122"/>
-                <a:cs typeface="Times New Roman" pitchFamily="34" charset="-120"/>
-              </a:rPr>
-              <a:t>From villages: onions, groundnuts, maize (or firewood). From town: soap, cooking oil, clothes (also phones, sugar).</a:t>
-            </a:r>
-            <a:endParaRPr lang="en-US" sz="4000" dirty="0"/>
+                <a:latin typeface="Calibri" pitchFamily="34" charset="0"/>
+                <a:ea typeface="Calibri" pitchFamily="34" charset="-122"/>
+                <a:cs typeface="Calibri" pitchFamily="34" charset="-120"/>
+              </a:rPr>
+              <a:t>Geography Syllabus, Forms I–V, MINESEC (2023) — Form 2, Module 2: Space Occupation.</a:t>
+            </a:r>
+            <a:endParaRPr lang="en-US" sz="1800" dirty="0"/>
+          </a:p>
+          <a:p>
+            <a:pPr algn="l" marL="342900" indent="-342900">
+              <a:spcAft>
+                <a:spcPts val="800"/>
+              </a:spcAft>
+              <a:buSzPct val="100000"/>
+              <a:buChar char="•"/>
+            </a:pPr>
+            <a:r>
+              <a:rPr lang="en-US" sz="1800" dirty="0">
+                <a:solidFill>
+                  <a:srgbClr val="111111"/>
+                </a:solidFill>
+                <a:latin typeface="Calibri" pitchFamily="34" charset="0"/>
+                <a:ea typeface="Calibri" pitchFamily="34" charset="-122"/>
+                <a:cs typeface="Calibri" pitchFamily="34" charset="-120"/>
+              </a:rPr>
+              <a:t>Photo, Activity 2: “Cameroon - UN Women's Gender Road Project” by UN Women Gallery, CC BY-NC-ND 2.0, via Flickr (https://www.flickr.com/photos/51431730@N04/40672356003)</a:t>
+            </a:r>
+            <a:endParaRPr lang="en-US" sz="1800" dirty="0"/>
+          </a:p>
+          <a:p>
+            <a:pPr algn="l" marL="342900" indent="-342900">
+              <a:spcAft>
+                <a:spcPts val="800"/>
+              </a:spcAft>
+              <a:buSzPct val="100000"/>
+              <a:buChar char="•"/>
+            </a:pPr>
+            <a:r>
+              <a:rPr lang="en-US" sz="1800" dirty="0">
+                <a:solidFill>
+                  <a:srgbClr val="111111"/>
+                </a:solidFill>
+                <a:latin typeface="Calibri" pitchFamily="34" charset="0"/>
+                <a:ea typeface="Calibri" pitchFamily="34" charset="-122"/>
+                <a:cs typeface="Calibri" pitchFamily="34" charset="-120"/>
+              </a:rPr>
+              <a:t>Photo, Activity 3: “Yaoundé” by wili_hybrid, CC BY-NC 2.0, via Flickr (https://www.flickr.com/photos/62223880@N00/5677034246)</a:t>
+            </a:r>
+            <a:endParaRPr lang="en-US" sz="1800" dirty="0"/>
+          </a:p>
+          <a:p>
+            <a:pPr algn="l" marL="342900" indent="-342900">
+              <a:spcAft>
+                <a:spcPts val="800"/>
+              </a:spcAft>
+              <a:buSzPct val="100000"/>
+              <a:buChar char="•"/>
+            </a:pPr>
+            <a:r>
+              <a:rPr lang="en-US" sz="1800" dirty="0">
+                <a:solidFill>
+                  <a:srgbClr val="111111"/>
+                </a:solidFill>
+                <a:latin typeface="Calibri" pitchFamily="34" charset="0"/>
+                <a:ea typeface="Calibri" pitchFamily="34" charset="-122"/>
+                <a:cs typeface="Calibri" pitchFamily="34" charset="-120"/>
+              </a:rPr>
+              <a:t>Photo, Activity 4: “Mathare” by Book Aid International, CC BY-NC-ND 2.0, via Flickr (https://www.flickr.com/photos/45024905@N07/4135561707)</a:t>
+            </a:r>
+            <a:endParaRPr lang="en-US" sz="1800" dirty="0"/>
+          </a:p>
+          <a:p>
+            <a:pPr algn="l" marL="342900" indent="-342900">
+              <a:spcAft>
+                <a:spcPts val="800"/>
+              </a:spcAft>
+              <a:buSzPct val="100000"/>
+              <a:buChar char="•"/>
+            </a:pPr>
+            <a:r>
+              <a:rPr lang="en-US" sz="1800" dirty="0">
+                <a:solidFill>
+                  <a:srgbClr val="111111"/>
+                </a:solidFill>
+                <a:latin typeface="Calibri" pitchFamily="34" charset="0"/>
+                <a:ea typeface="Calibri" pitchFamily="34" charset="-122"/>
+                <a:cs typeface="Calibri" pitchFamily="34" charset="-120"/>
+              </a:rPr>
+              <a:t>Photo, Activity 5: “Girls from the village of Mwachilolo head to the Pump Aid Elephant wat” by PumpAid, CC BY 2.0, via Flickr (https://www.flickr.com/photos/84463652@N06/8161357208)</a:t>
+            </a:r>
+            <a:endParaRPr lang="en-US" sz="1800" dirty="0"/>
+          </a:p>
+          <a:p>
+            <a:pPr algn="l" marL="342900" indent="-342900">
+              <a:spcAft>
+                <a:spcPts val="800"/>
+              </a:spcAft>
+              <a:buSzPct val="100000"/>
+              <a:buChar char="•"/>
+            </a:pPr>
+            <a:r>
+              <a:rPr lang="en-US" sz="1800" dirty="0">
+                <a:solidFill>
+                  <a:srgbClr val="111111"/>
+                </a:solidFill>
+                <a:latin typeface="Calibri" pitchFamily="34" charset="0"/>
+                <a:ea typeface="Calibri" pitchFamily="34" charset="-122"/>
+                <a:cs typeface="Calibri" pitchFamily="34" charset="-120"/>
+              </a:rPr>
+              <a:t>Diagrams and animations: drawn for this lesson (Geography Department).</a:t>
+            </a:r>
+            <a:endParaRPr lang="en-US" sz="1800" dirty="0"/>
           </a:p>
         </p:txBody>
       </p:sp>
@@ -19530,332 +23651,7 @@
             <a:pPr algn="ctr"/>
             <a:fld id="{F7021451-1387-4CA6-816F-3879F97B5CBC}" type="slidenum">
               <a:rPr b="1" lang="en-US"/>
-              <a:t>5</a:t>
-            </a:fld>
-            <a:endParaRPr lang="en-US"/>
-          </a:p>
-        </p:txBody>
-      </p:sp>
-    </p:spTree>
-  </p:cSld>
-  <p:clrMapOvr>
-    <a:masterClrMapping/>
-  </p:clrMapOvr>
-</p:sld>
-</file>
-
-<file path=ppt/slides/slide50.xml><?xml version="1.0" encoding="utf-8"?>
-<p:sld xmlns:a="http://schemas.openxmlformats.org/drawingml/2006/main" xmlns:r="http://schemas.openxmlformats.org/officeDocument/2006/relationships" xmlns:p="http://schemas.openxmlformats.org/presentationml/2006/main">
-  <p:cSld name="Slide 50">
-    <p:spTree>
-      <p:nvGrpSpPr>
-        <p:cNvPr id="1" name=""/>
-        <p:cNvGrpSpPr/>
-        <p:nvPr/>
-      </p:nvGrpSpPr>
-      <p:grpSpPr>
-        <a:xfrm>
-          <a:off x="0" y="0"/>
-          <a:ext cx="0" cy="0"/>
-          <a:chOff x="0" y="0"/>
-          <a:chExt cx="0" cy="0"/>
-        </a:xfrm>
-      </p:grpSpPr>
-      <p:sp>
-        <p:nvSpPr>
-          <p:cNvPr id="2" name="Text 0"/>
-          <p:cNvSpPr/>
-          <p:nvPr/>
-        </p:nvSpPr>
-        <p:spPr>
-          <a:xfrm>
-            <a:off x="457200" y="713232"/>
-            <a:ext cx="11368735" cy="274320"/>
-          </a:xfrm>
-          <a:prstGeom prst="rect">
-            <a:avLst/>
-          </a:prstGeom>
-          <a:noFill/>
-          <a:ln/>
-        </p:spPr>
-        <p:txBody>
-          <a:bodyPr wrap="square" lIns="0" tIns="0" rIns="0" bIns="0" rtlCol="0" anchor="ctr"/>
-          <a:lstStyle/>
-          <a:p>
-            <a:pPr algn="r" indent="0" marL="0">
-              <a:buNone/>
-            </a:pPr>
-            <a:r>
-              <a:rPr lang="en-US" sz="1400" b="1" dirty="0">
-                <a:solidFill>
-                  <a:srgbClr val="1C3F6E"/>
-                </a:solidFill>
-                <a:latin typeface="Calibri" pitchFamily="34" charset="0"/>
-                <a:ea typeface="Calibri" pitchFamily="34" charset="-122"/>
-                <a:cs typeface="Calibri" pitchFamily="34" charset="-120"/>
-              </a:rPr>
-              <a:t>REFERENCES</a:t>
-            </a:r>
-            <a:endParaRPr lang="en-US" sz="1400" dirty="0"/>
-          </a:p>
-        </p:txBody>
-      </p:sp>
-      <p:pic>
-        <p:nvPicPr>
-          <p:cNvPr id="3" name="Image 0" descr="/home/claude/f4/img/minesec_sheet.png">    </p:cNvPr>
-          <p:cNvPicPr>
-            <a:picLocks noChangeAspect="1"/>
-          </p:cNvPicPr>
-          <p:nvPr/>
-        </p:nvPicPr>
-        <p:blipFill>
-          <a:blip r:embed="rId1"/>
-          <a:stretch>
-            <a:fillRect/>
-          </a:stretch>
-        </p:blipFill>
-        <p:spPr>
-          <a:xfrm>
-            <a:off x="0" y="658368"/>
-            <a:ext cx="3840480" cy="5833872"/>
-          </a:xfrm>
-          <a:prstGeom prst="rect">
-            <a:avLst/>
-          </a:prstGeom>
-        </p:spPr>
-      </p:pic>
-      <p:sp>
-        <p:nvSpPr>
-          <p:cNvPr id="4" name="Text 1"/>
-          <p:cNvSpPr/>
-          <p:nvPr/>
-        </p:nvSpPr>
-        <p:spPr>
-          <a:xfrm>
-            <a:off x="4069080" y="1005840"/>
-            <a:ext cx="7802575" cy="731520"/>
-          </a:xfrm>
-          <a:prstGeom prst="rect">
-            <a:avLst/>
-          </a:prstGeom>
-          <a:noFill/>
-          <a:ln/>
-        </p:spPr>
-        <p:txBody>
-          <a:bodyPr wrap="square" lIns="0" tIns="0" rIns="0" bIns="0" rtlCol="0" anchor="ctr">
-            <a:normAutofit/>
-          </a:bodyPr>
-          <a:lstStyle/>
-          <a:p>
-            <a:pPr algn="ctr" indent="0" marL="0">
-              <a:buNone/>
-            </a:pPr>
-            <a:r>
-              <a:rPr lang="en-US" sz="3600" b="1" dirty="0">
-                <a:solidFill>
-                  <a:srgbClr val="990011"/>
-                </a:solidFill>
-                <a:latin typeface="Times New Roman" pitchFamily="34" charset="0"/>
-                <a:ea typeface="Times New Roman" pitchFamily="34" charset="-122"/>
-                <a:cs typeface="Times New Roman" pitchFamily="34" charset="-120"/>
-              </a:rPr>
-              <a:t>References</a:t>
-            </a:r>
-            <a:endParaRPr lang="en-US" sz="3600" dirty="0"/>
-          </a:p>
-        </p:txBody>
-      </p:sp>
-      <p:sp>
-        <p:nvSpPr>
-          <p:cNvPr id="5" name="Text 2"/>
-          <p:cNvSpPr/>
-          <p:nvPr/>
-        </p:nvSpPr>
-        <p:spPr>
-          <a:xfrm>
-            <a:off x="4069080" y="1783080"/>
-            <a:ext cx="7802575" cy="4663440"/>
-          </a:xfrm>
-          <a:prstGeom prst="rect">
-            <a:avLst/>
-          </a:prstGeom>
-          <a:noFill/>
-          <a:ln/>
-        </p:spPr>
-        <p:txBody>
-          <a:bodyPr wrap="square" lIns="0" tIns="0" rIns="0" bIns="0" rtlCol="0" anchor="t"/>
-          <a:lstStyle/>
-          <a:p>
-            <a:pPr algn="l" marL="342900" indent="-342900">
-              <a:spcAft>
-                <a:spcPts val="800"/>
-              </a:spcAft>
-              <a:buSzPct val="100000"/>
-              <a:buChar char="•"/>
-            </a:pPr>
-            <a:r>
-              <a:rPr lang="en-US" sz="1800" dirty="0">
-                <a:solidFill>
-                  <a:srgbClr val="111111"/>
-                </a:solidFill>
-                <a:latin typeface="Calibri" pitchFamily="34" charset="0"/>
-                <a:ea typeface="Calibri" pitchFamily="34" charset="-122"/>
-                <a:cs typeface="Calibri" pitchFamily="34" charset="-120"/>
-              </a:rPr>
-              <a:t>Geography Syllabus, Forms I–V, MINESEC (2023) — Form 2, Module 2: Space Occupation.</a:t>
-            </a:r>
-            <a:endParaRPr lang="en-US" sz="1800" dirty="0"/>
-          </a:p>
-          <a:p>
-            <a:pPr algn="l" marL="342900" indent="-342900">
-              <a:spcAft>
-                <a:spcPts val="800"/>
-              </a:spcAft>
-              <a:buSzPct val="100000"/>
-              <a:buChar char="•"/>
-            </a:pPr>
-            <a:r>
-              <a:rPr lang="en-US" sz="1800" dirty="0">
-                <a:solidFill>
-                  <a:srgbClr val="111111"/>
-                </a:solidFill>
-                <a:latin typeface="Calibri" pitchFamily="34" charset="0"/>
-                <a:ea typeface="Calibri" pitchFamily="34" charset="-122"/>
-                <a:cs typeface="Calibri" pitchFamily="34" charset="-120"/>
-              </a:rPr>
-              <a:t>Photo, Activity 2: “Cameroon - UN Women's Gender Road Project” by UN Women Gallery, CC BY-NC-ND 2.0, via Flickr (https://www.flickr.com/photos/51431730@N04/40672356003)</a:t>
-            </a:r>
-            <a:endParaRPr lang="en-US" sz="1800" dirty="0"/>
-          </a:p>
-          <a:p>
-            <a:pPr algn="l" marL="342900" indent="-342900">
-              <a:spcAft>
-                <a:spcPts val="800"/>
-              </a:spcAft>
-              <a:buSzPct val="100000"/>
-              <a:buChar char="•"/>
-            </a:pPr>
-            <a:r>
-              <a:rPr lang="en-US" sz="1800" dirty="0">
-                <a:solidFill>
-                  <a:srgbClr val="111111"/>
-                </a:solidFill>
-                <a:latin typeface="Calibri" pitchFamily="34" charset="0"/>
-                <a:ea typeface="Calibri" pitchFamily="34" charset="-122"/>
-                <a:cs typeface="Calibri" pitchFamily="34" charset="-120"/>
-              </a:rPr>
-              <a:t>Photo, Activity 3: “Yaoundé” by wili_hybrid, CC BY-NC 2.0, via Flickr (https://www.flickr.com/photos/62223880@N00/5677034246)</a:t>
-            </a:r>
-            <a:endParaRPr lang="en-US" sz="1800" dirty="0"/>
-          </a:p>
-          <a:p>
-            <a:pPr algn="l" marL="342900" indent="-342900">
-              <a:spcAft>
-                <a:spcPts val="800"/>
-              </a:spcAft>
-              <a:buSzPct val="100000"/>
-              <a:buChar char="•"/>
-            </a:pPr>
-            <a:r>
-              <a:rPr lang="en-US" sz="1800" dirty="0">
-                <a:solidFill>
-                  <a:srgbClr val="111111"/>
-                </a:solidFill>
-                <a:latin typeface="Calibri" pitchFamily="34" charset="0"/>
-                <a:ea typeface="Calibri" pitchFamily="34" charset="-122"/>
-                <a:cs typeface="Calibri" pitchFamily="34" charset="-120"/>
-              </a:rPr>
-              <a:t>Photo, Activity 4: “Mathare” by Book Aid International, CC BY-NC-ND 2.0, via Flickr (https://www.flickr.com/photos/45024905@N07/4135561707)</a:t>
-            </a:r>
-            <a:endParaRPr lang="en-US" sz="1800" dirty="0"/>
-          </a:p>
-          <a:p>
-            <a:pPr algn="l" marL="342900" indent="-342900">
-              <a:spcAft>
-                <a:spcPts val="800"/>
-              </a:spcAft>
-              <a:buSzPct val="100000"/>
-              <a:buChar char="•"/>
-            </a:pPr>
-            <a:r>
-              <a:rPr lang="en-US" sz="1800" dirty="0">
-                <a:solidFill>
-                  <a:srgbClr val="111111"/>
-                </a:solidFill>
-                <a:latin typeface="Calibri" pitchFamily="34" charset="0"/>
-                <a:ea typeface="Calibri" pitchFamily="34" charset="-122"/>
-                <a:cs typeface="Calibri" pitchFamily="34" charset="-120"/>
-              </a:rPr>
-              <a:t>Photo, Activity 5: “Girls from the village of Mwachilolo head to the Pump Aid Elephant wat” by PumpAid, CC BY 2.0, via Flickr (https://www.flickr.com/photos/84463652@N06/8161357208)</a:t>
-            </a:r>
-            <a:endParaRPr lang="en-US" sz="1800" dirty="0"/>
-          </a:p>
-          <a:p>
-            <a:pPr algn="l" marL="342900" indent="-342900">
-              <a:spcAft>
-                <a:spcPts val="800"/>
-              </a:spcAft>
-              <a:buSzPct val="100000"/>
-              <a:buChar char="•"/>
-            </a:pPr>
-            <a:r>
-              <a:rPr lang="en-US" sz="1800" dirty="0">
-                <a:solidFill>
-                  <a:srgbClr val="111111"/>
-                </a:solidFill>
-                <a:latin typeface="Calibri" pitchFamily="34" charset="0"/>
-                <a:ea typeface="Calibri" pitchFamily="34" charset="-122"/>
-                <a:cs typeface="Calibri" pitchFamily="34" charset="-120"/>
-              </a:rPr>
-              <a:t>Diagrams and animations: drawn for this lesson (Geography Department).</a:t>
-            </a:r>
-            <a:endParaRPr lang="en-US" sz="1800" dirty="0"/>
-          </a:p>
-        </p:txBody>
-      </p:sp>
-      <p:sp>
-        <p:nvSpPr>
-          <p:cNvPr id="25" name="Slide Number Placeholder 0"/>
-          <p:cNvSpPr>
-            <a:spLocks noGrp="1"/>
-          </p:cNvSpPr>
-          <p:nvPr>
-            <p:ph type="sldNum" sz="quarter" idx="4294967295"/>
-          </p:nvPr>
-        </p:nvSpPr>
-        <p:spPr>
-          <a:xfrm>
-            <a:off x="27432" y="91440"/>
-            <a:ext cx="585216" cy="475488"/>
-          </a:xfrm>
-          <a:prstGeom prst="rect">
-            <a:avLst/>
-          </a:prstGeom>
-          <a:extLst>
-            <a:ext uri="{C572A759-6A51-4108-AA02-DFA0A04FC94B}">
-              <ma14:wrappingTextBoxFlag xmlns:ma14="http://schemas.microsoft.com/office/mac/drawingml/2011/main" val="0"/>
-            </a:ext>
-          </a:extLst>
-        </p:spPr>
-        <p:txBody>
-          <a:bodyPr/>
-          <a:lstStyle>
-            <a:lvl1pPr>
-              <a:defRPr sz="2000">
-                <a:solidFill>
-                  <a:srgbClr val="FFFFFF"/>
-                </a:solidFill>
-                <a:latin typeface="Calibri"/>
-                <a:ea typeface="Calibri"/>
-                <a:cs typeface="Calibri"/>
-              </a:defRPr>
-            </a:lvl1pPr>
-          </a:lstStyle>
-          <a:p>
-            <a:pPr algn="ctr"/>
-            <a:fld id="{F7021451-1387-4CA6-816F-3879F97B5CBC}" type="slidenum">
-              <a:rPr b="1" lang="en-US"/>
-              <a:t>50</a:t>
+              <a:t>59</a:t>
             </a:fld>
             <a:endParaRPr lang="en-US"/>
           </a:p>
@@ -20379,7 +24175,7 @@
                 <a:ea typeface="Times New Roman" pitchFamily="34" charset="-122"/>
                 <a:cs typeface="Times New Roman" pitchFamily="34" charset="-120"/>
               </a:rPr>
-              <a:t>Define rural exodus.</a:t>
+              <a:t>Explain the causes of rural exodus.</a:t>
             </a:r>
             <a:endParaRPr lang="en-US" sz="4000" dirty="0"/>
           </a:p>
@@ -20401,7 +24197,7 @@
                 <a:ea typeface="Times New Roman" pitchFamily="34" charset="-122"/>
                 <a:cs typeface="Times New Roman" pitchFamily="34" charset="-120"/>
               </a:rPr>
-              <a:t>Explain its causes and consequences.</a:t>
+              <a:t>Explain its consequences.</a:t>
             </a:r>
             <a:endParaRPr lang="en-US" sz="4000" dirty="0"/>
           </a:p>
@@ -20820,7 +24616,7 @@
         <p:spPr>
           <a:xfrm>
             <a:off x="0" y="658368"/>
-            <a:ext cx="5120640" cy="5833872"/>
+            <a:ext cx="2468880" cy="5833872"/>
           </a:xfrm>
           <a:prstGeom prst="rect">
             <a:avLst/>
@@ -20835,8 +24631,8 @@
         </p:nvSpPr>
         <p:spPr>
           <a:xfrm>
-            <a:off x="5349240" y="1005840"/>
-            <a:ext cx="6522415" cy="731520"/>
+            <a:off x="2697480" y="1005840"/>
+            <a:ext cx="9174175" cy="731520"/>
           </a:xfrm>
           <a:prstGeom prst="rect">
             <a:avLst/>
@@ -20876,8 +24672,8 @@
         </p:nvSpPr>
         <p:spPr>
           <a:xfrm>
-            <a:off x="5349240" y="1783080"/>
-            <a:ext cx="6522415" cy="4663440"/>
+            <a:off x="2697480" y="1783080"/>
+            <a:ext cx="9174175" cy="4663440"/>
           </a:xfrm>
           <a:prstGeom prst="rect">
             <a:avLst/>
@@ -20904,7 +24700,7 @@
                 <a:ea typeface="Times New Roman" pitchFamily="34" charset="-122"/>
                 <a:cs typeface="Times New Roman" pitchFamily="34" charset="-120"/>
               </a:rPr>
-              <a:t>In Hamadou's village, most young people have left for Garoua, Douala and Yaoundé. Only old people and children remain, and many fields are no longer farmed.</a:t>
+              <a:t>In Hamadou's village, most young people have left for Garoua, Douala and Yaoundé. Only old people and children remain, and many fields are no longer farmed. The village chief asks: "Why do our young people leave, and what can we do to keep them here?"</a:t>
             </a:r>
             <a:endParaRPr lang="en-US" sz="4000" dirty="0"/>
           </a:p>

--- a/lecons/F2/19_F2_M2_FS07_Rural_Exodus_in_Cameroon.pptx
+++ b/lecons/F2/19_F2_M2_FS07_Rural_Exodus_in_Cameroon.pptx
@@ -3464,7 +3464,7 @@
           <a:p>
             <a:r>
               <a:rPr lang="en-US" dirty="0"/>
-              <a:t>Before we start the new lesson, let us correct the homework I gave you at the end of Lesson 8: Relationships between Towns and Country Sides. The question was: List three products your family buys from villages and three goods villagers buy in town. Take out your exercise books.</a:t>
+              <a:t>Before we start the new lesson, let us correct the homework I gave you at the end of Lesson 8: Relationships between Towns and Country Sides. The question was: Define rural exodus. Take out your exercise books.</a:t>
             </a:r>
             <a:endParaRPr lang="en-US" dirty="0"/>
           </a:p>
@@ -4432,7 +4432,7 @@
           <a:p>
             <a:r>
               <a:rPr lang="en-US" dirty="0"/>
-              <a:t>Here is a good answer. From villages: onions, groundnuts, maize (or firewood). From town: soap, cooking oil, clothes (also phones, sugar). Compare it with your own answer and correct your work in red.</a:t>
+              <a:t>Here is a good answer. It is the massive movement of people from villages to towns. Compare it with your own answer and correct your work in red.</a:t>
             </a:r>
             <a:endParaRPr lang="en-US" dirty="0"/>
           </a:p>
@@ -4872,7 +4872,7 @@
           <a:p>
             <a:r>
               <a:rPr lang="en-US" dirty="0"/>
-              <a:t>For your homework: Propose three projects that could keep young people in your village. We shall correct it at the beginning of our next lesson.</a:t>
+              <a:t>For your homework: Give two ways to make villages more attractive. We shall correct it at the beginning of our next lesson.</a:t>
             </a:r>
             <a:endParaRPr lang="en-US" dirty="0"/>
           </a:p>
@@ -15848,7 +15848,7 @@
                 <a:ea typeface="Times New Roman" pitchFamily="34" charset="-122"/>
                 <a:cs typeface="Times New Roman" pitchFamily="34" charset="-120"/>
               </a:rPr>
-              <a:t>List three products your family buys from villages and three goods villagers buy in town.</a:t>
+              <a:t>Define rural exodus.</a:t>
             </a:r>
             <a:endParaRPr lang="en-US" sz="4000" dirty="0"/>
           </a:p>
@@ -19041,7 +19041,7 @@
                 <a:ea typeface="Times New Roman" pitchFamily="34" charset="-122"/>
                 <a:cs typeface="Times New Roman" pitchFamily="34" charset="-120"/>
               </a:rPr>
-              <a:t>From villages: onions, groundnuts, maize (or firewood). From town: soap, cooking oil, clothes (also phones, sugar).</a:t>
+              <a:t>It is the massive movement of people from villages to towns.</a:t>
             </a:r>
             <a:endParaRPr lang="en-US" sz="4000" dirty="0"/>
           </a:p>
@@ -20202,7 +20202,7 @@
                 <a:ea typeface="Times New Roman" pitchFamily="34" charset="-122"/>
                 <a:cs typeface="Times New Roman" pitchFamily="34" charset="-120"/>
               </a:rPr>
-              <a:t>Propose three projects that could keep young people in your village.</a:t>
+              <a:t>Give two ways to make villages more attractive.</a:t>
             </a:r>
             <a:endParaRPr lang="en-US" sz="4000" dirty="0"/>
           </a:p>
@@ -22627,7 +22627,7 @@
                           <a:ea typeface="Calibri" pitchFamily="34" charset="-122"/>
                           <a:cs typeface="Calibri" pitchFamily="34" charset="-120"/>
                         </a:rPr>
-                        <a:t>Propose three projects that could keep young people in your village.</a:t>
+                        <a:t>Give two ways to make villages more attractive.</a:t>
                       </a:r>
                       <a:endParaRPr lang="en-US" sz="1600" dirty="0">
                         <a:latin typeface="Calibri" charset="0"/>
